--- a/deck/Team G27.pptx
+++ b/deck/Team G27.pptx
@@ -2640,7 +2640,7 @@
           <a:p>
             <a:r>
               <a:rPr lang="en-US" dirty="0"/>
-              <a:t>We prove the model in 90 days before scaling anything. Four leaks flow into one process. Set up, weeks 1 to 4: an abandoner segment in CJA, the consent split and Passport cards, delivery events linked to each person, and CJA audiences published through Real-Time CDP. Launch, weeks 5 to 8, in the South: cart reminders at one hour and 24 hours, Passport and SMS in every box, care content then a second category by day 21, and suppression with frequency caps. Measure, weeks 9 to 12, against the 10% randomized holdout: cart recovery, opt-ins, 30-day repeat and incremental orders per retargeting dollar. On day 90 we decide: scale what beats the holdout, adjust what is mixed, stop what doesn't. No new budget.</a:t>
+              <a:t>The 90-day pilot, lever by lever. Lever 1, capture every buyer, runs on SMS at checkout, app order tracking and email reminders: we split consent, build the abandoner segment in CJA and print Passport cards, then launch and measure cart recovery and opt-ins. Lever 2, the golden month, runs on shipping events fed into CJA and Journey Optimizer, sending a care guide at delivery and a second category by day 21; we measure 30-day repeat. Both are paid from Option A's $2 to 3M inside the existing $6M owned line. Lever 3, never pay twice, turns CJA audiences into daily suppression lists through Real-Time CDP for Meta, Google and TikTok, inside the $14M retargeting line at no extra cost. Seven of the 14 programs start in the pilot; the other seven wait for the holdout. Prospecting and search stay untouched; influencer briefs shift to proof. On day 90 we scale, adjust or stop, and any move across budget lines is sized by the holdout.</a:t>
             </a:r>
             <a:endParaRPr lang="en-US" dirty="0"/>
           </a:p>
@@ -47823,7 +47823,7 @@
                 <a:ea typeface="Inter" pitchFamily="34" charset="-122"/>
                 <a:cs typeface="Inter" pitchFamily="34" charset="-120"/>
               </a:rPr>
-              <a:t>Source: leaks from slides 3–6 (Adobe CJA A1, A2, A3b, A6; case Exhibits G, I, N). Pilot design and timing are the team's. No new budget: spend stays inside the $14M retargeting and $6M owned lines (Exhibit I).</a:t>
+              <a:t>Source: case Exhibits G (budget), I (cost by option), N (regions); Adobe CJA A1, A2, A3b, A6, Cohort Table. Pilot design, timing and program sequencing are the team's. 10% randomized South holdout throughout.</a:t>
             </a:r>
             <a:endParaRPr lang="en-US" sz="800" dirty="0"/>
           </a:p>
@@ -47876,8 +47876,8 @@
         </p:nvSpPr>
         <p:spPr>
           <a:xfrm>
-            <a:off x="502920" y="1261872"/>
-            <a:ext cx="2057400" cy="365760"/>
+            <a:off x="502920" y="1207008"/>
+            <a:ext cx="2103120" cy="310896"/>
           </a:xfrm>
           <a:prstGeom prst="rect">
             <a:avLst/>
@@ -47893,7 +47893,7 @@
               <a:buNone/>
             </a:pPr>
             <a:r>
-              <a:rPr lang="en-US" sz="1300" b="1" dirty="0">
+              <a:rPr lang="en-US" sz="1100" b="1" dirty="0">
                 <a:solidFill>
                   <a:srgbClr val="0A1F44"/>
                 </a:solidFill>
@@ -47901,26 +47901,296 @@
                 <a:ea typeface="Inter" pitchFamily="34" charset="-122"/>
                 <a:cs typeface="Inter" pitchFamily="34" charset="-120"/>
               </a:rPr>
-              <a:t>Four leaks</a:t>
-            </a:r>
-            <a:endParaRPr lang="en-US" sz="1300" dirty="0"/>
-          </a:p>
-        </p:txBody>
-      </p:sp>
-      <p:sp>
-        <p:nvSpPr>
-          <p:cNvPr id="10" name="Shape 7"/>
-          <p:cNvSpPr/>
-          <p:nvPr/>
-        </p:nvSpPr>
-        <p:spPr>
-          <a:xfrm>
-            <a:off x="502920" y="1828800"/>
-            <a:ext cx="2057400" cy="758952"/>
+              <a:t>Lever</a:t>
+            </a:r>
+            <a:endParaRPr lang="en-US" sz="1100" dirty="0"/>
+          </a:p>
+        </p:txBody>
+      </p:sp>
+      <p:sp>
+        <p:nvSpPr>
+          <p:cNvPr id="10" name="Text 7"/>
+          <p:cNvSpPr txBox="1"/>
+          <p:nvPr/>
+        </p:nvSpPr>
+        <p:spPr>
+          <a:xfrm>
+            <a:off x="2697480" y="1207008"/>
+            <a:ext cx="1600200" cy="310896"/>
+          </a:xfrm>
+          <a:prstGeom prst="rect">
+            <a:avLst/>
+          </a:prstGeom>
+          <a:noFill/>
+          <a:ln/>
+        </p:spPr>
+        <p:txBody>
+          <a:bodyPr wrap="square" lIns="0" tIns="0" rIns="0" bIns="0" rtlCol="0" anchor="ctr"/>
+          <a:lstStyle/>
+          <a:p>
+            <a:pPr indent="0" marL="0">
+              <a:buNone/>
+            </a:pPr>
+            <a:r>
+              <a:rPr lang="en-US" sz="1100" b="1" dirty="0">
+                <a:solidFill>
+                  <a:srgbClr val="0A1F44"/>
+                </a:solidFill>
+                <a:latin typeface="Inter" pitchFamily="34" charset="0"/>
+                <a:ea typeface="Inter" pitchFamily="34" charset="-122"/>
+                <a:cs typeface="Inter" pitchFamily="34" charset="-120"/>
+              </a:rPr>
+              <a:t>Built with</a:t>
+            </a:r>
+            <a:endParaRPr lang="en-US" sz="1100" dirty="0"/>
+          </a:p>
+        </p:txBody>
+      </p:sp>
+      <p:sp>
+        <p:nvSpPr>
+          <p:cNvPr id="11" name="Shape 8"/>
+          <p:cNvSpPr/>
+          <p:nvPr/>
+        </p:nvSpPr>
+        <p:spPr>
+          <a:xfrm>
+            <a:off x="4352544" y="1207008"/>
+            <a:ext cx="1847088" cy="310896"/>
+          </a:xfrm>
+          <a:prstGeom prst="chevron">
+            <a:avLst/>
+          </a:prstGeom>
+          <a:solidFill>
+            <a:srgbClr val="0A1F44"/>
+          </a:solidFill>
+          <a:ln w="6350">
+            <a:solidFill>
+              <a:srgbClr val="0A1F44"/>
+            </a:solidFill>
+            <a:prstDash val="solid"/>
+          </a:ln>
+        </p:spPr>
+      </p:sp>
+      <p:sp>
+        <p:nvSpPr>
+          <p:cNvPr id="12" name="Text 9"/>
+          <p:cNvSpPr txBox="1"/>
+          <p:nvPr/>
+        </p:nvSpPr>
+        <p:spPr>
+          <a:xfrm>
+            <a:off x="4553712" y="1207008"/>
+            <a:ext cx="1554480" cy="310896"/>
+          </a:xfrm>
+          <a:prstGeom prst="rect">
+            <a:avLst/>
+          </a:prstGeom>
+          <a:noFill/>
+          <a:ln/>
+        </p:spPr>
+        <p:txBody>
+          <a:bodyPr wrap="square" lIns="0" tIns="0" rIns="0" bIns="0" rtlCol="0" anchor="ctr"/>
+          <a:lstStyle/>
+          <a:p>
+            <a:pPr indent="0" marL="0">
+              <a:buNone/>
+            </a:pPr>
+            <a:r>
+              <a:rPr lang="en-US" sz="950" b="1" dirty="0">
+                <a:solidFill>
+                  <a:srgbClr val="FFFFFF"/>
+                </a:solidFill>
+                <a:latin typeface="Inter" pitchFamily="34" charset="0"/>
+                <a:ea typeface="Inter" pitchFamily="34" charset="-122"/>
+                <a:cs typeface="Inter" pitchFamily="34" charset="-120"/>
+              </a:rPr>
+              <a:t>Set up · wk 1–4</a:t>
+            </a:r>
+            <a:endParaRPr lang="en-US" sz="950" dirty="0"/>
+          </a:p>
+        </p:txBody>
+      </p:sp>
+      <p:sp>
+        <p:nvSpPr>
+          <p:cNvPr id="13" name="Shape 10"/>
+          <p:cNvSpPr/>
+          <p:nvPr/>
+        </p:nvSpPr>
+        <p:spPr>
+          <a:xfrm>
+            <a:off x="6144768" y="1207008"/>
+            <a:ext cx="1847088" cy="310896"/>
+          </a:xfrm>
+          <a:prstGeom prst="chevron">
+            <a:avLst/>
+          </a:prstGeom>
+          <a:solidFill>
+            <a:srgbClr val="1D4ED8"/>
+          </a:solidFill>
+          <a:ln w="6350">
+            <a:solidFill>
+              <a:srgbClr val="1D4ED8"/>
+            </a:solidFill>
+            <a:prstDash val="solid"/>
+          </a:ln>
+        </p:spPr>
+      </p:sp>
+      <p:sp>
+        <p:nvSpPr>
+          <p:cNvPr id="14" name="Text 11"/>
+          <p:cNvSpPr txBox="1"/>
+          <p:nvPr/>
+        </p:nvSpPr>
+        <p:spPr>
+          <a:xfrm>
+            <a:off x="6345936" y="1207008"/>
+            <a:ext cx="1554480" cy="310896"/>
+          </a:xfrm>
+          <a:prstGeom prst="rect">
+            <a:avLst/>
+          </a:prstGeom>
+          <a:noFill/>
+          <a:ln/>
+        </p:spPr>
+        <p:txBody>
+          <a:bodyPr wrap="square" lIns="0" tIns="0" rIns="0" bIns="0" rtlCol="0" anchor="ctr"/>
+          <a:lstStyle/>
+          <a:p>
+            <a:pPr indent="0" marL="0">
+              <a:buNone/>
+            </a:pPr>
+            <a:r>
+              <a:rPr lang="en-US" sz="950" b="1" dirty="0">
+                <a:solidFill>
+                  <a:srgbClr val="FFFFFF"/>
+                </a:solidFill>
+                <a:latin typeface="Inter" pitchFamily="34" charset="0"/>
+                <a:ea typeface="Inter" pitchFamily="34" charset="-122"/>
+                <a:cs typeface="Inter" pitchFamily="34" charset="-120"/>
+              </a:rPr>
+              <a:t>Launch · wk 5–8</a:t>
+            </a:r>
+            <a:endParaRPr lang="en-US" sz="950" dirty="0"/>
+          </a:p>
+        </p:txBody>
+      </p:sp>
+      <p:sp>
+        <p:nvSpPr>
+          <p:cNvPr id="15" name="Shape 12"/>
+          <p:cNvSpPr/>
+          <p:nvPr/>
+        </p:nvSpPr>
+        <p:spPr>
+          <a:xfrm>
+            <a:off x="7936992" y="1207008"/>
+            <a:ext cx="1755648" cy="310896"/>
+          </a:xfrm>
+          <a:prstGeom prst="chevron">
+            <a:avLst/>
+          </a:prstGeom>
+          <a:solidFill>
+            <a:srgbClr val="2563EB"/>
+          </a:solidFill>
+          <a:ln w="6350">
+            <a:solidFill>
+              <a:srgbClr val="2563EB"/>
+            </a:solidFill>
+            <a:prstDash val="solid"/>
+          </a:ln>
+        </p:spPr>
+      </p:sp>
+      <p:sp>
+        <p:nvSpPr>
+          <p:cNvPr id="16" name="Text 13"/>
+          <p:cNvSpPr txBox="1"/>
+          <p:nvPr/>
+        </p:nvSpPr>
+        <p:spPr>
+          <a:xfrm>
+            <a:off x="8138160" y="1207008"/>
+            <a:ext cx="1463040" cy="310896"/>
+          </a:xfrm>
+          <a:prstGeom prst="rect">
+            <a:avLst/>
+          </a:prstGeom>
+          <a:noFill/>
+          <a:ln/>
+        </p:spPr>
+        <p:txBody>
+          <a:bodyPr wrap="square" lIns="0" tIns="0" rIns="0" bIns="0" rtlCol="0" anchor="ctr"/>
+          <a:lstStyle/>
+          <a:p>
+            <a:pPr indent="0" marL="0">
+              <a:buNone/>
+            </a:pPr>
+            <a:r>
+              <a:rPr lang="en-US" sz="950" b="1" dirty="0">
+                <a:solidFill>
+                  <a:srgbClr val="FFFFFF"/>
+                </a:solidFill>
+                <a:latin typeface="Inter" pitchFamily="34" charset="0"/>
+                <a:ea typeface="Inter" pitchFamily="34" charset="-122"/>
+                <a:cs typeface="Inter" pitchFamily="34" charset="-120"/>
+              </a:rPr>
+              <a:t>Measure · wk 9–12</a:t>
+            </a:r>
+            <a:endParaRPr lang="en-US" sz="950" dirty="0"/>
+          </a:p>
+        </p:txBody>
+      </p:sp>
+      <p:sp>
+        <p:nvSpPr>
+          <p:cNvPr id="17" name="Text 14"/>
+          <p:cNvSpPr txBox="1"/>
+          <p:nvPr/>
+        </p:nvSpPr>
+        <p:spPr>
+          <a:xfrm>
+            <a:off x="9747504" y="1207008"/>
+            <a:ext cx="1938528" cy="310896"/>
+          </a:xfrm>
+          <a:prstGeom prst="rect">
+            <a:avLst/>
+          </a:prstGeom>
+          <a:noFill/>
+          <a:ln/>
+        </p:spPr>
+        <p:txBody>
+          <a:bodyPr wrap="square" lIns="0" tIns="0" rIns="0" bIns="0" rtlCol="0" anchor="ctr"/>
+          <a:lstStyle/>
+          <a:p>
+            <a:pPr indent="0" marL="0">
+              <a:buNone/>
+            </a:pPr>
+            <a:r>
+              <a:rPr lang="en-US" sz="1100" b="1" dirty="0">
+                <a:solidFill>
+                  <a:srgbClr val="0A1F44"/>
+                </a:solidFill>
+                <a:latin typeface="Inter" pitchFamily="34" charset="0"/>
+                <a:ea typeface="Inter" pitchFamily="34" charset="-122"/>
+                <a:cs typeface="Inter" pitchFamily="34" charset="-120"/>
+              </a:rPr>
+              <a:t>Paid from</a:t>
+            </a:r>
+            <a:endParaRPr lang="en-US" sz="1100" dirty="0"/>
+          </a:p>
+        </p:txBody>
+      </p:sp>
+      <p:sp>
+        <p:nvSpPr>
+          <p:cNvPr id="18" name="Shape 15"/>
+          <p:cNvSpPr/>
+          <p:nvPr/>
+        </p:nvSpPr>
+        <p:spPr>
+          <a:xfrm>
+            <a:off x="502920" y="1591056"/>
+            <a:ext cx="11183112" cy="1234440"/>
           </a:xfrm>
           <a:prstGeom prst="roundRect">
             <a:avLst>
-              <a:gd name="adj" fmla="val 9639"/>
+              <a:gd name="adj" fmla="val 5926"/>
             </a:avLst>
           </a:prstGeom>
           <a:solidFill>
@@ -47936,13 +48206,13 @@
       </p:sp>
       <p:sp>
         <p:nvSpPr>
-          <p:cNvPr id="11" name="Shape 8"/>
-          <p:cNvSpPr/>
-          <p:nvPr/>
-        </p:nvSpPr>
-        <p:spPr>
-          <a:xfrm>
-            <a:off x="594360" y="2043684"/>
+          <p:cNvPr id="19" name="Shape 16"/>
+          <p:cNvSpPr/>
+          <p:nvPr/>
+        </p:nvSpPr>
+        <p:spPr>
+          <a:xfrm>
+            <a:off x="612648" y="1719072"/>
             <a:ext cx="329184" cy="329184"/>
           </a:xfrm>
           <a:prstGeom prst="ellipse">
@@ -47959,9 +48229,151 @@
           </a:ln>
         </p:spPr>
       </p:sp>
+      <p:sp>
+        <p:nvSpPr>
+          <p:cNvPr id="20" name="Text 17"/>
+          <p:cNvSpPr txBox="1"/>
+          <p:nvPr/>
+        </p:nvSpPr>
+        <p:spPr>
+          <a:xfrm>
+            <a:off x="612648" y="1719072"/>
+            <a:ext cx="329184" cy="329184"/>
+          </a:xfrm>
+          <a:prstGeom prst="rect">
+            <a:avLst/>
+          </a:prstGeom>
+          <a:noFill/>
+          <a:ln/>
+        </p:spPr>
+        <p:txBody>
+          <a:bodyPr wrap="square" lIns="0" tIns="0" rIns="0" bIns="0" rtlCol="0" anchor="ctr"/>
+          <a:lstStyle/>
+          <a:p>
+            <a:pPr algn="ctr" indent="0" marL="0">
+              <a:buNone/>
+            </a:pPr>
+            <a:r>
+              <a:rPr lang="en-US" sz="1200" b="1" dirty="0">
+                <a:solidFill>
+                  <a:srgbClr val="FFFFFF"/>
+                </a:solidFill>
+                <a:latin typeface="Inter" pitchFamily="34" charset="0"/>
+                <a:ea typeface="Inter" pitchFamily="34" charset="-122"/>
+                <a:cs typeface="Inter" pitchFamily="34" charset="-120"/>
+              </a:rPr>
+              <a:t>1</a:t>
+            </a:r>
+            <a:endParaRPr lang="en-US" sz="1200" dirty="0"/>
+          </a:p>
+        </p:txBody>
+      </p:sp>
+      <p:sp>
+        <p:nvSpPr>
+          <p:cNvPr id="21" name="Text 18"/>
+          <p:cNvSpPr txBox="1"/>
+          <p:nvPr/>
+        </p:nvSpPr>
+        <p:spPr>
+          <a:xfrm>
+            <a:off x="1014984" y="1682496"/>
+            <a:ext cx="1554480" cy="402336"/>
+          </a:xfrm>
+          <a:prstGeom prst="rect">
+            <a:avLst/>
+          </a:prstGeom>
+          <a:noFill/>
+          <a:ln/>
+        </p:spPr>
+        <p:txBody>
+          <a:bodyPr wrap="square" lIns="0" tIns="0" rIns="0" bIns="0" rtlCol="0" anchor="ctr"/>
+          <a:lstStyle/>
+          <a:p>
+            <a:pPr indent="0" marL="0">
+              <a:buNone/>
+            </a:pPr>
+            <a:r>
+              <a:rPr lang="en-US" sz="1150" b="1" dirty="0">
+                <a:solidFill>
+                  <a:srgbClr val="0A1F44"/>
+                </a:solidFill>
+                <a:latin typeface="Inter" pitchFamily="34" charset="0"/>
+                <a:ea typeface="Inter" pitchFamily="34" charset="-122"/>
+                <a:cs typeface="Inter" pitchFamily="34" charset="-120"/>
+              </a:rPr>
+              <a:t>Capture every buyer</a:t>
+            </a:r>
+            <a:endParaRPr lang="en-US" sz="1150" dirty="0"/>
+          </a:p>
+        </p:txBody>
+      </p:sp>
+      <p:sp>
+        <p:nvSpPr>
+          <p:cNvPr id="22" name="Text 19"/>
+          <p:cNvSpPr txBox="1"/>
+          <p:nvPr/>
+        </p:nvSpPr>
+        <p:spPr>
+          <a:xfrm>
+            <a:off x="630936" y="2103120"/>
+            <a:ext cx="1920240" cy="420624"/>
+          </a:xfrm>
+          <a:prstGeom prst="rect">
+            <a:avLst/>
+          </a:prstGeom>
+          <a:noFill/>
+          <a:ln/>
+        </p:spPr>
+        <p:txBody>
+          <a:bodyPr wrap="square" lIns="0" tIns="0" rIns="0" bIns="0" rtlCol="0" anchor="t"/>
+          <a:lstStyle/>
+          <a:p>
+            <a:pPr indent="0" marL="0">
+              <a:buNone/>
+            </a:pPr>
+            <a:r>
+              <a:rPr lang="en-US" sz="900" dirty="0">
+                <a:solidFill>
+                  <a:srgbClr val="334155"/>
+                </a:solidFill>
+                <a:latin typeface="Inter" pitchFamily="34" charset="0"/>
+                <a:ea typeface="Inter" pitchFamily="34" charset="-122"/>
+                <a:cs typeface="Inter" pitchFamily="34" charset="-120"/>
+              </a:rPr>
+              <a:t>77% of cart adders never order; only 24.5% engage</a:t>
+            </a:r>
+            <a:endParaRPr lang="en-US" sz="900" dirty="0"/>
+          </a:p>
+        </p:txBody>
+      </p:sp>
+      <p:sp>
+        <p:nvSpPr>
+          <p:cNvPr id="23" name="Shape 20"/>
+          <p:cNvSpPr/>
+          <p:nvPr/>
+        </p:nvSpPr>
+        <p:spPr>
+          <a:xfrm>
+            <a:off x="2697480" y="1682496"/>
+            <a:ext cx="256032" cy="256032"/>
+          </a:xfrm>
+          <a:prstGeom prst="ellipse">
+            <a:avLst/>
+          </a:prstGeom>
+          <a:solidFill>
+            <a:srgbClr val="EFF6FF"/>
+          </a:solidFill>
+          <a:ln w="6350">
+            <a:solidFill>
+              <a:srgbClr val="EFF6FF"/>
+            </a:solidFill>
+            <a:prstDash val="solid"/>
+          </a:ln>
+        </p:spPr>
+      </p:sp>
       <p:pic>
         <p:nvPicPr>
-          <p:cNvPr id="12" name="Image 1" descr="preencoded.png">    </p:cNvPr>
+          <p:cNvPr id="24" name="Image 1" descr="preencoded.png">    </p:cNvPr>
           <p:cNvPicPr>
             <a:picLocks noChangeAspect="1"/>
           </p:cNvPicPr>
@@ -47975,8 +48387,8 @@
         </p:blipFill>
         <p:spPr>
           <a:xfrm>
-            <a:off x="666780" y="2116104"/>
-            <a:ext cx="184343" cy="184343"/>
+            <a:off x="2753807" y="1738823"/>
+            <a:ext cx="143378" cy="143378"/>
           </a:xfrm>
           <a:prstGeom prst="rect">
             <a:avLst/>
@@ -47985,14 +48397,14 @@
       </p:pic>
       <p:sp>
         <p:nvSpPr>
-          <p:cNvPr id="13" name="Text 9"/>
-          <p:cNvSpPr txBox="1"/>
-          <p:nvPr/>
-        </p:nvSpPr>
-        <p:spPr>
-          <a:xfrm>
-            <a:off x="978408" y="1828800"/>
-            <a:ext cx="1527048" cy="758952"/>
+          <p:cNvPr id="25" name="Text 21"/>
+          <p:cNvSpPr txBox="1"/>
+          <p:nvPr/>
+        </p:nvSpPr>
+        <p:spPr>
+          <a:xfrm>
+            <a:off x="3008376" y="1682496"/>
+            <a:ext cx="1271016" cy="256032"/>
           </a:xfrm>
           <a:prstGeom prst="rect">
             <a:avLst/>
@@ -48008,7 +48420,7 @@
               <a:buNone/>
             </a:pPr>
             <a:r>
-              <a:rPr lang="en-US" sz="1500" b="1" dirty="0">
+              <a:rPr lang="en-US" sz="900" b="1" dirty="0">
                 <a:solidFill>
                   <a:srgbClr val="0A1F44"/>
                 </a:solidFill>
@@ -48016,90 +48428,32 @@
                 <a:ea typeface="Inter" pitchFamily="34" charset="-122"/>
                 <a:cs typeface="Inter" pitchFamily="34" charset="-120"/>
               </a:rPr>
-              <a:t>77%  </a:t>
-            </a:r>
-            <a:pPr indent="0" marL="0">
-              <a:buNone/>
-            </a:pPr>
-            <a:r>
-              <a:rPr lang="en-US" sz="1000" b="1" dirty="0">
-                <a:solidFill>
-                  <a:srgbClr val="0A1F44"/>
-                </a:solidFill>
-                <a:latin typeface="Inter" pitchFamily="34" charset="0"/>
-                <a:ea typeface="Inter" pitchFamily="34" charset="-122"/>
-                <a:cs typeface="Inter" pitchFamily="34" charset="-120"/>
-              </a:rPr>
-              <a:t>Cart leak</a:t>
-            </a:r>
-            <a:endParaRPr lang="en-US" sz="1200" dirty="0"/>
-          </a:p>
-          <a:p>
-            <a:pPr indent="0" marL="0">
-              <a:buNone/>
-            </a:pPr>
-            <a:r>
-              <a:rPr lang="en-US" sz="800" dirty="0">
-                <a:solidFill>
-                  <a:srgbClr val="334155"/>
-                </a:solidFill>
-                <a:latin typeface="Inter" pitchFamily="34" charset="0"/>
-                <a:ea typeface="Inter" pitchFamily="34" charset="-122"/>
-                <a:cs typeface="Inter" pitchFamily="34" charset="-120"/>
-              </a:rPr>
-              <a:t>of cart adders never order</a:t>
-            </a:r>
-            <a:endParaRPr lang="en-US" sz="1200" dirty="0"/>
-          </a:p>
-        </p:txBody>
-      </p:sp>
-      <p:sp>
-        <p:nvSpPr>
-          <p:cNvPr id="14" name="Shape 10"/>
-          <p:cNvSpPr/>
-          <p:nvPr/>
-        </p:nvSpPr>
-        <p:spPr>
-          <a:xfrm>
-            <a:off x="502920" y="2697480"/>
-            <a:ext cx="2057400" cy="758952"/>
-          </a:xfrm>
-          <a:prstGeom prst="roundRect">
-            <a:avLst>
-              <a:gd name="adj" fmla="val 9639"/>
-            </a:avLst>
+              <a:t>SMS at checkout</a:t>
+            </a:r>
+            <a:endParaRPr lang="en-US" sz="900" dirty="0"/>
+          </a:p>
+        </p:txBody>
+      </p:sp>
+      <p:sp>
+        <p:nvSpPr>
+          <p:cNvPr id="26" name="Shape 22"/>
+          <p:cNvSpPr/>
+          <p:nvPr/>
+        </p:nvSpPr>
+        <p:spPr>
+          <a:xfrm>
+            <a:off x="2697480" y="1965960"/>
+            <a:ext cx="256032" cy="256032"/>
+          </a:xfrm>
+          <a:prstGeom prst="ellipse">
+            <a:avLst/>
           </a:prstGeom>
           <a:solidFill>
-            <a:srgbClr val="F8FAFC"/>
-          </a:solidFill>
-          <a:ln w="9525">
-            <a:solidFill>
-              <a:srgbClr val="E2E8F0"/>
-            </a:solidFill>
-            <a:prstDash val="solid"/>
-          </a:ln>
-        </p:spPr>
-      </p:sp>
-      <p:sp>
-        <p:nvSpPr>
-          <p:cNvPr id="15" name="Shape 11"/>
-          <p:cNvSpPr/>
-          <p:nvPr/>
-        </p:nvSpPr>
-        <p:spPr>
-          <a:xfrm>
-            <a:off x="594360" y="2912364"/>
-            <a:ext cx="329184" cy="329184"/>
-          </a:xfrm>
-          <a:prstGeom prst="ellipse">
-            <a:avLst/>
-          </a:prstGeom>
-          <a:solidFill>
-            <a:srgbClr val="0A1F44"/>
+            <a:srgbClr val="EFF6FF"/>
           </a:solidFill>
           <a:ln w="6350">
             <a:solidFill>
-              <a:srgbClr val="0A1F44"/>
+              <a:srgbClr val="EFF6FF"/>
             </a:solidFill>
             <a:prstDash val="solid"/>
           </a:ln>
@@ -48107,7 +48461,7 @@
       </p:sp>
       <p:pic>
         <p:nvPicPr>
-          <p:cNvPr id="16" name="Image 2" descr="preencoded.png">    </p:cNvPr>
+          <p:cNvPr id="27" name="Image 2" descr="preencoded.png">    </p:cNvPr>
           <p:cNvPicPr>
             <a:picLocks noChangeAspect="1"/>
           </p:cNvPicPr>
@@ -48121,8 +48475,8 @@
         </p:blipFill>
         <p:spPr>
           <a:xfrm>
-            <a:off x="666780" y="2984784"/>
-            <a:ext cx="184343" cy="184343"/>
+            <a:off x="2753807" y="2022287"/>
+            <a:ext cx="143378" cy="143378"/>
           </a:xfrm>
           <a:prstGeom prst="rect">
             <a:avLst/>
@@ -48131,14 +48485,14 @@
       </p:pic>
       <p:sp>
         <p:nvSpPr>
-          <p:cNvPr id="17" name="Text 12"/>
-          <p:cNvSpPr txBox="1"/>
-          <p:nvPr/>
-        </p:nvSpPr>
-        <p:spPr>
-          <a:xfrm>
-            <a:off x="978408" y="2697480"/>
-            <a:ext cx="1527048" cy="758952"/>
+          <p:cNvPr id="28" name="Text 23"/>
+          <p:cNvSpPr txBox="1"/>
+          <p:nvPr/>
+        </p:nvSpPr>
+        <p:spPr>
+          <a:xfrm>
+            <a:off x="3008376" y="1965960"/>
+            <a:ext cx="1271016" cy="256032"/>
           </a:xfrm>
           <a:prstGeom prst="rect">
             <a:avLst/>
@@ -48154,7 +48508,7 @@
               <a:buNone/>
             </a:pPr>
             <a:r>
-              <a:rPr lang="en-US" sz="1500" b="1" dirty="0">
+              <a:rPr lang="en-US" sz="900" b="1" dirty="0">
                 <a:solidFill>
                   <a:srgbClr val="0A1F44"/>
                 </a:solidFill>
@@ -48162,90 +48516,32 @@
                 <a:ea typeface="Inter" pitchFamily="34" charset="-122"/>
                 <a:cs typeface="Inter" pitchFamily="34" charset="-120"/>
               </a:rPr>
-              <a:t>24.5%  </a:t>
-            </a:r>
-            <a:pPr indent="0" marL="0">
-              <a:buNone/>
-            </a:pPr>
-            <a:r>
-              <a:rPr lang="en-US" sz="1000" b="1" dirty="0">
-                <a:solidFill>
-                  <a:srgbClr val="0A1F44"/>
-                </a:solidFill>
-                <a:latin typeface="Inter" pitchFamily="34" charset="0"/>
-                <a:ea typeface="Inter" pitchFamily="34" charset="-122"/>
-                <a:cs typeface="Inter" pitchFamily="34" charset="-120"/>
-              </a:rPr>
-              <a:t>Unreachable</a:t>
-            </a:r>
-            <a:endParaRPr lang="en-US" sz="1200" dirty="0"/>
-          </a:p>
-          <a:p>
-            <a:pPr indent="0" marL="0">
-              <a:buNone/>
-            </a:pPr>
-            <a:r>
-              <a:rPr lang="en-US" sz="800" dirty="0">
-                <a:solidFill>
-                  <a:srgbClr val="334155"/>
-                </a:solidFill>
-                <a:latin typeface="Inter" pitchFamily="34" charset="0"/>
-                <a:ea typeface="Inter" pitchFamily="34" charset="-122"/>
-                <a:cs typeface="Inter" pitchFamily="34" charset="-120"/>
-              </a:rPr>
-              <a:t>of buyers engage with owned channels</a:t>
-            </a:r>
-            <a:endParaRPr lang="en-US" sz="1200" dirty="0"/>
-          </a:p>
-        </p:txBody>
-      </p:sp>
-      <p:sp>
-        <p:nvSpPr>
-          <p:cNvPr id="18" name="Shape 13"/>
-          <p:cNvSpPr/>
-          <p:nvPr/>
-        </p:nvSpPr>
-        <p:spPr>
-          <a:xfrm>
-            <a:off x="502920" y="3566160"/>
-            <a:ext cx="2057400" cy="758952"/>
-          </a:xfrm>
-          <a:prstGeom prst="roundRect">
-            <a:avLst>
-              <a:gd name="adj" fmla="val 9639"/>
-            </a:avLst>
+              <a:t>App order tracking</a:t>
+            </a:r>
+            <a:endParaRPr lang="en-US" sz="900" dirty="0"/>
+          </a:p>
+        </p:txBody>
+      </p:sp>
+      <p:sp>
+        <p:nvSpPr>
+          <p:cNvPr id="29" name="Shape 24"/>
+          <p:cNvSpPr/>
+          <p:nvPr/>
+        </p:nvSpPr>
+        <p:spPr>
+          <a:xfrm>
+            <a:off x="2697480" y="2249424"/>
+            <a:ext cx="256032" cy="256032"/>
+          </a:xfrm>
+          <a:prstGeom prst="ellipse">
+            <a:avLst/>
           </a:prstGeom>
           <a:solidFill>
-            <a:srgbClr val="F8FAFC"/>
-          </a:solidFill>
-          <a:ln w="9525">
-            <a:solidFill>
-              <a:srgbClr val="E2E8F0"/>
-            </a:solidFill>
-            <a:prstDash val="solid"/>
-          </a:ln>
-        </p:spPr>
-      </p:sp>
-      <p:sp>
-        <p:nvSpPr>
-          <p:cNvPr id="19" name="Shape 14"/>
-          <p:cNvSpPr/>
-          <p:nvPr/>
-        </p:nvSpPr>
-        <p:spPr>
-          <a:xfrm>
-            <a:off x="594360" y="3781044"/>
-            <a:ext cx="329184" cy="329184"/>
-          </a:xfrm>
-          <a:prstGeom prst="ellipse">
-            <a:avLst/>
-          </a:prstGeom>
-          <a:solidFill>
-            <a:srgbClr val="0A1F44"/>
+            <a:srgbClr val="EFF6FF"/>
           </a:solidFill>
           <a:ln w="6350">
             <a:solidFill>
-              <a:srgbClr val="0A1F44"/>
+              <a:srgbClr val="EFF6FF"/>
             </a:solidFill>
             <a:prstDash val="solid"/>
           </a:ln>
@@ -48253,7 +48549,7 @@
       </p:sp>
       <p:pic>
         <p:nvPicPr>
-          <p:cNvPr id="20" name="Image 3" descr="preencoded.png">    </p:cNvPr>
+          <p:cNvPr id="30" name="Image 3" descr="preencoded.png">    </p:cNvPr>
           <p:cNvPicPr>
             <a:picLocks noChangeAspect="1"/>
           </p:cNvPicPr>
@@ -48267,8 +48563,8 @@
         </p:blipFill>
         <p:spPr>
           <a:xfrm>
-            <a:off x="666780" y="3853464"/>
-            <a:ext cx="184343" cy="184343"/>
+            <a:off x="2753807" y="2305751"/>
+            <a:ext cx="143378" cy="143378"/>
           </a:xfrm>
           <a:prstGeom prst="rect">
             <a:avLst/>
@@ -48277,14 +48573,14 @@
       </p:pic>
       <p:sp>
         <p:nvSpPr>
-          <p:cNvPr id="21" name="Text 15"/>
-          <p:cNvSpPr txBox="1"/>
-          <p:nvPr/>
-        </p:nvSpPr>
-        <p:spPr>
-          <a:xfrm>
-            <a:off x="978408" y="3566160"/>
-            <a:ext cx="1527048" cy="758952"/>
+          <p:cNvPr id="31" name="Text 25"/>
+          <p:cNvSpPr txBox="1"/>
+          <p:nvPr/>
+        </p:nvSpPr>
+        <p:spPr>
+          <a:xfrm>
+            <a:off x="3008376" y="2249424"/>
+            <a:ext cx="1271016" cy="256032"/>
           </a:xfrm>
           <a:prstGeom prst="rect">
             <a:avLst/>
@@ -48300,7 +48596,7 @@
               <a:buNone/>
             </a:pPr>
             <a:r>
-              <a:rPr lang="en-US" sz="1500" b="1" dirty="0">
+              <a:rPr lang="en-US" sz="900" b="1" dirty="0">
                 <a:solidFill>
                   <a:srgbClr val="0A1F44"/>
                 </a:solidFill>
@@ -48308,61 +48604,30 @@
                 <a:ea typeface="Inter" pitchFamily="34" charset="-122"/>
                 <a:cs typeface="Inter" pitchFamily="34" charset="-120"/>
               </a:rPr>
-              <a:t>13.7%  </a:t>
-            </a:r>
-            <a:pPr indent="0" marL="0">
-              <a:buNone/>
-            </a:pPr>
-            <a:r>
-              <a:rPr lang="en-US" sz="1000" b="1" dirty="0">
-                <a:solidFill>
-                  <a:srgbClr val="0A1F44"/>
-                </a:solidFill>
-                <a:latin typeface="Inter" pitchFamily="34" charset="0"/>
-                <a:ea typeface="Inter" pitchFamily="34" charset="-122"/>
-                <a:cs typeface="Inter" pitchFamily="34" charset="-120"/>
-              </a:rPr>
-              <a:t>One-timers</a:t>
-            </a:r>
-            <a:endParaRPr lang="en-US" sz="1200" dirty="0"/>
-          </a:p>
-          <a:p>
-            <a:pPr indent="0" marL="0">
-              <a:buNone/>
-            </a:pPr>
-            <a:r>
-              <a:rPr lang="en-US" sz="800" dirty="0">
-                <a:solidFill>
-                  <a:srgbClr val="334155"/>
-                </a:solidFill>
-                <a:latin typeface="Inter" pitchFamily="34" charset="0"/>
-                <a:ea typeface="Inter" pitchFamily="34" charset="-122"/>
-                <a:cs typeface="Inter" pitchFamily="34" charset="-120"/>
-              </a:rPr>
-              <a:t>cashmere repeat; week 2 is the peak</a:t>
-            </a:r>
-            <a:endParaRPr lang="en-US" sz="1200" dirty="0"/>
-          </a:p>
-        </p:txBody>
-      </p:sp>
-      <p:sp>
-        <p:nvSpPr>
-          <p:cNvPr id="22" name="Shape 16"/>
-          <p:cNvSpPr/>
-          <p:nvPr/>
-        </p:nvSpPr>
-        <p:spPr>
-          <a:xfrm>
-            <a:off x="502920" y="4434840"/>
-            <a:ext cx="2057400" cy="758952"/>
+              <a:t>Email reminders</a:t>
+            </a:r>
+            <a:endParaRPr lang="en-US" sz="900" dirty="0"/>
+          </a:p>
+        </p:txBody>
+      </p:sp>
+      <p:sp>
+        <p:nvSpPr>
+          <p:cNvPr id="32" name="Shape 26"/>
+          <p:cNvSpPr/>
+          <p:nvPr/>
+        </p:nvSpPr>
+        <p:spPr>
+          <a:xfrm>
+            <a:off x="4389120" y="1682496"/>
+            <a:ext cx="1664208" cy="731520"/>
           </a:xfrm>
           <a:prstGeom prst="roundRect">
             <a:avLst>
-              <a:gd name="adj" fmla="val 9639"/>
+              <a:gd name="adj" fmla="val 7500"/>
             </a:avLst>
           </a:prstGeom>
           <a:solidFill>
-            <a:srgbClr val="F8FAFC"/>
+            <a:srgbClr val="FFFFFF"/>
           </a:solidFill>
           <a:ln w="9525">
             <a:solidFill>
@@ -48374,17 +48639,516 @@
       </p:sp>
       <p:sp>
         <p:nvSpPr>
-          <p:cNvPr id="23" name="Shape 17"/>
-          <p:cNvSpPr/>
-          <p:nvPr/>
-        </p:nvSpPr>
-        <p:spPr>
-          <a:xfrm>
-            <a:off x="594360" y="4649724"/>
-            <a:ext cx="329184" cy="329184"/>
-          </a:xfrm>
-          <a:prstGeom prst="ellipse">
-            <a:avLst/>
+          <p:cNvPr id="33" name="Text 27"/>
+          <p:cNvSpPr txBox="1"/>
+          <p:nvPr/>
+        </p:nvSpPr>
+        <p:spPr>
+          <a:xfrm>
+            <a:off x="4480560" y="1682496"/>
+            <a:ext cx="1499616" cy="731520"/>
+          </a:xfrm>
+          <a:prstGeom prst="rect">
+            <a:avLst/>
+          </a:prstGeom>
+          <a:noFill/>
+          <a:ln/>
+        </p:spPr>
+        <p:txBody>
+          <a:bodyPr wrap="square" lIns="0" tIns="0" rIns="0" bIns="0" rtlCol="0" anchor="ctr"/>
+          <a:lstStyle/>
+          <a:p>
+            <a:pPr indent="0" marL="0">
+              <a:buNone/>
+            </a:pPr>
+            <a:r>
+              <a:rPr lang="en-US" sz="900" dirty="0">
+                <a:solidFill>
+                  <a:srgbClr val="0F172A"/>
+                </a:solidFill>
+                <a:latin typeface="Inter" pitchFamily="34" charset="0"/>
+                <a:ea typeface="Inter" pitchFamily="34" charset="-122"/>
+                <a:cs typeface="Inter" pitchFamily="34" charset="-120"/>
+              </a:rPr>
+              <a:t>Consent split; CJA abandoner segment; Passport cards</a:t>
+            </a:r>
+            <a:endParaRPr lang="en-US" sz="900" dirty="0"/>
+          </a:p>
+        </p:txBody>
+      </p:sp>
+      <p:sp>
+        <p:nvSpPr>
+          <p:cNvPr id="34" name="Shape 28"/>
+          <p:cNvSpPr/>
+          <p:nvPr/>
+        </p:nvSpPr>
+        <p:spPr>
+          <a:xfrm>
+            <a:off x="6181344" y="1682496"/>
+            <a:ext cx="1664208" cy="731520"/>
+          </a:xfrm>
+          <a:prstGeom prst="roundRect">
+            <a:avLst>
+              <a:gd name="adj" fmla="val 7500"/>
+            </a:avLst>
+          </a:prstGeom>
+          <a:solidFill>
+            <a:srgbClr val="FFFFFF"/>
+          </a:solidFill>
+          <a:ln w="9525">
+            <a:solidFill>
+              <a:srgbClr val="E2E8F0"/>
+            </a:solidFill>
+            <a:prstDash val="solid"/>
+          </a:ln>
+        </p:spPr>
+      </p:sp>
+      <p:sp>
+        <p:nvSpPr>
+          <p:cNvPr id="35" name="Text 29"/>
+          <p:cNvSpPr txBox="1"/>
+          <p:nvPr/>
+        </p:nvSpPr>
+        <p:spPr>
+          <a:xfrm>
+            <a:off x="6272784" y="1682496"/>
+            <a:ext cx="1499616" cy="731520"/>
+          </a:xfrm>
+          <a:prstGeom prst="rect">
+            <a:avLst/>
+          </a:prstGeom>
+          <a:noFill/>
+          <a:ln/>
+        </p:spPr>
+        <p:txBody>
+          <a:bodyPr wrap="square" lIns="0" tIns="0" rIns="0" bIns="0" rtlCol="0" anchor="ctr"/>
+          <a:lstStyle/>
+          <a:p>
+            <a:pPr indent="0" marL="0">
+              <a:buNone/>
+            </a:pPr>
+            <a:r>
+              <a:rPr lang="en-US" sz="900" dirty="0">
+                <a:solidFill>
+                  <a:srgbClr val="0F172A"/>
+                </a:solidFill>
+                <a:latin typeface="Inter" pitchFamily="34" charset="0"/>
+                <a:ea typeface="Inter" pitchFamily="34" charset="-122"/>
+                <a:cs typeface="Inter" pitchFamily="34" charset="-120"/>
+              </a:rPr>
+              <a:t>SMS opt-in, app tracking, cart reminders at 1h and 24h</a:t>
+            </a:r>
+            <a:endParaRPr lang="en-US" sz="900" dirty="0"/>
+          </a:p>
+        </p:txBody>
+      </p:sp>
+      <p:sp>
+        <p:nvSpPr>
+          <p:cNvPr id="36" name="Shape 30"/>
+          <p:cNvSpPr/>
+          <p:nvPr/>
+        </p:nvSpPr>
+        <p:spPr>
+          <a:xfrm>
+            <a:off x="7973568" y="1682496"/>
+            <a:ext cx="1572768" cy="731520"/>
+          </a:xfrm>
+          <a:prstGeom prst="roundRect">
+            <a:avLst>
+              <a:gd name="adj" fmla="val 7500"/>
+            </a:avLst>
+          </a:prstGeom>
+          <a:solidFill>
+            <a:srgbClr val="EFF6FF"/>
+          </a:solidFill>
+          <a:ln w="9525">
+            <a:solidFill>
+              <a:srgbClr val="E2E8F0"/>
+            </a:solidFill>
+            <a:prstDash val="solid"/>
+          </a:ln>
+        </p:spPr>
+      </p:sp>
+      <p:sp>
+        <p:nvSpPr>
+          <p:cNvPr id="37" name="Text 31"/>
+          <p:cNvSpPr txBox="1"/>
+          <p:nvPr/>
+        </p:nvSpPr>
+        <p:spPr>
+          <a:xfrm>
+            <a:off x="8065008" y="1682496"/>
+            <a:ext cx="1408176" cy="731520"/>
+          </a:xfrm>
+          <a:prstGeom prst="rect">
+            <a:avLst/>
+          </a:prstGeom>
+          <a:noFill/>
+          <a:ln/>
+        </p:spPr>
+        <p:txBody>
+          <a:bodyPr wrap="square" lIns="0" tIns="0" rIns="0" bIns="0" rtlCol="0" anchor="ctr"/>
+          <a:lstStyle/>
+          <a:p>
+            <a:pPr indent="0" marL="0">
+              <a:buNone/>
+            </a:pPr>
+            <a:r>
+              <a:rPr lang="en-US" sz="900" b="1" dirty="0">
+                <a:solidFill>
+                  <a:srgbClr val="0A1F44"/>
+                </a:solidFill>
+                <a:latin typeface="Inter" pitchFamily="34" charset="0"/>
+                <a:ea typeface="Inter" pitchFamily="34" charset="-122"/>
+                <a:cs typeface="Inter" pitchFamily="34" charset="-120"/>
+              </a:rPr>
+              <a:t>Cart recovery; opt-ins per 100 orders</a:t>
+            </a:r>
+            <a:endParaRPr lang="en-US" sz="900" dirty="0"/>
+          </a:p>
+        </p:txBody>
+      </p:sp>
+      <p:sp>
+        <p:nvSpPr>
+          <p:cNvPr id="38" name="Shape 32"/>
+          <p:cNvSpPr/>
+          <p:nvPr/>
+        </p:nvSpPr>
+        <p:spPr>
+          <a:xfrm>
+            <a:off x="612648" y="2505456"/>
+            <a:ext cx="9025128" cy="0"/>
+          </a:xfrm>
+          <a:prstGeom prst="line">
+            <a:avLst/>
+          </a:prstGeom>
+          <a:noFill/>
+          <a:ln w="6350">
+            <a:solidFill>
+              <a:srgbClr val="E2E8F0"/>
+            </a:solidFill>
+            <a:prstDash val="solid"/>
+          </a:ln>
+        </p:spPr>
+      </p:sp>
+      <p:sp>
+        <p:nvSpPr>
+          <p:cNvPr id="39" name="Text 33"/>
+          <p:cNvSpPr txBox="1"/>
+          <p:nvPr/>
+        </p:nvSpPr>
+        <p:spPr>
+          <a:xfrm>
+            <a:off x="630936" y="2560320"/>
+            <a:ext cx="1371600" cy="228600"/>
+          </a:xfrm>
+          <a:prstGeom prst="rect">
+            <a:avLst/>
+          </a:prstGeom>
+          <a:noFill/>
+          <a:ln/>
+        </p:spPr>
+        <p:txBody>
+          <a:bodyPr wrap="square" lIns="0" tIns="0" rIns="0" bIns="0" rtlCol="0" anchor="ctr"/>
+          <a:lstStyle/>
+          <a:p>
+            <a:pPr indent="0" marL="0">
+              <a:buNone/>
+            </a:pPr>
+            <a:r>
+              <a:rPr lang="en-US" sz="900" b="1" dirty="0">
+                <a:solidFill>
+                  <a:srgbClr val="0A1F44"/>
+                </a:solidFill>
+                <a:latin typeface="Inter" pitchFamily="34" charset="0"/>
+                <a:ea typeface="Inter" pitchFamily="34" charset="-122"/>
+                <a:cs typeface="Inter" pitchFamily="34" charset="-120"/>
+              </a:rPr>
+              <a:t>Programs</a:t>
+            </a:r>
+            <a:endParaRPr lang="en-US" sz="900" dirty="0"/>
+          </a:p>
+        </p:txBody>
+      </p:sp>
+      <p:sp>
+        <p:nvSpPr>
+          <p:cNvPr id="40" name="Shape 34"/>
+          <p:cNvSpPr/>
+          <p:nvPr/>
+        </p:nvSpPr>
+        <p:spPr>
+          <a:xfrm>
+            <a:off x="2697480" y="2560320"/>
+            <a:ext cx="1033272" cy="228600"/>
+          </a:xfrm>
+          <a:prstGeom prst="roundRect">
+            <a:avLst>
+              <a:gd name="adj" fmla="val 48000"/>
+            </a:avLst>
+          </a:prstGeom>
+          <a:solidFill>
+            <a:srgbClr val="0A1F44"/>
+          </a:solidFill>
+          <a:ln w="9525">
+            <a:solidFill>
+              <a:srgbClr val="0A1F44"/>
+            </a:solidFill>
+            <a:prstDash val="solid"/>
+          </a:ln>
+        </p:spPr>
+      </p:sp>
+      <p:sp>
+        <p:nvSpPr>
+          <p:cNvPr id="41" name="Text 35"/>
+          <p:cNvSpPr txBox="1"/>
+          <p:nvPr/>
+        </p:nvSpPr>
+        <p:spPr>
+          <a:xfrm>
+            <a:off x="2697480" y="2560320"/>
+            <a:ext cx="1033272" cy="228600"/>
+          </a:xfrm>
+          <a:prstGeom prst="rect">
+            <a:avLst/>
+          </a:prstGeom>
+          <a:noFill/>
+          <a:ln/>
+        </p:spPr>
+        <p:txBody>
+          <a:bodyPr wrap="square" lIns="0" tIns="0" rIns="0" bIns="0" rtlCol="0" anchor="ctr"/>
+          <a:lstStyle/>
+          <a:p>
+            <a:pPr algn="ctr" indent="0" marL="0">
+              <a:buNone/>
+            </a:pPr>
+            <a:r>
+              <a:rPr lang="en-US" sz="750" b="1" dirty="0">
+                <a:solidFill>
+                  <a:srgbClr val="FFFFFF"/>
+                </a:solidFill>
+                <a:latin typeface="Inter" pitchFamily="34" charset="0"/>
+                <a:ea typeface="Inter" pitchFamily="34" charset="-122"/>
+                <a:cs typeface="Inter" pitchFamily="34" charset="-120"/>
+              </a:rPr>
+              <a:t>★ Quince Passport</a:t>
+            </a:r>
+            <a:endParaRPr lang="en-US" sz="750" dirty="0"/>
+          </a:p>
+        </p:txBody>
+      </p:sp>
+      <p:sp>
+        <p:nvSpPr>
+          <p:cNvPr id="42" name="Shape 36"/>
+          <p:cNvSpPr/>
+          <p:nvPr/>
+        </p:nvSpPr>
+        <p:spPr>
+          <a:xfrm>
+            <a:off x="3785616" y="2560320"/>
+            <a:ext cx="1121054" cy="228600"/>
+          </a:xfrm>
+          <a:prstGeom prst="roundRect">
+            <a:avLst>
+              <a:gd name="adj" fmla="val 48000"/>
+            </a:avLst>
+          </a:prstGeom>
+          <a:solidFill>
+            <a:srgbClr val="0A1F44"/>
+          </a:solidFill>
+          <a:ln w="9525">
+            <a:solidFill>
+              <a:srgbClr val="0A1F44"/>
+            </a:solidFill>
+            <a:prstDash val="solid"/>
+          </a:ln>
+        </p:spPr>
+      </p:sp>
+      <p:sp>
+        <p:nvSpPr>
+          <p:cNvPr id="43" name="Text 37"/>
+          <p:cNvSpPr txBox="1"/>
+          <p:nvPr/>
+        </p:nvSpPr>
+        <p:spPr>
+          <a:xfrm>
+            <a:off x="3785616" y="2560320"/>
+            <a:ext cx="1121054" cy="228600"/>
+          </a:xfrm>
+          <a:prstGeom prst="rect">
+            <a:avLst/>
+          </a:prstGeom>
+          <a:noFill/>
+          <a:ln/>
+        </p:spPr>
+        <p:txBody>
+          <a:bodyPr wrap="square" lIns="0" tIns="0" rIns="0" bIns="0" rtlCol="0" anchor="ctr"/>
+          <a:lstStyle/>
+          <a:p>
+            <a:pPr algn="ctr" indent="0" marL="0">
+              <a:buNone/>
+            </a:pPr>
+            <a:r>
+              <a:rPr lang="en-US" sz="750" b="1" dirty="0">
+                <a:solidFill>
+                  <a:srgbClr val="FFFFFF"/>
+                </a:solidFill>
+                <a:latin typeface="Inter" pitchFamily="34" charset="0"/>
+                <a:ea typeface="Inter" pitchFamily="34" charset="-122"/>
+                <a:cs typeface="Inter" pitchFamily="34" charset="-120"/>
+              </a:rPr>
+              <a:t>Track It in the App</a:t>
+            </a:r>
+            <a:endParaRPr lang="en-US" sz="750" dirty="0"/>
+          </a:p>
+        </p:txBody>
+      </p:sp>
+      <p:sp>
+        <p:nvSpPr>
+          <p:cNvPr id="44" name="Shape 38"/>
+          <p:cNvSpPr/>
+          <p:nvPr/>
+        </p:nvSpPr>
+        <p:spPr>
+          <a:xfrm>
+            <a:off x="4961534" y="2560320"/>
+            <a:ext cx="676656" cy="228600"/>
+          </a:xfrm>
+          <a:prstGeom prst="roundRect">
+            <a:avLst>
+              <a:gd name="adj" fmla="val 48000"/>
+            </a:avLst>
+          </a:prstGeom>
+          <a:solidFill>
+            <a:srgbClr val="0A1F44"/>
+          </a:solidFill>
+          <a:ln w="9525">
+            <a:solidFill>
+              <a:srgbClr val="0A1F44"/>
+            </a:solidFill>
+            <a:prstDash val="solid"/>
+          </a:ln>
+        </p:spPr>
+      </p:sp>
+      <p:sp>
+        <p:nvSpPr>
+          <p:cNvPr id="45" name="Text 39"/>
+          <p:cNvSpPr txBox="1"/>
+          <p:nvPr/>
+        </p:nvSpPr>
+        <p:spPr>
+          <a:xfrm>
+            <a:off x="4961534" y="2560320"/>
+            <a:ext cx="676656" cy="228600"/>
+          </a:xfrm>
+          <a:prstGeom prst="rect">
+            <a:avLst/>
+          </a:prstGeom>
+          <a:noFill/>
+          <a:ln/>
+        </p:spPr>
+        <p:txBody>
+          <a:bodyPr wrap="square" lIns="0" tIns="0" rIns="0" bIns="0" rtlCol="0" anchor="ctr"/>
+          <a:lstStyle/>
+          <a:p>
+            <a:pPr algn="ctr" indent="0" marL="0">
+              <a:buNone/>
+            </a:pPr>
+            <a:r>
+              <a:rPr lang="en-US" sz="750" b="1" dirty="0">
+                <a:solidFill>
+                  <a:srgbClr val="FFFFFF"/>
+                </a:solidFill>
+                <a:latin typeface="Inter" pitchFamily="34" charset="0"/>
+                <a:ea typeface="Inter" pitchFamily="34" charset="-122"/>
+                <a:cs typeface="Inter" pitchFamily="34" charset="-120"/>
+              </a:rPr>
+              <a:t>Saved Cart</a:t>
+            </a:r>
+            <a:endParaRPr lang="en-US" sz="750" dirty="0"/>
+          </a:p>
+        </p:txBody>
+      </p:sp>
+      <p:sp>
+        <p:nvSpPr>
+          <p:cNvPr id="46" name="Shape 40"/>
+          <p:cNvSpPr/>
+          <p:nvPr/>
+        </p:nvSpPr>
+        <p:spPr>
+          <a:xfrm>
+            <a:off x="5693054" y="2560320"/>
+            <a:ext cx="1269187" cy="228600"/>
+          </a:xfrm>
+          <a:prstGeom prst="roundRect">
+            <a:avLst>
+              <a:gd name="adj" fmla="val 48000"/>
+            </a:avLst>
+          </a:prstGeom>
+          <a:solidFill>
+            <a:srgbClr val="FFFFFF"/>
+          </a:solidFill>
+          <a:ln w="9525">
+            <a:solidFill>
+              <a:srgbClr val="94A3B8"/>
+            </a:solidFill>
+            <a:prstDash val="dash"/>
+          </a:ln>
+        </p:spPr>
+      </p:sp>
+      <p:sp>
+        <p:nvSpPr>
+          <p:cNvPr id="47" name="Text 41"/>
+          <p:cNvSpPr txBox="1"/>
+          <p:nvPr/>
+        </p:nvSpPr>
+        <p:spPr>
+          <a:xfrm>
+            <a:off x="5693054" y="2560320"/>
+            <a:ext cx="1269187" cy="228600"/>
+          </a:xfrm>
+          <a:prstGeom prst="rect">
+            <a:avLst/>
+          </a:prstGeom>
+          <a:noFill/>
+          <a:ln/>
+        </p:spPr>
+        <p:txBody>
+          <a:bodyPr wrap="square" lIns="0" tIns="0" rIns="0" bIns="0" rtlCol="0" anchor="ctr"/>
+          <a:lstStyle/>
+          <a:p>
+            <a:pPr algn="ctr" indent="0" marL="0">
+              <a:buNone/>
+            </a:pPr>
+            <a:r>
+              <a:rPr lang="en-US" sz="750" b="1" dirty="0">
+                <a:solidFill>
+                  <a:srgbClr val="64748B"/>
+                </a:solidFill>
+                <a:latin typeface="Inter" pitchFamily="34" charset="0"/>
+                <a:ea typeface="Inter" pitchFamily="34" charset="-122"/>
+                <a:cs typeface="Inter" pitchFamily="34" charset="-120"/>
+              </a:rPr>
+              <a:t>Restock-First Waitlist</a:t>
+            </a:r>
+            <a:endParaRPr lang="en-US" sz="750" dirty="0"/>
+          </a:p>
+        </p:txBody>
+      </p:sp>
+      <p:sp>
+        <p:nvSpPr>
+          <p:cNvPr id="48" name="Shape 42"/>
+          <p:cNvSpPr/>
+          <p:nvPr/>
+        </p:nvSpPr>
+        <p:spPr>
+          <a:xfrm>
+            <a:off x="9747504" y="1682496"/>
+            <a:ext cx="1847088" cy="1051560"/>
+          </a:xfrm>
+          <a:prstGeom prst="roundRect">
+            <a:avLst>
+              <a:gd name="adj" fmla="val 5217"/>
+            </a:avLst>
           </a:prstGeom>
           <a:solidFill>
             <a:srgbClr val="0A1F44"/>
@@ -48397,9 +49161,259 @@
           </a:ln>
         </p:spPr>
       </p:sp>
+      <p:sp>
+        <p:nvSpPr>
+          <p:cNvPr id="49" name="Text 43"/>
+          <p:cNvSpPr txBox="1"/>
+          <p:nvPr/>
+        </p:nvSpPr>
+        <p:spPr>
+          <a:xfrm>
+            <a:off x="9875520" y="1682496"/>
+            <a:ext cx="1664208" cy="1051560"/>
+          </a:xfrm>
+          <a:prstGeom prst="rect">
+            <a:avLst/>
+          </a:prstGeom>
+          <a:noFill/>
+          <a:ln/>
+        </p:spPr>
+        <p:txBody>
+          <a:bodyPr wrap="square" lIns="0" tIns="0" rIns="0" bIns="0" rtlCol="0" anchor="ctr"/>
+          <a:lstStyle/>
+          <a:p>
+            <a:pPr indent="0" marL="0">
+              <a:buNone/>
+            </a:pPr>
+            <a:r>
+              <a:rPr lang="en-US" sz="1100" b="1" dirty="0">
+                <a:solidFill>
+                  <a:srgbClr val="FFFFFF"/>
+                </a:solidFill>
+                <a:latin typeface="Inter" pitchFamily="34" charset="0"/>
+                <a:ea typeface="Inter" pitchFamily="34" charset="-122"/>
+                <a:cs typeface="Inter" pitchFamily="34" charset="-120"/>
+              </a:rPr>
+              <a:t>$6M owned line</a:t>
+            </a:r>
+            <a:endParaRPr lang="en-US" sz="1200" dirty="0"/>
+          </a:p>
+          <a:p>
+            <a:pPr indent="0" marL="0">
+              <a:buNone/>
+            </a:pPr>
+            <a:r>
+              <a:rPr lang="en-US" sz="900" dirty="0">
+                <a:solidFill>
+                  <a:srgbClr val="C7D7F5"/>
+                </a:solidFill>
+                <a:latin typeface="Inter" pitchFamily="34" charset="0"/>
+                <a:ea typeface="Inter" pitchFamily="34" charset="-122"/>
+                <a:cs typeface="Inter" pitchFamily="34" charset="-120"/>
+              </a:rPr>
+              <a:t>Option A's $2–3M (Exhibit I)</a:t>
+            </a:r>
+            <a:endParaRPr lang="en-US" sz="1200" dirty="0"/>
+          </a:p>
+        </p:txBody>
+      </p:sp>
+      <p:sp>
+        <p:nvSpPr>
+          <p:cNvPr id="50" name="Shape 44"/>
+          <p:cNvSpPr/>
+          <p:nvPr/>
+        </p:nvSpPr>
+        <p:spPr>
+          <a:xfrm>
+            <a:off x="502920" y="2916936"/>
+            <a:ext cx="11183112" cy="1234440"/>
+          </a:xfrm>
+          <a:prstGeom prst="roundRect">
+            <a:avLst>
+              <a:gd name="adj" fmla="val 5926"/>
+            </a:avLst>
+          </a:prstGeom>
+          <a:solidFill>
+            <a:srgbClr val="FFFFFF"/>
+          </a:solidFill>
+          <a:ln w="9525">
+            <a:solidFill>
+              <a:srgbClr val="E2E8F0"/>
+            </a:solidFill>
+            <a:prstDash val="solid"/>
+          </a:ln>
+        </p:spPr>
+      </p:sp>
+      <p:sp>
+        <p:nvSpPr>
+          <p:cNvPr id="51" name="Shape 45"/>
+          <p:cNvSpPr/>
+          <p:nvPr/>
+        </p:nvSpPr>
+        <p:spPr>
+          <a:xfrm>
+            <a:off x="612648" y="3044952"/>
+            <a:ext cx="329184" cy="329184"/>
+          </a:xfrm>
+          <a:prstGeom prst="ellipse">
+            <a:avLst/>
+          </a:prstGeom>
+          <a:solidFill>
+            <a:srgbClr val="0A1F44"/>
+          </a:solidFill>
+          <a:ln w="6350">
+            <a:solidFill>
+              <a:srgbClr val="0A1F44"/>
+            </a:solidFill>
+            <a:prstDash val="solid"/>
+          </a:ln>
+        </p:spPr>
+      </p:sp>
+      <p:sp>
+        <p:nvSpPr>
+          <p:cNvPr id="52" name="Text 46"/>
+          <p:cNvSpPr txBox="1"/>
+          <p:nvPr/>
+        </p:nvSpPr>
+        <p:spPr>
+          <a:xfrm>
+            <a:off x="612648" y="3044952"/>
+            <a:ext cx="329184" cy="329184"/>
+          </a:xfrm>
+          <a:prstGeom prst="rect">
+            <a:avLst/>
+          </a:prstGeom>
+          <a:noFill/>
+          <a:ln/>
+        </p:spPr>
+        <p:txBody>
+          <a:bodyPr wrap="square" lIns="0" tIns="0" rIns="0" bIns="0" rtlCol="0" anchor="ctr"/>
+          <a:lstStyle/>
+          <a:p>
+            <a:pPr algn="ctr" indent="0" marL="0">
+              <a:buNone/>
+            </a:pPr>
+            <a:r>
+              <a:rPr lang="en-US" sz="1200" b="1" dirty="0">
+                <a:solidFill>
+                  <a:srgbClr val="FFFFFF"/>
+                </a:solidFill>
+                <a:latin typeface="Inter" pitchFamily="34" charset="0"/>
+                <a:ea typeface="Inter" pitchFamily="34" charset="-122"/>
+                <a:cs typeface="Inter" pitchFamily="34" charset="-120"/>
+              </a:rPr>
+              <a:t>2</a:t>
+            </a:r>
+            <a:endParaRPr lang="en-US" sz="1200" dirty="0"/>
+          </a:p>
+        </p:txBody>
+      </p:sp>
+      <p:sp>
+        <p:nvSpPr>
+          <p:cNvPr id="53" name="Text 47"/>
+          <p:cNvSpPr txBox="1"/>
+          <p:nvPr/>
+        </p:nvSpPr>
+        <p:spPr>
+          <a:xfrm>
+            <a:off x="1014984" y="3008376"/>
+            <a:ext cx="1554480" cy="402336"/>
+          </a:xfrm>
+          <a:prstGeom prst="rect">
+            <a:avLst/>
+          </a:prstGeom>
+          <a:noFill/>
+          <a:ln/>
+        </p:spPr>
+        <p:txBody>
+          <a:bodyPr wrap="square" lIns="0" tIns="0" rIns="0" bIns="0" rtlCol="0" anchor="ctr"/>
+          <a:lstStyle/>
+          <a:p>
+            <a:pPr indent="0" marL="0">
+              <a:buNone/>
+            </a:pPr>
+            <a:r>
+              <a:rPr lang="en-US" sz="1150" b="1" dirty="0">
+                <a:solidFill>
+                  <a:srgbClr val="0A1F44"/>
+                </a:solidFill>
+                <a:latin typeface="Inter" pitchFamily="34" charset="0"/>
+                <a:ea typeface="Inter" pitchFamily="34" charset="-122"/>
+                <a:cs typeface="Inter" pitchFamily="34" charset="-120"/>
+              </a:rPr>
+              <a:t>Win the Golden Month</a:t>
+            </a:r>
+            <a:endParaRPr lang="en-US" sz="1150" dirty="0"/>
+          </a:p>
+        </p:txBody>
+      </p:sp>
+      <p:sp>
+        <p:nvSpPr>
+          <p:cNvPr id="54" name="Text 48"/>
+          <p:cNvSpPr txBox="1"/>
+          <p:nvPr/>
+        </p:nvSpPr>
+        <p:spPr>
+          <a:xfrm>
+            <a:off x="630936" y="3429000"/>
+            <a:ext cx="1920240" cy="420624"/>
+          </a:xfrm>
+          <a:prstGeom prst="rect">
+            <a:avLst/>
+          </a:prstGeom>
+          <a:noFill/>
+          <a:ln/>
+        </p:spPr>
+        <p:txBody>
+          <a:bodyPr wrap="square" lIns="0" tIns="0" rIns="0" bIns="0" rtlCol="0" anchor="t"/>
+          <a:lstStyle/>
+          <a:p>
+            <a:pPr indent="0" marL="0">
+              <a:buNone/>
+            </a:pPr>
+            <a:r>
+              <a:rPr lang="en-US" sz="900" dirty="0">
+                <a:solidFill>
+                  <a:srgbClr val="334155"/>
+                </a:solidFill>
+                <a:latin typeface="Inter" pitchFamily="34" charset="0"/>
+                <a:ea typeface="Inter" pitchFamily="34" charset="-122"/>
+                <a:cs typeface="Inter" pitchFamily="34" charset="-120"/>
+              </a:rPr>
+              <a:t>Repeat peaks in week 2; cashmere repeats least, 13.7%</a:t>
+            </a:r>
+            <a:endParaRPr lang="en-US" sz="900" dirty="0"/>
+          </a:p>
+        </p:txBody>
+      </p:sp>
+      <p:sp>
+        <p:nvSpPr>
+          <p:cNvPr id="55" name="Shape 49"/>
+          <p:cNvSpPr/>
+          <p:nvPr/>
+        </p:nvSpPr>
+        <p:spPr>
+          <a:xfrm>
+            <a:off x="2697480" y="3008376"/>
+            <a:ext cx="256032" cy="256032"/>
+          </a:xfrm>
+          <a:prstGeom prst="ellipse">
+            <a:avLst/>
+          </a:prstGeom>
+          <a:solidFill>
+            <a:srgbClr val="EFF6FF"/>
+          </a:solidFill>
+          <a:ln w="6350">
+            <a:solidFill>
+              <a:srgbClr val="EFF6FF"/>
+            </a:solidFill>
+            <a:prstDash val="solid"/>
+          </a:ln>
+        </p:spPr>
+      </p:sp>
       <p:pic>
         <p:nvPicPr>
-          <p:cNvPr id="24" name="Image 4" descr="preencoded.png">    </p:cNvPr>
+          <p:cNvPr id="56" name="Image 4" descr="preencoded.png">    </p:cNvPr>
           <p:cNvPicPr>
             <a:picLocks noChangeAspect="1"/>
           </p:cNvPicPr>
@@ -48413,8 +49427,8 @@
         </p:blipFill>
         <p:spPr>
           <a:xfrm>
-            <a:off x="666780" y="4722144"/>
-            <a:ext cx="184343" cy="184343"/>
+            <a:off x="2753807" y="3064703"/>
+            <a:ext cx="143378" cy="143378"/>
           </a:xfrm>
           <a:prstGeom prst="rect">
             <a:avLst/>
@@ -48423,14 +49437,14 @@
       </p:pic>
       <p:sp>
         <p:nvSpPr>
-          <p:cNvPr id="25" name="Text 18"/>
-          <p:cNvSpPr txBox="1"/>
-          <p:nvPr/>
-        </p:nvSpPr>
-        <p:spPr>
-          <a:xfrm>
-            <a:off x="978408" y="4434840"/>
-            <a:ext cx="1527048" cy="758952"/>
+          <p:cNvPr id="57" name="Text 50"/>
+          <p:cNvSpPr txBox="1"/>
+          <p:nvPr/>
+        </p:nvSpPr>
+        <p:spPr>
+          <a:xfrm>
+            <a:off x="3008376" y="3008376"/>
+            <a:ext cx="1271016" cy="256032"/>
           </a:xfrm>
           <a:prstGeom prst="rect">
             <a:avLst/>
@@ -48446,7 +49460,7 @@
               <a:buNone/>
             </a:pPr>
             <a:r>
-              <a:rPr lang="en-US" sz="1500" b="1" dirty="0">
+              <a:rPr lang="en-US" sz="900" b="1" dirty="0">
                 <a:solidFill>
                   <a:srgbClr val="0A1F44"/>
                 </a:solidFill>
@@ -48454,1679 +49468,32 @@
                 <a:ea typeface="Inter" pitchFamily="34" charset="-122"/>
                 <a:cs typeface="Inter" pitchFamily="34" charset="-120"/>
               </a:rPr>
-              <a:t>23.0%  </a:t>
-            </a:r>
-            <a:pPr indent="0" marL="0">
-              <a:buNone/>
-            </a:pPr>
-            <a:r>
-              <a:rPr lang="en-US" sz="1000" b="1" dirty="0">
-                <a:solidFill>
-                  <a:srgbClr val="0A1F44"/>
-                </a:solidFill>
-                <a:latin typeface="Inter" pitchFamily="34" charset="0"/>
-                <a:ea typeface="Inter" pitchFamily="34" charset="-122"/>
-                <a:cs typeface="Inter" pitchFamily="34" charset="-120"/>
-              </a:rPr>
-              <a:t>Wasted ads</a:t>
-            </a:r>
-            <a:endParaRPr lang="en-US" sz="1200" dirty="0"/>
-          </a:p>
-          <a:p>
-            <a:pPr indent="0" marL="0">
-              <a:buNone/>
-            </a:pPr>
-            <a:r>
-              <a:rPr lang="en-US" sz="800" dirty="0">
-                <a:solidFill>
-                  <a:srgbClr val="334155"/>
-                </a:solidFill>
-                <a:latin typeface="Inter" pitchFamily="34" charset="0"/>
-                <a:ea typeface="Inter" pitchFamily="34" charset="-122"/>
-                <a:cs typeface="Inter" pitchFamily="34" charset="-120"/>
-              </a:rPr>
-              <a:t>retargeted repeat = organic 23.4%</a:t>
-            </a:r>
-            <a:endParaRPr lang="en-US" sz="1200" dirty="0"/>
-          </a:p>
-        </p:txBody>
-      </p:sp>
-      <p:sp>
-        <p:nvSpPr>
-          <p:cNvPr id="26" name="Shape 19"/>
-          <p:cNvSpPr/>
-          <p:nvPr/>
-        </p:nvSpPr>
-        <p:spPr>
-          <a:xfrm>
-            <a:off x="2788920" y="1234440"/>
-            <a:ext cx="2286000" cy="420624"/>
-          </a:xfrm>
-          <a:prstGeom prst="homePlate">
-            <a:avLst/>
-          </a:prstGeom>
-          <a:solidFill>
-            <a:srgbClr val="0A1F44"/>
-          </a:solidFill>
-          <a:ln w="6350">
-            <a:solidFill>
-              <a:srgbClr val="0A1F44"/>
-            </a:solidFill>
-            <a:prstDash val="solid"/>
-          </a:ln>
-        </p:spPr>
-      </p:sp>
-      <p:sp>
-        <p:nvSpPr>
-          <p:cNvPr id="27" name="Text 20"/>
-          <p:cNvSpPr txBox="1"/>
-          <p:nvPr/>
-        </p:nvSpPr>
-        <p:spPr>
-          <a:xfrm>
-            <a:off x="2898648" y="1234440"/>
-            <a:ext cx="1901952" cy="420624"/>
-          </a:xfrm>
-          <a:prstGeom prst="rect">
-            <a:avLst/>
-          </a:prstGeom>
-          <a:noFill/>
-          <a:ln/>
-        </p:spPr>
-        <p:txBody>
-          <a:bodyPr wrap="square" lIns="0" tIns="0" rIns="0" bIns="0" rtlCol="0" anchor="ctr"/>
-          <a:lstStyle/>
-          <a:p>
-            <a:pPr indent="0" marL="0">
-              <a:buNone/>
-            </a:pPr>
-            <a:r>
-              <a:rPr lang="en-US" sz="1050" b="1" dirty="0">
-                <a:solidFill>
-                  <a:srgbClr val="FFFFFF"/>
-                </a:solidFill>
-                <a:latin typeface="Inter" pitchFamily="34" charset="0"/>
-                <a:ea typeface="Inter" pitchFamily="34" charset="-122"/>
-                <a:cs typeface="Inter" pitchFamily="34" charset="-120"/>
-              </a:rPr>
-              <a:t>Set up  </a:t>
-            </a:r>
-            <a:pPr indent="0" marL="0">
-              <a:buNone/>
-            </a:pPr>
-            <a:r>
-              <a:rPr lang="en-US" sz="850" dirty="0">
-                <a:solidFill>
-                  <a:srgbClr val="FFFFFF"/>
-                </a:solidFill>
-                <a:latin typeface="Inter" pitchFamily="34" charset="0"/>
-                <a:ea typeface="Inter" pitchFamily="34" charset="-122"/>
-                <a:cs typeface="Inter" pitchFamily="34" charset="-120"/>
-              </a:rPr>
-              <a:t>Weeks 1–4</a:t>
-            </a:r>
-            <a:endParaRPr lang="en-US" sz="1200" dirty="0"/>
-          </a:p>
-        </p:txBody>
-      </p:sp>
-      <p:sp>
-        <p:nvSpPr>
-          <p:cNvPr id="28" name="Shape 21"/>
-          <p:cNvSpPr/>
-          <p:nvPr/>
-        </p:nvSpPr>
-        <p:spPr>
-          <a:xfrm>
-            <a:off x="2788920" y="1773936"/>
-            <a:ext cx="2176272" cy="3474720"/>
-          </a:xfrm>
-          <a:prstGeom prst="roundRect">
-            <a:avLst>
-              <a:gd name="adj" fmla="val 4202"/>
-            </a:avLst>
-          </a:prstGeom>
-          <a:solidFill>
-            <a:srgbClr val="F8FAFC"/>
-          </a:solidFill>
-          <a:ln w="9525">
-            <a:solidFill>
-              <a:srgbClr val="E2E8F0"/>
-            </a:solidFill>
-            <a:prstDash val="solid"/>
-          </a:ln>
-        </p:spPr>
-      </p:sp>
-      <p:sp>
-        <p:nvSpPr>
-          <p:cNvPr id="29" name="Shape 22"/>
-          <p:cNvSpPr/>
-          <p:nvPr/>
-        </p:nvSpPr>
-        <p:spPr>
-          <a:xfrm>
-            <a:off x="2916936" y="2153412"/>
-            <a:ext cx="109728" cy="109728"/>
+              <a:t>Shipping events</a:t>
+            </a:r>
+            <a:endParaRPr lang="en-US" sz="900" dirty="0"/>
+          </a:p>
+        </p:txBody>
+      </p:sp>
+      <p:sp>
+        <p:nvSpPr>
+          <p:cNvPr id="58" name="Shape 51"/>
+          <p:cNvSpPr/>
+          <p:nvPr/>
+        </p:nvSpPr>
+        <p:spPr>
+          <a:xfrm>
+            <a:off x="2697480" y="3291840"/>
+            <a:ext cx="256032" cy="256032"/>
           </a:xfrm>
           <a:prstGeom prst="ellipse">
             <a:avLst/>
-          </a:prstGeom>
-          <a:solidFill>
-            <a:srgbClr val="1D4ED8"/>
-          </a:solidFill>
-          <a:ln w="6350">
-            <a:solidFill>
-              <a:srgbClr val="1D4ED8"/>
-            </a:solidFill>
-            <a:prstDash val="solid"/>
-          </a:ln>
-        </p:spPr>
-      </p:sp>
-      <p:sp>
-        <p:nvSpPr>
-          <p:cNvPr id="30" name="Text 23"/>
-          <p:cNvSpPr txBox="1"/>
-          <p:nvPr/>
-        </p:nvSpPr>
-        <p:spPr>
-          <a:xfrm>
-            <a:off x="3099816" y="1828800"/>
-            <a:ext cx="1792224" cy="758952"/>
-          </a:xfrm>
-          <a:prstGeom prst="rect">
-            <a:avLst/>
-          </a:prstGeom>
-          <a:noFill/>
-          <a:ln/>
-        </p:spPr>
-        <p:txBody>
-          <a:bodyPr wrap="square" lIns="0" tIns="0" rIns="0" bIns="0" rtlCol="0" anchor="ctr"/>
-          <a:lstStyle/>
-          <a:p>
-            <a:pPr indent="0" marL="0">
-              <a:buNone/>
-            </a:pPr>
-            <a:r>
-              <a:rPr lang="en-US" sz="950" dirty="0">
-                <a:solidFill>
-                  <a:srgbClr val="0F172A"/>
-                </a:solidFill>
-                <a:latin typeface="Inter" pitchFamily="34" charset="0"/>
-                <a:ea typeface="Inter" pitchFamily="34" charset="-122"/>
-                <a:cs typeface="Inter" pitchFamily="34" charset="-120"/>
-              </a:rPr>
-              <a:t>Abandoner segment in CJA</a:t>
-            </a:r>
-            <a:endParaRPr lang="en-US" sz="950" dirty="0"/>
-          </a:p>
-        </p:txBody>
-      </p:sp>
-      <p:sp>
-        <p:nvSpPr>
-          <p:cNvPr id="31" name="Shape 24"/>
-          <p:cNvSpPr/>
-          <p:nvPr/>
-        </p:nvSpPr>
-        <p:spPr>
-          <a:xfrm>
-            <a:off x="2971800" y="2633472"/>
-            <a:ext cx="1810512" cy="0"/>
-          </a:xfrm>
-          <a:prstGeom prst="line">
-            <a:avLst/>
-          </a:prstGeom>
-          <a:noFill/>
-          <a:ln w="6350">
-            <a:solidFill>
-              <a:srgbClr val="E2E8F0"/>
-            </a:solidFill>
-            <a:prstDash val="solid"/>
-          </a:ln>
-        </p:spPr>
-      </p:sp>
-      <p:sp>
-        <p:nvSpPr>
-          <p:cNvPr id="32" name="Shape 25"/>
-          <p:cNvSpPr/>
-          <p:nvPr/>
-        </p:nvSpPr>
-        <p:spPr>
-          <a:xfrm>
-            <a:off x="2916936" y="3022092"/>
-            <a:ext cx="109728" cy="109728"/>
-          </a:xfrm>
-          <a:prstGeom prst="ellipse">
-            <a:avLst/>
-          </a:prstGeom>
-          <a:solidFill>
-            <a:srgbClr val="1D4ED8"/>
-          </a:solidFill>
-          <a:ln w="6350">
-            <a:solidFill>
-              <a:srgbClr val="1D4ED8"/>
-            </a:solidFill>
-            <a:prstDash val="solid"/>
-          </a:ln>
-        </p:spPr>
-      </p:sp>
-      <p:sp>
-        <p:nvSpPr>
-          <p:cNvPr id="33" name="Text 26"/>
-          <p:cNvSpPr txBox="1"/>
-          <p:nvPr/>
-        </p:nvSpPr>
-        <p:spPr>
-          <a:xfrm>
-            <a:off x="3099816" y="2697480"/>
-            <a:ext cx="1792224" cy="758952"/>
-          </a:xfrm>
-          <a:prstGeom prst="rect">
-            <a:avLst/>
-          </a:prstGeom>
-          <a:noFill/>
-          <a:ln/>
-        </p:spPr>
-        <p:txBody>
-          <a:bodyPr wrap="square" lIns="0" tIns="0" rIns="0" bIns="0" rtlCol="0" anchor="ctr"/>
-          <a:lstStyle/>
-          <a:p>
-            <a:pPr indent="0" marL="0">
-              <a:buNone/>
-            </a:pPr>
-            <a:r>
-              <a:rPr lang="en-US" sz="950" dirty="0">
-                <a:solidFill>
-                  <a:srgbClr val="0F172A"/>
-                </a:solidFill>
-                <a:latin typeface="Inter" pitchFamily="34" charset="0"/>
-                <a:ea typeface="Inter" pitchFamily="34" charset="-122"/>
-                <a:cs typeface="Inter" pitchFamily="34" charset="-120"/>
-              </a:rPr>
-              <a:t>Consent split; Passport print</a:t>
-            </a:r>
-            <a:endParaRPr lang="en-US" sz="950" dirty="0"/>
-          </a:p>
-        </p:txBody>
-      </p:sp>
-      <p:sp>
-        <p:nvSpPr>
-          <p:cNvPr id="34" name="Shape 27"/>
-          <p:cNvSpPr/>
-          <p:nvPr/>
-        </p:nvSpPr>
-        <p:spPr>
-          <a:xfrm>
-            <a:off x="2971800" y="3502152"/>
-            <a:ext cx="1810512" cy="0"/>
-          </a:xfrm>
-          <a:prstGeom prst="line">
-            <a:avLst/>
-          </a:prstGeom>
-          <a:noFill/>
-          <a:ln w="6350">
-            <a:solidFill>
-              <a:srgbClr val="E2E8F0"/>
-            </a:solidFill>
-            <a:prstDash val="solid"/>
-          </a:ln>
-        </p:spPr>
-      </p:sp>
-      <p:sp>
-        <p:nvSpPr>
-          <p:cNvPr id="35" name="Shape 28"/>
-          <p:cNvSpPr/>
-          <p:nvPr/>
-        </p:nvSpPr>
-        <p:spPr>
-          <a:xfrm>
-            <a:off x="2916936" y="3890772"/>
-            <a:ext cx="109728" cy="109728"/>
-          </a:xfrm>
-          <a:prstGeom prst="ellipse">
-            <a:avLst/>
-          </a:prstGeom>
-          <a:solidFill>
-            <a:srgbClr val="1D4ED8"/>
-          </a:solidFill>
-          <a:ln w="6350">
-            <a:solidFill>
-              <a:srgbClr val="1D4ED8"/>
-            </a:solidFill>
-            <a:prstDash val="solid"/>
-          </a:ln>
-        </p:spPr>
-      </p:sp>
-      <p:sp>
-        <p:nvSpPr>
-          <p:cNvPr id="36" name="Text 29"/>
-          <p:cNvSpPr txBox="1"/>
-          <p:nvPr/>
-        </p:nvSpPr>
-        <p:spPr>
-          <a:xfrm>
-            <a:off x="3099816" y="3566160"/>
-            <a:ext cx="1792224" cy="758952"/>
-          </a:xfrm>
-          <a:prstGeom prst="rect">
-            <a:avLst/>
-          </a:prstGeom>
-          <a:noFill/>
-          <a:ln/>
-        </p:spPr>
-        <p:txBody>
-          <a:bodyPr wrap="square" lIns="0" tIns="0" rIns="0" bIns="0" rtlCol="0" anchor="ctr"/>
-          <a:lstStyle/>
-          <a:p>
-            <a:pPr indent="0" marL="0">
-              <a:buNone/>
-            </a:pPr>
-            <a:r>
-              <a:rPr lang="en-US" sz="950" dirty="0">
-                <a:solidFill>
-                  <a:srgbClr val="0F172A"/>
-                </a:solidFill>
-                <a:latin typeface="Inter" pitchFamily="34" charset="0"/>
-                <a:ea typeface="Inter" pitchFamily="34" charset="-122"/>
-                <a:cs typeface="Inter" pitchFamily="34" charset="-120"/>
-              </a:rPr>
-              <a:t>Delivery events → person ID</a:t>
-            </a:r>
-            <a:endParaRPr lang="en-US" sz="950" dirty="0"/>
-          </a:p>
-        </p:txBody>
-      </p:sp>
-      <p:sp>
-        <p:nvSpPr>
-          <p:cNvPr id="37" name="Shape 30"/>
-          <p:cNvSpPr/>
-          <p:nvPr/>
-        </p:nvSpPr>
-        <p:spPr>
-          <a:xfrm>
-            <a:off x="2971800" y="4370832"/>
-            <a:ext cx="1810512" cy="0"/>
-          </a:xfrm>
-          <a:prstGeom prst="line">
-            <a:avLst/>
-          </a:prstGeom>
-          <a:noFill/>
-          <a:ln w="6350">
-            <a:solidFill>
-              <a:srgbClr val="E2E8F0"/>
-            </a:solidFill>
-            <a:prstDash val="solid"/>
-          </a:ln>
-        </p:spPr>
-      </p:sp>
-      <p:sp>
-        <p:nvSpPr>
-          <p:cNvPr id="38" name="Shape 31"/>
-          <p:cNvSpPr/>
-          <p:nvPr/>
-        </p:nvSpPr>
-        <p:spPr>
-          <a:xfrm>
-            <a:off x="2916936" y="4759452"/>
-            <a:ext cx="109728" cy="109728"/>
-          </a:xfrm>
-          <a:prstGeom prst="ellipse">
-            <a:avLst/>
-          </a:prstGeom>
-          <a:solidFill>
-            <a:srgbClr val="1D4ED8"/>
-          </a:solidFill>
-          <a:ln w="6350">
-            <a:solidFill>
-              <a:srgbClr val="1D4ED8"/>
-            </a:solidFill>
-            <a:prstDash val="solid"/>
-          </a:ln>
-        </p:spPr>
-      </p:sp>
-      <p:sp>
-        <p:nvSpPr>
-          <p:cNvPr id="39" name="Text 32"/>
-          <p:cNvSpPr txBox="1"/>
-          <p:nvPr/>
-        </p:nvSpPr>
-        <p:spPr>
-          <a:xfrm>
-            <a:off x="3099816" y="4434840"/>
-            <a:ext cx="1792224" cy="758952"/>
-          </a:xfrm>
-          <a:prstGeom prst="rect">
-            <a:avLst/>
-          </a:prstGeom>
-          <a:noFill/>
-          <a:ln/>
-        </p:spPr>
-        <p:txBody>
-          <a:bodyPr wrap="square" lIns="0" tIns="0" rIns="0" bIns="0" rtlCol="0" anchor="ctr"/>
-          <a:lstStyle/>
-          <a:p>
-            <a:pPr indent="0" marL="0">
-              <a:buNone/>
-            </a:pPr>
-            <a:r>
-              <a:rPr lang="en-US" sz="950" dirty="0">
-                <a:solidFill>
-                  <a:srgbClr val="0F172A"/>
-                </a:solidFill>
-                <a:latin typeface="Inter" pitchFamily="34" charset="0"/>
-                <a:ea typeface="Inter" pitchFamily="34" charset="-122"/>
-                <a:cs typeface="Inter" pitchFamily="34" charset="-120"/>
-              </a:rPr>
-              <a:t>Audiences into Real-Time CDP</a:t>
-            </a:r>
-            <a:endParaRPr lang="en-US" sz="950" dirty="0"/>
-          </a:p>
-        </p:txBody>
-      </p:sp>
-      <p:sp>
-        <p:nvSpPr>
-          <p:cNvPr id="40" name="Shape 33"/>
-          <p:cNvSpPr/>
-          <p:nvPr/>
-        </p:nvSpPr>
-        <p:spPr>
-          <a:xfrm>
-            <a:off x="5129784" y="1234440"/>
-            <a:ext cx="2286000" cy="420624"/>
-          </a:xfrm>
-          <a:prstGeom prst="chevron">
-            <a:avLst/>
-          </a:prstGeom>
-          <a:solidFill>
-            <a:srgbClr val="1D4ED8"/>
-          </a:solidFill>
-          <a:ln w="6350">
-            <a:solidFill>
-              <a:srgbClr val="1D4ED8"/>
-            </a:solidFill>
-            <a:prstDash val="solid"/>
-          </a:ln>
-        </p:spPr>
-      </p:sp>
-      <p:sp>
-        <p:nvSpPr>
-          <p:cNvPr id="41" name="Text 34"/>
-          <p:cNvSpPr txBox="1"/>
-          <p:nvPr/>
-        </p:nvSpPr>
-        <p:spPr>
-          <a:xfrm>
-            <a:off x="5404104" y="1234440"/>
-            <a:ext cx="1901952" cy="420624"/>
-          </a:xfrm>
-          <a:prstGeom prst="rect">
-            <a:avLst/>
-          </a:prstGeom>
-          <a:noFill/>
-          <a:ln/>
-        </p:spPr>
-        <p:txBody>
-          <a:bodyPr wrap="square" lIns="0" tIns="0" rIns="0" bIns="0" rtlCol="0" anchor="ctr"/>
-          <a:lstStyle/>
-          <a:p>
-            <a:pPr indent="0" marL="0">
-              <a:buNone/>
-            </a:pPr>
-            <a:r>
-              <a:rPr lang="en-US" sz="1050" b="1" dirty="0">
-                <a:solidFill>
-                  <a:srgbClr val="FFFFFF"/>
-                </a:solidFill>
-                <a:latin typeface="Inter" pitchFamily="34" charset="0"/>
-                <a:ea typeface="Inter" pitchFamily="34" charset="-122"/>
-                <a:cs typeface="Inter" pitchFamily="34" charset="-120"/>
-              </a:rPr>
-              <a:t>Launch  </a:t>
-            </a:r>
-            <a:pPr indent="0" marL="0">
-              <a:buNone/>
-            </a:pPr>
-            <a:r>
-              <a:rPr lang="en-US" sz="850" dirty="0">
-                <a:solidFill>
-                  <a:srgbClr val="FFFFFF"/>
-                </a:solidFill>
-                <a:latin typeface="Inter" pitchFamily="34" charset="0"/>
-                <a:ea typeface="Inter" pitchFamily="34" charset="-122"/>
-                <a:cs typeface="Inter" pitchFamily="34" charset="-120"/>
-              </a:rPr>
-              <a:t>Weeks 5–8 · South</a:t>
-            </a:r>
-            <a:endParaRPr lang="en-US" sz="1200" dirty="0"/>
-          </a:p>
-        </p:txBody>
-      </p:sp>
-      <p:sp>
-        <p:nvSpPr>
-          <p:cNvPr id="42" name="Shape 35"/>
-          <p:cNvSpPr/>
-          <p:nvPr/>
-        </p:nvSpPr>
-        <p:spPr>
-          <a:xfrm>
-            <a:off x="5129784" y="1773936"/>
-            <a:ext cx="2176272" cy="3474720"/>
-          </a:xfrm>
-          <a:prstGeom prst="roundRect">
-            <a:avLst>
-              <a:gd name="adj" fmla="val 4202"/>
-            </a:avLst>
-          </a:prstGeom>
-          <a:solidFill>
-            <a:srgbClr val="F8FAFC"/>
-          </a:solidFill>
-          <a:ln w="9525">
-            <a:solidFill>
-              <a:srgbClr val="E2E8F0"/>
-            </a:solidFill>
-            <a:prstDash val="solid"/>
-          </a:ln>
-        </p:spPr>
-      </p:sp>
-      <p:sp>
-        <p:nvSpPr>
-          <p:cNvPr id="43" name="Shape 36"/>
-          <p:cNvSpPr/>
-          <p:nvPr/>
-        </p:nvSpPr>
-        <p:spPr>
-          <a:xfrm>
-            <a:off x="5257800" y="2153412"/>
-            <a:ext cx="109728" cy="109728"/>
-          </a:xfrm>
-          <a:prstGeom prst="ellipse">
-            <a:avLst/>
-          </a:prstGeom>
-          <a:solidFill>
-            <a:srgbClr val="1D4ED8"/>
-          </a:solidFill>
-          <a:ln w="6350">
-            <a:solidFill>
-              <a:srgbClr val="1D4ED8"/>
-            </a:solidFill>
-            <a:prstDash val="solid"/>
-          </a:ln>
-        </p:spPr>
-      </p:sp>
-      <p:sp>
-        <p:nvSpPr>
-          <p:cNvPr id="44" name="Text 37"/>
-          <p:cNvSpPr txBox="1"/>
-          <p:nvPr/>
-        </p:nvSpPr>
-        <p:spPr>
-          <a:xfrm>
-            <a:off x="5440680" y="1828800"/>
-            <a:ext cx="1792224" cy="758952"/>
-          </a:xfrm>
-          <a:prstGeom prst="rect">
-            <a:avLst/>
-          </a:prstGeom>
-          <a:noFill/>
-          <a:ln/>
-        </p:spPr>
-        <p:txBody>
-          <a:bodyPr wrap="square" lIns="0" tIns="0" rIns="0" bIns="0" rtlCol="0" anchor="ctr"/>
-          <a:lstStyle/>
-          <a:p>
-            <a:pPr indent="0" marL="0">
-              <a:buNone/>
-            </a:pPr>
-            <a:r>
-              <a:rPr lang="en-US" sz="950" dirty="0">
-                <a:solidFill>
-                  <a:srgbClr val="0F172A"/>
-                </a:solidFill>
-                <a:latin typeface="Inter" pitchFamily="34" charset="0"/>
-                <a:ea typeface="Inter" pitchFamily="34" charset="-122"/>
-                <a:cs typeface="Inter" pitchFamily="34" charset="-120"/>
-              </a:rPr>
-              <a:t>Cart reminders live · wk 5</a:t>
-            </a:r>
-            <a:endParaRPr lang="en-US" sz="950" dirty="0"/>
-          </a:p>
-        </p:txBody>
-      </p:sp>
-      <p:sp>
-        <p:nvSpPr>
-          <p:cNvPr id="45" name="Shape 38"/>
-          <p:cNvSpPr/>
-          <p:nvPr/>
-        </p:nvSpPr>
-        <p:spPr>
-          <a:xfrm>
-            <a:off x="5312664" y="2633472"/>
-            <a:ext cx="1810512" cy="0"/>
-          </a:xfrm>
-          <a:prstGeom prst="line">
-            <a:avLst/>
-          </a:prstGeom>
-          <a:noFill/>
-          <a:ln w="6350">
-            <a:solidFill>
-              <a:srgbClr val="E2E8F0"/>
-            </a:solidFill>
-            <a:prstDash val="solid"/>
-          </a:ln>
-        </p:spPr>
-      </p:sp>
-      <p:sp>
-        <p:nvSpPr>
-          <p:cNvPr id="46" name="Shape 39"/>
-          <p:cNvSpPr/>
-          <p:nvPr/>
-        </p:nvSpPr>
-        <p:spPr>
-          <a:xfrm>
-            <a:off x="5257800" y="3022092"/>
-            <a:ext cx="109728" cy="109728"/>
-          </a:xfrm>
-          <a:prstGeom prst="ellipse">
-            <a:avLst/>
-          </a:prstGeom>
-          <a:solidFill>
-            <a:srgbClr val="1D4ED8"/>
-          </a:solidFill>
-          <a:ln w="6350">
-            <a:solidFill>
-              <a:srgbClr val="1D4ED8"/>
-            </a:solidFill>
-            <a:prstDash val="solid"/>
-          </a:ln>
-        </p:spPr>
-      </p:sp>
-      <p:sp>
-        <p:nvSpPr>
-          <p:cNvPr id="47" name="Text 40"/>
-          <p:cNvSpPr txBox="1"/>
-          <p:nvPr/>
-        </p:nvSpPr>
-        <p:spPr>
-          <a:xfrm>
-            <a:off x="5440680" y="2697480"/>
-            <a:ext cx="1792224" cy="758952"/>
-          </a:xfrm>
-          <a:prstGeom prst="rect">
-            <a:avLst/>
-          </a:prstGeom>
-          <a:noFill/>
-          <a:ln/>
-        </p:spPr>
-        <p:txBody>
-          <a:bodyPr wrap="square" lIns="0" tIns="0" rIns="0" bIns="0" rtlCol="0" anchor="ctr"/>
-          <a:lstStyle/>
-          <a:p>
-            <a:pPr indent="0" marL="0">
-              <a:buNone/>
-            </a:pPr>
-            <a:r>
-              <a:rPr lang="en-US" sz="950" dirty="0">
-                <a:solidFill>
-                  <a:srgbClr val="0F172A"/>
-                </a:solidFill>
-                <a:latin typeface="Inter" pitchFamily="34" charset="0"/>
-                <a:ea typeface="Inter" pitchFamily="34" charset="-122"/>
-                <a:cs typeface="Inter" pitchFamily="34" charset="-120"/>
-              </a:rPr>
-              <a:t>Passport + SMS ask · wk 6</a:t>
-            </a:r>
-            <a:endParaRPr lang="en-US" sz="950" dirty="0"/>
-          </a:p>
-        </p:txBody>
-      </p:sp>
-      <p:sp>
-        <p:nvSpPr>
-          <p:cNvPr id="48" name="Shape 41"/>
-          <p:cNvSpPr/>
-          <p:nvPr/>
-        </p:nvSpPr>
-        <p:spPr>
-          <a:xfrm>
-            <a:off x="5312664" y="3502152"/>
-            <a:ext cx="1810512" cy="0"/>
-          </a:xfrm>
-          <a:prstGeom prst="line">
-            <a:avLst/>
-          </a:prstGeom>
-          <a:noFill/>
-          <a:ln w="6350">
-            <a:solidFill>
-              <a:srgbClr val="E2E8F0"/>
-            </a:solidFill>
-            <a:prstDash val="solid"/>
-          </a:ln>
-        </p:spPr>
-      </p:sp>
-      <p:sp>
-        <p:nvSpPr>
-          <p:cNvPr id="49" name="Shape 42"/>
-          <p:cNvSpPr/>
-          <p:nvPr/>
-        </p:nvSpPr>
-        <p:spPr>
-          <a:xfrm>
-            <a:off x="5257800" y="3890772"/>
-            <a:ext cx="109728" cy="109728"/>
-          </a:xfrm>
-          <a:prstGeom prst="ellipse">
-            <a:avLst/>
-          </a:prstGeom>
-          <a:solidFill>
-            <a:srgbClr val="1D4ED8"/>
-          </a:solidFill>
-          <a:ln w="6350">
-            <a:solidFill>
-              <a:srgbClr val="1D4ED8"/>
-            </a:solidFill>
-            <a:prstDash val="solid"/>
-          </a:ln>
-        </p:spPr>
-      </p:sp>
-      <p:sp>
-        <p:nvSpPr>
-          <p:cNvPr id="50" name="Text 43"/>
-          <p:cNvSpPr txBox="1"/>
-          <p:nvPr/>
-        </p:nvSpPr>
-        <p:spPr>
-          <a:xfrm>
-            <a:off x="5440680" y="3566160"/>
-            <a:ext cx="1792224" cy="758952"/>
-          </a:xfrm>
-          <a:prstGeom prst="rect">
-            <a:avLst/>
-          </a:prstGeom>
-          <a:noFill/>
-          <a:ln/>
-        </p:spPr>
-        <p:txBody>
-          <a:bodyPr wrap="square" lIns="0" tIns="0" rIns="0" bIns="0" rtlCol="0" anchor="ctr"/>
-          <a:lstStyle/>
-          <a:p>
-            <a:pPr indent="0" marL="0">
-              <a:buNone/>
-            </a:pPr>
-            <a:r>
-              <a:rPr lang="en-US" sz="950" dirty="0">
-                <a:solidFill>
-                  <a:srgbClr val="0F172A"/>
-                </a:solidFill>
-                <a:latin typeface="Inter" pitchFamily="34" charset="0"/>
-                <a:ea typeface="Inter" pitchFamily="34" charset="-122"/>
-                <a:cs typeface="Inter" pitchFamily="34" charset="-120"/>
-              </a:rPr>
-              <a:t>Care → day-21 category · wk 7</a:t>
-            </a:r>
-            <a:endParaRPr lang="en-US" sz="950" dirty="0"/>
-          </a:p>
-        </p:txBody>
-      </p:sp>
-      <p:sp>
-        <p:nvSpPr>
-          <p:cNvPr id="51" name="Shape 44"/>
-          <p:cNvSpPr/>
-          <p:nvPr/>
-        </p:nvSpPr>
-        <p:spPr>
-          <a:xfrm>
-            <a:off x="5312664" y="4370832"/>
-            <a:ext cx="1810512" cy="0"/>
-          </a:xfrm>
-          <a:prstGeom prst="line">
-            <a:avLst/>
-          </a:prstGeom>
-          <a:noFill/>
-          <a:ln w="6350">
-            <a:solidFill>
-              <a:srgbClr val="E2E8F0"/>
-            </a:solidFill>
-            <a:prstDash val="solid"/>
-          </a:ln>
-        </p:spPr>
-      </p:sp>
-      <p:sp>
-        <p:nvSpPr>
-          <p:cNvPr id="52" name="Shape 45"/>
-          <p:cNvSpPr/>
-          <p:nvPr/>
-        </p:nvSpPr>
-        <p:spPr>
-          <a:xfrm>
-            <a:off x="5257800" y="4759452"/>
-            <a:ext cx="109728" cy="109728"/>
-          </a:xfrm>
-          <a:prstGeom prst="ellipse">
-            <a:avLst/>
-          </a:prstGeom>
-          <a:solidFill>
-            <a:srgbClr val="1D4ED8"/>
-          </a:solidFill>
-          <a:ln w="6350">
-            <a:solidFill>
-              <a:srgbClr val="1D4ED8"/>
-            </a:solidFill>
-            <a:prstDash val="solid"/>
-          </a:ln>
-        </p:spPr>
-      </p:sp>
-      <p:sp>
-        <p:nvSpPr>
-          <p:cNvPr id="53" name="Text 46"/>
-          <p:cNvSpPr txBox="1"/>
-          <p:nvPr/>
-        </p:nvSpPr>
-        <p:spPr>
-          <a:xfrm>
-            <a:off x="5440680" y="4434840"/>
-            <a:ext cx="1792224" cy="758952"/>
-          </a:xfrm>
-          <a:prstGeom prst="rect">
-            <a:avLst/>
-          </a:prstGeom>
-          <a:noFill/>
-          <a:ln/>
-        </p:spPr>
-        <p:txBody>
-          <a:bodyPr wrap="square" lIns="0" tIns="0" rIns="0" bIns="0" rtlCol="0" anchor="ctr"/>
-          <a:lstStyle/>
-          <a:p>
-            <a:pPr indent="0" marL="0">
-              <a:buNone/>
-            </a:pPr>
-            <a:r>
-              <a:rPr lang="en-US" sz="950" dirty="0">
-                <a:solidFill>
-                  <a:srgbClr val="0F172A"/>
-                </a:solidFill>
-                <a:latin typeface="Inter" pitchFamily="34" charset="0"/>
-                <a:ea typeface="Inter" pitchFamily="34" charset="-122"/>
-                <a:cs typeface="Inter" pitchFamily="34" charset="-120"/>
-              </a:rPr>
-              <a:t>Suppression + caps · wk 5</a:t>
-            </a:r>
-            <a:endParaRPr lang="en-US" sz="950" dirty="0"/>
-          </a:p>
-        </p:txBody>
-      </p:sp>
-      <p:sp>
-        <p:nvSpPr>
-          <p:cNvPr id="54" name="Shape 47"/>
-          <p:cNvSpPr/>
-          <p:nvPr/>
-        </p:nvSpPr>
-        <p:spPr>
-          <a:xfrm>
-            <a:off x="7470648" y="1234440"/>
-            <a:ext cx="2286000" cy="420624"/>
-          </a:xfrm>
-          <a:prstGeom prst="chevron">
-            <a:avLst/>
-          </a:prstGeom>
-          <a:solidFill>
-            <a:srgbClr val="2563EB"/>
-          </a:solidFill>
-          <a:ln w="6350">
-            <a:solidFill>
-              <a:srgbClr val="2563EB"/>
-            </a:solidFill>
-            <a:prstDash val="solid"/>
-          </a:ln>
-        </p:spPr>
-      </p:sp>
-      <p:sp>
-        <p:nvSpPr>
-          <p:cNvPr id="55" name="Text 48"/>
-          <p:cNvSpPr txBox="1"/>
-          <p:nvPr/>
-        </p:nvSpPr>
-        <p:spPr>
-          <a:xfrm>
-            <a:off x="7744968" y="1234440"/>
-            <a:ext cx="1901952" cy="420624"/>
-          </a:xfrm>
-          <a:prstGeom prst="rect">
-            <a:avLst/>
-          </a:prstGeom>
-          <a:noFill/>
-          <a:ln/>
-        </p:spPr>
-        <p:txBody>
-          <a:bodyPr wrap="square" lIns="0" tIns="0" rIns="0" bIns="0" rtlCol="0" anchor="ctr"/>
-          <a:lstStyle/>
-          <a:p>
-            <a:pPr indent="0" marL="0">
-              <a:buNone/>
-            </a:pPr>
-            <a:r>
-              <a:rPr lang="en-US" sz="1050" b="1" dirty="0">
-                <a:solidFill>
-                  <a:srgbClr val="FFFFFF"/>
-                </a:solidFill>
-                <a:latin typeface="Inter" pitchFamily="34" charset="0"/>
-                <a:ea typeface="Inter" pitchFamily="34" charset="-122"/>
-                <a:cs typeface="Inter" pitchFamily="34" charset="-120"/>
-              </a:rPr>
-              <a:t>Measure  </a:t>
-            </a:r>
-            <a:pPr indent="0" marL="0">
-              <a:buNone/>
-            </a:pPr>
-            <a:r>
-              <a:rPr lang="en-US" sz="850" dirty="0">
-                <a:solidFill>
-                  <a:srgbClr val="FFFFFF"/>
-                </a:solidFill>
-                <a:latin typeface="Inter" pitchFamily="34" charset="0"/>
-                <a:ea typeface="Inter" pitchFamily="34" charset="-122"/>
-                <a:cs typeface="Inter" pitchFamily="34" charset="-120"/>
-              </a:rPr>
-              <a:t>Weeks 9–12</a:t>
-            </a:r>
-            <a:endParaRPr lang="en-US" sz="1200" dirty="0"/>
-          </a:p>
-        </p:txBody>
-      </p:sp>
-      <p:sp>
-        <p:nvSpPr>
-          <p:cNvPr id="56" name="Shape 49"/>
-          <p:cNvSpPr/>
-          <p:nvPr/>
-        </p:nvSpPr>
-        <p:spPr>
-          <a:xfrm>
-            <a:off x="7470648" y="1773936"/>
-            <a:ext cx="2176272" cy="3474720"/>
-          </a:xfrm>
-          <a:prstGeom prst="roundRect">
-            <a:avLst>
-              <a:gd name="adj" fmla="val 4202"/>
-            </a:avLst>
           </a:prstGeom>
           <a:solidFill>
             <a:srgbClr val="EFF6FF"/>
           </a:solidFill>
-          <a:ln w="9525">
-            <a:solidFill>
-              <a:srgbClr val="E2E8F0"/>
-            </a:solidFill>
-            <a:prstDash val="solid"/>
-          </a:ln>
-        </p:spPr>
-      </p:sp>
-      <p:sp>
-        <p:nvSpPr>
-          <p:cNvPr id="57" name="Shape 50"/>
-          <p:cNvSpPr/>
-          <p:nvPr/>
-        </p:nvSpPr>
-        <p:spPr>
-          <a:xfrm>
-            <a:off x="7598664" y="2153412"/>
-            <a:ext cx="109728" cy="109728"/>
-          </a:xfrm>
-          <a:prstGeom prst="ellipse">
-            <a:avLst/>
-          </a:prstGeom>
-          <a:solidFill>
-            <a:srgbClr val="0A1F44"/>
-          </a:solidFill>
           <a:ln w="6350">
             <a:solidFill>
-              <a:srgbClr val="0A1F44"/>
-            </a:solidFill>
-            <a:prstDash val="solid"/>
-          </a:ln>
-        </p:spPr>
-      </p:sp>
-      <p:sp>
-        <p:nvSpPr>
-          <p:cNvPr id="58" name="Text 51"/>
-          <p:cNvSpPr txBox="1"/>
-          <p:nvPr/>
-        </p:nvSpPr>
-        <p:spPr>
-          <a:xfrm>
-            <a:off x="7781544" y="1828800"/>
-            <a:ext cx="1792224" cy="758952"/>
-          </a:xfrm>
-          <a:prstGeom prst="rect">
-            <a:avLst/>
-          </a:prstGeom>
-          <a:noFill/>
-          <a:ln/>
-        </p:spPr>
-        <p:txBody>
-          <a:bodyPr wrap="square" lIns="0" tIns="0" rIns="0" bIns="0" rtlCol="0" anchor="ctr"/>
-          <a:lstStyle/>
-          <a:p>
-            <a:pPr indent="0" marL="0">
-              <a:buNone/>
-            </a:pPr>
-            <a:r>
-              <a:rPr lang="en-US" sz="950" b="1" dirty="0">
-                <a:solidFill>
-                  <a:srgbClr val="0A1F44"/>
-                </a:solidFill>
-                <a:latin typeface="Inter" pitchFamily="34" charset="0"/>
-                <a:ea typeface="Inter" pitchFamily="34" charset="-122"/>
-                <a:cs typeface="Inter" pitchFamily="34" charset="-120"/>
-              </a:rPr>
-              <a:t>Cart recovery vs holdout</a:t>
-            </a:r>
-            <a:endParaRPr lang="en-US" sz="950" dirty="0"/>
-          </a:p>
-        </p:txBody>
-      </p:sp>
-      <p:sp>
-        <p:nvSpPr>
-          <p:cNvPr id="59" name="Shape 52"/>
-          <p:cNvSpPr/>
-          <p:nvPr/>
-        </p:nvSpPr>
-        <p:spPr>
-          <a:xfrm>
-            <a:off x="7653528" y="2633472"/>
-            <a:ext cx="1810512" cy="0"/>
-          </a:xfrm>
-          <a:prstGeom prst="line">
-            <a:avLst/>
-          </a:prstGeom>
-          <a:noFill/>
-          <a:ln w="6350">
-            <a:solidFill>
-              <a:srgbClr val="E2E8F0"/>
-            </a:solidFill>
-            <a:prstDash val="solid"/>
-          </a:ln>
-        </p:spPr>
-      </p:sp>
-      <p:sp>
-        <p:nvSpPr>
-          <p:cNvPr id="60" name="Shape 53"/>
-          <p:cNvSpPr/>
-          <p:nvPr/>
-        </p:nvSpPr>
-        <p:spPr>
-          <a:xfrm>
-            <a:off x="7598664" y="3022092"/>
-            <a:ext cx="109728" cy="109728"/>
-          </a:xfrm>
-          <a:prstGeom prst="ellipse">
-            <a:avLst/>
-          </a:prstGeom>
-          <a:solidFill>
-            <a:srgbClr val="0A1F44"/>
-          </a:solidFill>
-          <a:ln w="6350">
-            <a:solidFill>
-              <a:srgbClr val="0A1F44"/>
-            </a:solidFill>
-            <a:prstDash val="solid"/>
-          </a:ln>
-        </p:spPr>
-      </p:sp>
-      <p:sp>
-        <p:nvSpPr>
-          <p:cNvPr id="61" name="Text 54"/>
-          <p:cNvSpPr txBox="1"/>
-          <p:nvPr/>
-        </p:nvSpPr>
-        <p:spPr>
-          <a:xfrm>
-            <a:off x="7781544" y="2697480"/>
-            <a:ext cx="1792224" cy="758952"/>
-          </a:xfrm>
-          <a:prstGeom prst="rect">
-            <a:avLst/>
-          </a:prstGeom>
-          <a:noFill/>
-          <a:ln/>
-        </p:spPr>
-        <p:txBody>
-          <a:bodyPr wrap="square" lIns="0" tIns="0" rIns="0" bIns="0" rtlCol="0" anchor="ctr"/>
-          <a:lstStyle/>
-          <a:p>
-            <a:pPr indent="0" marL="0">
-              <a:buNone/>
-            </a:pPr>
-            <a:r>
-              <a:rPr lang="en-US" sz="950" b="1" dirty="0">
-                <a:solidFill>
-                  <a:srgbClr val="0A1F44"/>
-                </a:solidFill>
-                <a:latin typeface="Inter" pitchFamily="34" charset="0"/>
-                <a:ea typeface="Inter" pitchFamily="34" charset="-122"/>
-                <a:cs typeface="Inter" pitchFamily="34" charset="-120"/>
-              </a:rPr>
-              <a:t>Opt-ins per 100 orders</a:t>
-            </a:r>
-            <a:endParaRPr lang="en-US" sz="950" dirty="0"/>
-          </a:p>
-        </p:txBody>
-      </p:sp>
-      <p:sp>
-        <p:nvSpPr>
-          <p:cNvPr id="62" name="Shape 55"/>
-          <p:cNvSpPr/>
-          <p:nvPr/>
-        </p:nvSpPr>
-        <p:spPr>
-          <a:xfrm>
-            <a:off x="7653528" y="3502152"/>
-            <a:ext cx="1810512" cy="0"/>
-          </a:xfrm>
-          <a:prstGeom prst="line">
-            <a:avLst/>
-          </a:prstGeom>
-          <a:noFill/>
-          <a:ln w="6350">
-            <a:solidFill>
-              <a:srgbClr val="E2E8F0"/>
-            </a:solidFill>
-            <a:prstDash val="solid"/>
-          </a:ln>
-        </p:spPr>
-      </p:sp>
-      <p:sp>
-        <p:nvSpPr>
-          <p:cNvPr id="63" name="Shape 56"/>
-          <p:cNvSpPr/>
-          <p:nvPr/>
-        </p:nvSpPr>
-        <p:spPr>
-          <a:xfrm>
-            <a:off x="7598664" y="3890772"/>
-            <a:ext cx="109728" cy="109728"/>
-          </a:xfrm>
-          <a:prstGeom prst="ellipse">
-            <a:avLst/>
-          </a:prstGeom>
-          <a:solidFill>
-            <a:srgbClr val="0A1F44"/>
-          </a:solidFill>
-          <a:ln w="6350">
-            <a:solidFill>
-              <a:srgbClr val="0A1F44"/>
-            </a:solidFill>
-            <a:prstDash val="solid"/>
-          </a:ln>
-        </p:spPr>
-      </p:sp>
-      <p:sp>
-        <p:nvSpPr>
-          <p:cNvPr id="64" name="Text 57"/>
-          <p:cNvSpPr txBox="1"/>
-          <p:nvPr/>
-        </p:nvSpPr>
-        <p:spPr>
-          <a:xfrm>
-            <a:off x="7781544" y="3566160"/>
-            <a:ext cx="1792224" cy="758952"/>
-          </a:xfrm>
-          <a:prstGeom prst="rect">
-            <a:avLst/>
-          </a:prstGeom>
-          <a:noFill/>
-          <a:ln/>
-        </p:spPr>
-        <p:txBody>
-          <a:bodyPr wrap="square" lIns="0" tIns="0" rIns="0" bIns="0" rtlCol="0" anchor="ctr"/>
-          <a:lstStyle/>
-          <a:p>
-            <a:pPr indent="0" marL="0">
-              <a:buNone/>
-            </a:pPr>
-            <a:r>
-              <a:rPr lang="en-US" sz="950" b="1" dirty="0">
-                <a:solidFill>
-                  <a:srgbClr val="0A1F44"/>
-                </a:solidFill>
-                <a:latin typeface="Inter" pitchFamily="34" charset="0"/>
-                <a:ea typeface="Inter" pitchFamily="34" charset="-122"/>
-                <a:cs typeface="Inter" pitchFamily="34" charset="-120"/>
-              </a:rPr>
-              <a:t>30-day repeat lift</a:t>
-            </a:r>
-            <a:endParaRPr lang="en-US" sz="950" dirty="0"/>
-          </a:p>
-        </p:txBody>
-      </p:sp>
-      <p:sp>
-        <p:nvSpPr>
-          <p:cNvPr id="65" name="Shape 58"/>
-          <p:cNvSpPr/>
-          <p:nvPr/>
-        </p:nvSpPr>
-        <p:spPr>
-          <a:xfrm>
-            <a:off x="7653528" y="4370832"/>
-            <a:ext cx="1810512" cy="0"/>
-          </a:xfrm>
-          <a:prstGeom prst="line">
-            <a:avLst/>
-          </a:prstGeom>
-          <a:noFill/>
-          <a:ln w="6350">
-            <a:solidFill>
-              <a:srgbClr val="E2E8F0"/>
-            </a:solidFill>
-            <a:prstDash val="solid"/>
-          </a:ln>
-        </p:spPr>
-      </p:sp>
-      <p:sp>
-        <p:nvSpPr>
-          <p:cNvPr id="66" name="Shape 59"/>
-          <p:cNvSpPr/>
-          <p:nvPr/>
-        </p:nvSpPr>
-        <p:spPr>
-          <a:xfrm>
-            <a:off x="7598664" y="4759452"/>
-            <a:ext cx="109728" cy="109728"/>
-          </a:xfrm>
-          <a:prstGeom prst="ellipse">
-            <a:avLst/>
-          </a:prstGeom>
-          <a:solidFill>
-            <a:srgbClr val="0A1F44"/>
-          </a:solidFill>
-          <a:ln w="6350">
-            <a:solidFill>
-              <a:srgbClr val="0A1F44"/>
-            </a:solidFill>
-            <a:prstDash val="solid"/>
-          </a:ln>
-        </p:spPr>
-      </p:sp>
-      <p:sp>
-        <p:nvSpPr>
-          <p:cNvPr id="67" name="Text 60"/>
-          <p:cNvSpPr txBox="1"/>
-          <p:nvPr/>
-        </p:nvSpPr>
-        <p:spPr>
-          <a:xfrm>
-            <a:off x="7781544" y="4434840"/>
-            <a:ext cx="1792224" cy="758952"/>
-          </a:xfrm>
-          <a:prstGeom prst="rect">
-            <a:avLst/>
-          </a:prstGeom>
-          <a:noFill/>
-          <a:ln/>
-        </p:spPr>
-        <p:txBody>
-          <a:bodyPr wrap="square" lIns="0" tIns="0" rIns="0" bIns="0" rtlCol="0" anchor="ctr"/>
-          <a:lstStyle/>
-          <a:p>
-            <a:pPr indent="0" marL="0">
-              <a:buNone/>
-            </a:pPr>
-            <a:r>
-              <a:rPr lang="en-US" sz="950" b="1" dirty="0">
-                <a:solidFill>
-                  <a:srgbClr val="0A1F44"/>
-                </a:solidFill>
-                <a:latin typeface="Inter" pitchFamily="34" charset="0"/>
-                <a:ea typeface="Inter" pitchFamily="34" charset="-122"/>
-                <a:cs typeface="Inter" pitchFamily="34" charset="-120"/>
-              </a:rPr>
-              <a:t>Incremental orders per $</a:t>
-            </a:r>
-            <a:endParaRPr lang="en-US" sz="950" dirty="0"/>
-          </a:p>
-        </p:txBody>
-      </p:sp>
-      <p:sp>
-        <p:nvSpPr>
-          <p:cNvPr id="68" name="Shape 61"/>
-          <p:cNvSpPr/>
-          <p:nvPr/>
-        </p:nvSpPr>
-        <p:spPr>
-          <a:xfrm>
-            <a:off x="2596896" y="2135124"/>
-            <a:ext cx="164592" cy="146304"/>
-          </a:xfrm>
-          <a:prstGeom prst="rightArrow">
-            <a:avLst/>
-          </a:prstGeom>
-          <a:solidFill>
-            <a:srgbClr val="BFDBFE"/>
-          </a:solidFill>
-          <a:ln w="6350">
-            <a:solidFill>
-              <a:srgbClr val="BFDBFE"/>
-            </a:solidFill>
-            <a:prstDash val="solid"/>
-          </a:ln>
-        </p:spPr>
-      </p:sp>
-      <p:sp>
-        <p:nvSpPr>
-          <p:cNvPr id="69" name="Shape 62"/>
-          <p:cNvSpPr/>
-          <p:nvPr/>
-        </p:nvSpPr>
-        <p:spPr>
-          <a:xfrm>
-            <a:off x="2596896" y="3003804"/>
-            <a:ext cx="164592" cy="146304"/>
-          </a:xfrm>
-          <a:prstGeom prst="rightArrow">
-            <a:avLst/>
-          </a:prstGeom>
-          <a:solidFill>
-            <a:srgbClr val="BFDBFE"/>
-          </a:solidFill>
-          <a:ln w="6350">
-            <a:solidFill>
-              <a:srgbClr val="BFDBFE"/>
-            </a:solidFill>
-            <a:prstDash val="solid"/>
-          </a:ln>
-        </p:spPr>
-      </p:sp>
-      <p:sp>
-        <p:nvSpPr>
-          <p:cNvPr id="70" name="Shape 63"/>
-          <p:cNvSpPr/>
-          <p:nvPr/>
-        </p:nvSpPr>
-        <p:spPr>
-          <a:xfrm>
-            <a:off x="2596896" y="3872484"/>
-            <a:ext cx="164592" cy="146304"/>
-          </a:xfrm>
-          <a:prstGeom prst="rightArrow">
-            <a:avLst/>
-          </a:prstGeom>
-          <a:solidFill>
-            <a:srgbClr val="BFDBFE"/>
-          </a:solidFill>
-          <a:ln w="6350">
-            <a:solidFill>
-              <a:srgbClr val="BFDBFE"/>
-            </a:solidFill>
-            <a:prstDash val="solid"/>
-          </a:ln>
-        </p:spPr>
-      </p:sp>
-      <p:sp>
-        <p:nvSpPr>
-          <p:cNvPr id="71" name="Shape 64"/>
-          <p:cNvSpPr/>
-          <p:nvPr/>
-        </p:nvSpPr>
-        <p:spPr>
-          <a:xfrm>
-            <a:off x="2596896" y="4741164"/>
-            <a:ext cx="164592" cy="146304"/>
-          </a:xfrm>
-          <a:prstGeom prst="rightArrow">
-            <a:avLst/>
-          </a:prstGeom>
-          <a:solidFill>
-            <a:srgbClr val="BFDBFE"/>
-          </a:solidFill>
-          <a:ln w="6350">
-            <a:solidFill>
-              <a:srgbClr val="BFDBFE"/>
-            </a:solidFill>
-            <a:prstDash val="solid"/>
-          </a:ln>
-        </p:spPr>
-      </p:sp>
-      <p:sp>
-        <p:nvSpPr>
-          <p:cNvPr id="72" name="Shape 65"/>
-          <p:cNvSpPr/>
-          <p:nvPr/>
-        </p:nvSpPr>
-        <p:spPr>
-          <a:xfrm>
-            <a:off x="9683496" y="3017520"/>
-            <a:ext cx="201168" cy="274320"/>
-          </a:xfrm>
-          <a:prstGeom prst="rightArrow">
-            <a:avLst/>
-          </a:prstGeom>
-          <a:solidFill>
-            <a:srgbClr val="1D4ED8"/>
-          </a:solidFill>
-          <a:ln w="6350">
-            <a:solidFill>
-              <a:srgbClr val="1D4ED8"/>
-            </a:solidFill>
-            <a:prstDash val="solid"/>
-          </a:ln>
-        </p:spPr>
-      </p:sp>
-      <p:sp>
-        <p:nvSpPr>
-          <p:cNvPr id="73" name="Shape 66"/>
-          <p:cNvSpPr/>
-          <p:nvPr/>
-        </p:nvSpPr>
-        <p:spPr>
-          <a:xfrm>
-            <a:off x="10177272" y="1234440"/>
-            <a:ext cx="1133856" cy="1005840"/>
-          </a:xfrm>
-          <a:prstGeom prst="diamond">
-            <a:avLst/>
-          </a:prstGeom>
-          <a:solidFill>
-            <a:srgbClr val="0A1F44"/>
-          </a:solidFill>
-          <a:ln w="6350">
-            <a:solidFill>
-              <a:srgbClr val="0A1F44"/>
-            </a:solidFill>
-            <a:prstDash val="solid"/>
-          </a:ln>
-        </p:spPr>
-      </p:sp>
-      <p:sp>
-        <p:nvSpPr>
-          <p:cNvPr id="74" name="Text 67"/>
-          <p:cNvSpPr txBox="1"/>
-          <p:nvPr/>
-        </p:nvSpPr>
-        <p:spPr>
-          <a:xfrm>
-            <a:off x="10177272" y="1234440"/>
-            <a:ext cx="1133856" cy="1005840"/>
-          </a:xfrm>
-          <a:prstGeom prst="rect">
-            <a:avLst/>
-          </a:prstGeom>
-          <a:noFill/>
-          <a:ln/>
-        </p:spPr>
-        <p:txBody>
-          <a:bodyPr wrap="square" lIns="0" tIns="0" rIns="0" bIns="0" rtlCol="0" anchor="ctr"/>
-          <a:lstStyle/>
-          <a:p>
-            <a:pPr algn="ctr" indent="0" marL="0">
-              <a:buNone/>
-            </a:pPr>
-            <a:r>
-              <a:rPr lang="en-US" sz="1100" b="1" dirty="0">
-                <a:solidFill>
-                  <a:srgbClr val="FFFFFF"/>
-                </a:solidFill>
-                <a:latin typeface="Inter" pitchFamily="34" charset="0"/>
-                <a:ea typeface="Inter" pitchFamily="34" charset="-122"/>
-                <a:cs typeface="Inter" pitchFamily="34" charset="-120"/>
-              </a:rPr>
-              <a:t>Day 90</a:t>
-            </a:r>
-            <a:endParaRPr lang="en-US" sz="1200" dirty="0"/>
-          </a:p>
-          <a:p>
-            <a:pPr algn="ctr" indent="0" marL="0">
-              <a:buNone/>
-            </a:pPr>
-            <a:r>
-              <a:rPr lang="en-US" sz="900" dirty="0">
-                <a:solidFill>
-                  <a:srgbClr val="FFFFFF"/>
-                </a:solidFill>
-                <a:latin typeface="Inter" pitchFamily="34" charset="0"/>
-                <a:ea typeface="Inter" pitchFamily="34" charset="-122"/>
-                <a:cs typeface="Inter" pitchFamily="34" charset="-120"/>
-              </a:rPr>
-              <a:t>decide</a:t>
-            </a:r>
-            <a:endParaRPr lang="en-US" sz="1200" dirty="0"/>
-          </a:p>
-        </p:txBody>
-      </p:sp>
-      <p:sp>
-        <p:nvSpPr>
-          <p:cNvPr id="75" name="Shape 68"/>
-          <p:cNvSpPr/>
-          <p:nvPr/>
-        </p:nvSpPr>
-        <p:spPr>
-          <a:xfrm>
-            <a:off x="10744200" y="2240280"/>
-            <a:ext cx="0" cy="182880"/>
-          </a:xfrm>
-          <a:prstGeom prst="line">
-            <a:avLst/>
-          </a:prstGeom>
-          <a:noFill/>
-          <a:ln w="15875">
-            <a:solidFill>
-              <a:srgbClr val="0A1F44"/>
-            </a:solidFill>
-            <a:prstDash val="solid"/>
-          </a:ln>
-        </p:spPr>
-      </p:sp>
-      <p:sp>
-        <p:nvSpPr>
-          <p:cNvPr id="76" name="Shape 69"/>
-          <p:cNvSpPr/>
-          <p:nvPr/>
-        </p:nvSpPr>
-        <p:spPr>
-          <a:xfrm>
-            <a:off x="9912096" y="2423160"/>
-            <a:ext cx="0" cy="2423160"/>
-          </a:xfrm>
-          <a:prstGeom prst="line">
-            <a:avLst/>
-          </a:prstGeom>
-          <a:noFill/>
-          <a:ln w="15875">
-            <a:solidFill>
-              <a:srgbClr val="0A1F44"/>
-            </a:solidFill>
-            <a:prstDash val="solid"/>
-          </a:ln>
-        </p:spPr>
-      </p:sp>
-      <p:sp>
-        <p:nvSpPr>
-          <p:cNvPr id="77" name="Shape 70"/>
-          <p:cNvSpPr/>
-          <p:nvPr/>
-        </p:nvSpPr>
-        <p:spPr>
-          <a:xfrm>
-            <a:off x="9912096" y="2423160"/>
-            <a:ext cx="832104" cy="0"/>
-          </a:xfrm>
-          <a:prstGeom prst="line">
-            <a:avLst/>
-          </a:prstGeom>
-          <a:noFill/>
-          <a:ln w="15875">
-            <a:solidFill>
-              <a:srgbClr val="0A1F44"/>
-            </a:solidFill>
-            <a:prstDash val="solid"/>
-          </a:ln>
-        </p:spPr>
-      </p:sp>
-      <p:sp>
-        <p:nvSpPr>
-          <p:cNvPr id="78" name="Shape 71"/>
-          <p:cNvSpPr/>
-          <p:nvPr/>
-        </p:nvSpPr>
-        <p:spPr>
-          <a:xfrm>
-            <a:off x="9912096" y="3017520"/>
-            <a:ext cx="146304" cy="0"/>
-          </a:xfrm>
-          <a:prstGeom prst="line">
-            <a:avLst/>
-          </a:prstGeom>
-          <a:noFill/>
-          <a:ln w="15875">
-            <a:solidFill>
-              <a:srgbClr val="0A1F44"/>
-            </a:solidFill>
-            <a:prstDash val="solid"/>
-            <a:tailEnd type="triangle"/>
-          </a:ln>
-        </p:spPr>
-      </p:sp>
-      <p:sp>
-        <p:nvSpPr>
-          <p:cNvPr id="79" name="Shape 72"/>
-          <p:cNvSpPr/>
-          <p:nvPr/>
-        </p:nvSpPr>
-        <p:spPr>
-          <a:xfrm>
-            <a:off x="10076688" y="2651760"/>
-            <a:ext cx="1609344" cy="804672"/>
-          </a:xfrm>
-          <a:prstGeom prst="roundRect">
-            <a:avLst>
-              <a:gd name="adj" fmla="val 9091"/>
-            </a:avLst>
-          </a:prstGeom>
-          <a:solidFill>
-            <a:srgbClr val="FFFFFF"/>
-          </a:solidFill>
-          <a:ln w="19050">
-            <a:solidFill>
-              <a:srgbClr val="1D4ED8"/>
-            </a:solidFill>
-            <a:prstDash val="solid"/>
-          </a:ln>
-        </p:spPr>
-      </p:sp>
-      <p:sp>
-        <p:nvSpPr>
-          <p:cNvPr id="80" name="Shape 73"/>
-          <p:cNvSpPr/>
-          <p:nvPr/>
-        </p:nvSpPr>
-        <p:spPr>
-          <a:xfrm>
-            <a:off x="10168128" y="2706624"/>
-            <a:ext cx="256032" cy="256032"/>
-          </a:xfrm>
-          <a:prstGeom prst="ellipse">
-            <a:avLst/>
-          </a:prstGeom>
-          <a:solidFill>
-            <a:srgbClr val="1D4ED8"/>
-          </a:solidFill>
-          <a:ln w="6350">
-            <a:solidFill>
-              <a:srgbClr val="1D4ED8"/>
+              <a:srgbClr val="EFF6FF"/>
             </a:solidFill>
             <a:prstDash val="solid"/>
           </a:ln>
@@ -50134,7 +49501,7 @@
       </p:sp>
       <p:pic>
         <p:nvPicPr>
-          <p:cNvPr id="81" name="Image 5" descr="preencoded.png">    </p:cNvPr>
+          <p:cNvPr id="59" name="Image 5" descr="preencoded.png">    </p:cNvPr>
           <p:cNvPicPr>
             <a:picLocks noChangeAspect="1"/>
           </p:cNvPicPr>
@@ -50148,7 +49515,7 @@
         </p:blipFill>
         <p:spPr>
           <a:xfrm>
-            <a:off x="10224455" y="2762951"/>
+            <a:off x="2753807" y="3348167"/>
             <a:ext cx="143378" cy="143378"/>
           </a:xfrm>
           <a:prstGeom prst="rect">
@@ -50158,14 +49525,14 @@
       </p:pic>
       <p:sp>
         <p:nvSpPr>
-          <p:cNvPr id="82" name="Text 74"/>
-          <p:cNvSpPr txBox="1"/>
-          <p:nvPr/>
-        </p:nvSpPr>
-        <p:spPr>
-          <a:xfrm>
-            <a:off x="10479024" y="2688336"/>
-            <a:ext cx="1152144" cy="292608"/>
+          <p:cNvPr id="60" name="Text 52"/>
+          <p:cNvSpPr txBox="1"/>
+          <p:nvPr/>
+        </p:nvSpPr>
+        <p:spPr>
+          <a:xfrm>
+            <a:off x="3008376" y="3291840"/>
+            <a:ext cx="1271016" cy="256032"/>
           </a:xfrm>
           <a:prstGeom prst="rect">
             <a:avLst/>
@@ -50181,54 +49548,15 @@
               <a:buNone/>
             </a:pPr>
             <a:r>
-              <a:rPr lang="en-US" sz="1050" b="1" dirty="0">
-                <a:solidFill>
-                  <a:srgbClr val="1D4ED8"/>
-                </a:solidFill>
-                <a:latin typeface="Inter" pitchFamily="34" charset="0"/>
-                <a:ea typeface="Inter" pitchFamily="34" charset="-122"/>
-                <a:cs typeface="Inter" pitchFamily="34" charset="-120"/>
-              </a:rPr>
-              <a:t>Scale</a:t>
-            </a:r>
-            <a:endParaRPr lang="en-US" sz="1050" dirty="0"/>
-          </a:p>
-        </p:txBody>
-      </p:sp>
-      <p:sp>
-        <p:nvSpPr>
-          <p:cNvPr id="83" name="Text 75"/>
-          <p:cNvSpPr txBox="1"/>
-          <p:nvPr/>
-        </p:nvSpPr>
-        <p:spPr>
-          <a:xfrm>
-            <a:off x="10168128" y="2999232"/>
-            <a:ext cx="1426464" cy="420624"/>
-          </a:xfrm>
-          <a:prstGeom prst="rect">
-            <a:avLst/>
-          </a:prstGeom>
-          <a:noFill/>
-          <a:ln/>
-        </p:spPr>
-        <p:txBody>
-          <a:bodyPr wrap="square" lIns="0" tIns="0" rIns="0" bIns="0" rtlCol="0" anchor="ctr"/>
-          <a:lstStyle/>
-          <a:p>
-            <a:pPr indent="0" marL="0">
-              <a:buNone/>
-            </a:pPr>
-            <a:r>
-              <a:rPr lang="en-US" sz="900" dirty="0">
-                <a:solidFill>
-                  <a:srgbClr val="0F172A"/>
-                </a:solidFill>
-                <a:latin typeface="Inter" pitchFamily="34" charset="0"/>
-                <a:ea typeface="Inter" pitchFamily="34" charset="-122"/>
-                <a:cs typeface="Inter" pitchFamily="34" charset="-120"/>
-              </a:rPr>
-              <a:t>Beats holdout: roll out region by region</a:t>
+              <a:rPr lang="en-US" sz="900" b="1" dirty="0">
+                <a:solidFill>
+                  <a:srgbClr val="0A1F44"/>
+                </a:solidFill>
+                <a:latin typeface="Inter" pitchFamily="34" charset="0"/>
+                <a:ea typeface="Inter" pitchFamily="34" charset="-122"/>
+                <a:cs typeface="Inter" pitchFamily="34" charset="-120"/>
+              </a:rPr>
+              <a:t>Journey Optimizer</a:t>
             </a:r>
             <a:endParaRPr lang="en-US" sz="900" dirty="0"/>
           </a:p>
@@ -50236,75 +49564,24 @@
       </p:sp>
       <p:sp>
         <p:nvSpPr>
-          <p:cNvPr id="84" name="Shape 76"/>
-          <p:cNvSpPr/>
-          <p:nvPr/>
-        </p:nvSpPr>
-        <p:spPr>
-          <a:xfrm>
-            <a:off x="9912096" y="3950208"/>
-            <a:ext cx="146304" cy="0"/>
-          </a:xfrm>
-          <a:prstGeom prst="line">
-            <a:avLst/>
-          </a:prstGeom>
-          <a:noFill/>
-          <a:ln w="15875">
-            <a:solidFill>
-              <a:srgbClr val="0A1F44"/>
-            </a:solidFill>
-            <a:prstDash val="solid"/>
-            <a:tailEnd type="triangle"/>
-          </a:ln>
-        </p:spPr>
-      </p:sp>
-      <p:sp>
-        <p:nvSpPr>
-          <p:cNvPr id="85" name="Shape 77"/>
-          <p:cNvSpPr/>
-          <p:nvPr/>
-        </p:nvSpPr>
-        <p:spPr>
-          <a:xfrm>
-            <a:off x="10076688" y="3584448"/>
-            <a:ext cx="1609344" cy="804672"/>
-          </a:xfrm>
-          <a:prstGeom prst="roundRect">
-            <a:avLst>
-              <a:gd name="adj" fmla="val 9091"/>
-            </a:avLst>
+          <p:cNvPr id="61" name="Shape 53"/>
+          <p:cNvSpPr/>
+          <p:nvPr/>
+        </p:nvSpPr>
+        <p:spPr>
+          <a:xfrm>
+            <a:off x="2697480" y="3575304"/>
+            <a:ext cx="256032" cy="256032"/>
+          </a:xfrm>
+          <a:prstGeom prst="ellipse">
+            <a:avLst/>
           </a:prstGeom>
           <a:solidFill>
-            <a:srgbClr val="FFFFFF"/>
-          </a:solidFill>
-          <a:ln w="19050">
-            <a:solidFill>
-              <a:srgbClr val="0A1F44"/>
-            </a:solidFill>
-            <a:prstDash val="solid"/>
-          </a:ln>
-        </p:spPr>
-      </p:sp>
-      <p:sp>
-        <p:nvSpPr>
-          <p:cNvPr id="86" name="Shape 78"/>
-          <p:cNvSpPr/>
-          <p:nvPr/>
-        </p:nvSpPr>
-        <p:spPr>
-          <a:xfrm>
-            <a:off x="10168128" y="3639312"/>
-            <a:ext cx="256032" cy="256032"/>
-          </a:xfrm>
-          <a:prstGeom prst="ellipse">
-            <a:avLst/>
-          </a:prstGeom>
-          <a:solidFill>
-            <a:srgbClr val="0A1F44"/>
+            <a:srgbClr val="EFF6FF"/>
           </a:solidFill>
           <a:ln w="6350">
             <a:solidFill>
-              <a:srgbClr val="0A1F44"/>
+              <a:srgbClr val="EFF6FF"/>
             </a:solidFill>
             <a:prstDash val="solid"/>
           </a:ln>
@@ -50312,7 +49589,7 @@
       </p:sp>
       <p:pic>
         <p:nvPicPr>
-          <p:cNvPr id="87" name="Image 6" descr="preencoded.png">    </p:cNvPr>
+          <p:cNvPr id="62" name="Image 6" descr="preencoded.png">    </p:cNvPr>
           <p:cNvPicPr>
             <a:picLocks noChangeAspect="1"/>
           </p:cNvPicPr>
@@ -50326,7 +49603,7 @@
         </p:blipFill>
         <p:spPr>
           <a:xfrm>
-            <a:off x="10224455" y="3695639"/>
+            <a:off x="2753807" y="3631631"/>
             <a:ext cx="143378" cy="143378"/>
           </a:xfrm>
           <a:prstGeom prst="rect">
@@ -50336,14 +49613,14 @@
       </p:pic>
       <p:sp>
         <p:nvSpPr>
-          <p:cNvPr id="88" name="Text 79"/>
-          <p:cNvSpPr txBox="1"/>
-          <p:nvPr/>
-        </p:nvSpPr>
-        <p:spPr>
-          <a:xfrm>
-            <a:off x="10479024" y="3621024"/>
-            <a:ext cx="1152144" cy="292608"/>
+          <p:cNvPr id="63" name="Text 54"/>
+          <p:cNvSpPr txBox="1"/>
+          <p:nvPr/>
+        </p:nvSpPr>
+        <p:spPr>
+          <a:xfrm>
+            <a:off x="3008376" y="3575304"/>
+            <a:ext cx="1271016" cy="256032"/>
           </a:xfrm>
           <a:prstGeom prst="rect">
             <a:avLst/>
@@ -50359,7 +49636,7 @@
               <a:buNone/>
             </a:pPr>
             <a:r>
-              <a:rPr lang="en-US" sz="1050" b="1" dirty="0">
+              <a:rPr lang="en-US" sz="900" b="1" dirty="0">
                 <a:solidFill>
                   <a:srgbClr val="0A1F44"/>
                 </a:solidFill>
@@ -50367,46 +49644,7 @@
                 <a:ea typeface="Inter" pitchFamily="34" charset="-122"/>
                 <a:cs typeface="Inter" pitchFamily="34" charset="-120"/>
               </a:rPr>
-              <a:t>Adjust</a:t>
-            </a:r>
-            <a:endParaRPr lang="en-US" sz="1050" dirty="0"/>
-          </a:p>
-        </p:txBody>
-      </p:sp>
-      <p:sp>
-        <p:nvSpPr>
-          <p:cNvPr id="89" name="Text 80"/>
-          <p:cNvSpPr txBox="1"/>
-          <p:nvPr/>
-        </p:nvSpPr>
-        <p:spPr>
-          <a:xfrm>
-            <a:off x="10168128" y="3931920"/>
-            <a:ext cx="1426464" cy="420624"/>
-          </a:xfrm>
-          <a:prstGeom prst="rect">
-            <a:avLst/>
-          </a:prstGeom>
-          <a:noFill/>
-          <a:ln/>
-        </p:spPr>
-        <p:txBody>
-          <a:bodyPr wrap="square" lIns="0" tIns="0" rIns="0" bIns="0" rtlCol="0" anchor="ctr"/>
-          <a:lstStyle/>
-          <a:p>
-            <a:pPr indent="0" marL="0">
-              <a:buNone/>
-            </a:pPr>
-            <a:r>
-              <a:rPr lang="en-US" sz="900" dirty="0">
-                <a:solidFill>
-                  <a:srgbClr val="0F172A"/>
-                </a:solidFill>
-                <a:latin typeface="Inter" pitchFamily="34" charset="0"/>
-                <a:ea typeface="Inter" pitchFamily="34" charset="-122"/>
-                <a:cs typeface="Inter" pitchFamily="34" charset="-120"/>
-              </a:rPr>
-              <a:t>Mixed: keep winners, re-test the rest</a:t>
+              <a:t>Email + app push</a:t>
             </a:r>
             <a:endParaRPr lang="en-US" sz="900" dirty="0"/>
           </a:p>
@@ -50414,75 +49652,932 @@
       </p:sp>
       <p:sp>
         <p:nvSpPr>
-          <p:cNvPr id="90" name="Shape 81"/>
-          <p:cNvSpPr/>
-          <p:nvPr/>
-        </p:nvSpPr>
-        <p:spPr>
-          <a:xfrm>
-            <a:off x="9912096" y="4882896"/>
-            <a:ext cx="146304" cy="0"/>
-          </a:xfrm>
-          <a:prstGeom prst="line">
-            <a:avLst/>
-          </a:prstGeom>
-          <a:noFill/>
-          <a:ln w="15875">
-            <a:solidFill>
-              <a:srgbClr val="0A1F44"/>
-            </a:solidFill>
-            <a:prstDash val="solid"/>
-            <a:tailEnd type="triangle"/>
-          </a:ln>
-        </p:spPr>
-      </p:sp>
-      <p:sp>
-        <p:nvSpPr>
-          <p:cNvPr id="91" name="Shape 82"/>
-          <p:cNvSpPr/>
-          <p:nvPr/>
-        </p:nvSpPr>
-        <p:spPr>
-          <a:xfrm>
-            <a:off x="10076688" y="4517136"/>
-            <a:ext cx="1609344" cy="804672"/>
+          <p:cNvPr id="64" name="Shape 55"/>
+          <p:cNvSpPr/>
+          <p:nvPr/>
+        </p:nvSpPr>
+        <p:spPr>
+          <a:xfrm>
+            <a:off x="4389120" y="3008376"/>
+            <a:ext cx="1664208" cy="731520"/>
           </a:xfrm>
           <a:prstGeom prst="roundRect">
             <a:avLst>
-              <a:gd name="adj" fmla="val 9091"/>
+              <a:gd name="adj" fmla="val 7500"/>
             </a:avLst>
           </a:prstGeom>
           <a:solidFill>
             <a:srgbClr val="FFFFFF"/>
           </a:solidFill>
-          <a:ln w="19050">
-            <a:solidFill>
-              <a:srgbClr val="64748B"/>
-            </a:solidFill>
-            <a:prstDash val="solid"/>
-          </a:ln>
-        </p:spPr>
-      </p:sp>
-      <p:sp>
-        <p:nvSpPr>
-          <p:cNvPr id="92" name="Shape 83"/>
-          <p:cNvSpPr/>
-          <p:nvPr/>
-        </p:nvSpPr>
-        <p:spPr>
-          <a:xfrm>
-            <a:off x="10168128" y="4572000"/>
-            <a:ext cx="256032" cy="256032"/>
-          </a:xfrm>
-          <a:prstGeom prst="ellipse">
-            <a:avLst/>
+          <a:ln w="9525">
+            <a:solidFill>
+              <a:srgbClr val="E2E8F0"/>
+            </a:solidFill>
+            <a:prstDash val="solid"/>
+          </a:ln>
+        </p:spPr>
+      </p:sp>
+      <p:sp>
+        <p:nvSpPr>
+          <p:cNvPr id="65" name="Text 56"/>
+          <p:cNvSpPr txBox="1"/>
+          <p:nvPr/>
+        </p:nvSpPr>
+        <p:spPr>
+          <a:xfrm>
+            <a:off x="4480560" y="3008376"/>
+            <a:ext cx="1499616" cy="731520"/>
+          </a:xfrm>
+          <a:prstGeom prst="rect">
+            <a:avLst/>
+          </a:prstGeom>
+          <a:noFill/>
+          <a:ln/>
+        </p:spPr>
+        <p:txBody>
+          <a:bodyPr wrap="square" lIns="0" tIns="0" rIns="0" bIns="0" rtlCol="0" anchor="ctr"/>
+          <a:lstStyle/>
+          <a:p>
+            <a:pPr indent="0" marL="0">
+              <a:buNone/>
+            </a:pPr>
+            <a:r>
+              <a:rPr lang="en-US" sz="900" dirty="0">
+                <a:solidFill>
+                  <a:srgbClr val="0F172A"/>
+                </a:solidFill>
+                <a:latin typeface="Inter" pitchFamily="34" charset="0"/>
+                <a:ea typeface="Inter" pitchFamily="34" charset="-122"/>
+                <a:cs typeface="Inter" pitchFamily="34" charset="-120"/>
+              </a:rPr>
+              <a:t>Delivery events to person ID; care and next-category content</a:t>
+            </a:r>
+            <a:endParaRPr lang="en-US" sz="900" dirty="0"/>
+          </a:p>
+        </p:txBody>
+      </p:sp>
+      <p:sp>
+        <p:nvSpPr>
+          <p:cNvPr id="66" name="Shape 57"/>
+          <p:cNvSpPr/>
+          <p:nvPr/>
+        </p:nvSpPr>
+        <p:spPr>
+          <a:xfrm>
+            <a:off x="6181344" y="3008376"/>
+            <a:ext cx="1664208" cy="731520"/>
+          </a:xfrm>
+          <a:prstGeom prst="roundRect">
+            <a:avLst>
+              <a:gd name="adj" fmla="val 7500"/>
+            </a:avLst>
           </a:prstGeom>
           <a:solidFill>
-            <a:srgbClr val="64748B"/>
+            <a:srgbClr val="FFFFFF"/>
+          </a:solidFill>
+          <a:ln w="9525">
+            <a:solidFill>
+              <a:srgbClr val="E2E8F0"/>
+            </a:solidFill>
+            <a:prstDash val="solid"/>
+          </a:ln>
+        </p:spPr>
+      </p:sp>
+      <p:sp>
+        <p:nvSpPr>
+          <p:cNvPr id="67" name="Text 58"/>
+          <p:cNvSpPr txBox="1"/>
+          <p:nvPr/>
+        </p:nvSpPr>
+        <p:spPr>
+          <a:xfrm>
+            <a:off x="6272784" y="3008376"/>
+            <a:ext cx="1499616" cy="731520"/>
+          </a:xfrm>
+          <a:prstGeom prst="rect">
+            <a:avLst/>
+          </a:prstGeom>
+          <a:noFill/>
+          <a:ln/>
+        </p:spPr>
+        <p:txBody>
+          <a:bodyPr wrap="square" lIns="0" tIns="0" rIns="0" bIns="0" rtlCol="0" anchor="ctr"/>
+          <a:lstStyle/>
+          <a:p>
+            <a:pPr indent="0" marL="0">
+              <a:buNone/>
+            </a:pPr>
+            <a:r>
+              <a:rPr lang="en-US" sz="900" dirty="0">
+                <a:solidFill>
+                  <a:srgbClr val="0F172A"/>
+                </a:solidFill>
+                <a:latin typeface="Inter" pitchFamily="34" charset="0"/>
+                <a:ea typeface="Inter" pitchFamily="34" charset="-122"/>
+                <a:cs typeface="Inter" pitchFamily="34" charset="-120"/>
+              </a:rPr>
+              <a:t>Care guide at delivery; second category by day 21</a:t>
+            </a:r>
+            <a:endParaRPr lang="en-US" sz="900" dirty="0"/>
+          </a:p>
+        </p:txBody>
+      </p:sp>
+      <p:sp>
+        <p:nvSpPr>
+          <p:cNvPr id="68" name="Shape 59"/>
+          <p:cNvSpPr/>
+          <p:nvPr/>
+        </p:nvSpPr>
+        <p:spPr>
+          <a:xfrm>
+            <a:off x="7973568" y="3008376"/>
+            <a:ext cx="1572768" cy="731520"/>
+          </a:xfrm>
+          <a:prstGeom prst="roundRect">
+            <a:avLst>
+              <a:gd name="adj" fmla="val 7500"/>
+            </a:avLst>
+          </a:prstGeom>
+          <a:solidFill>
+            <a:srgbClr val="EFF6FF"/>
+          </a:solidFill>
+          <a:ln w="9525">
+            <a:solidFill>
+              <a:srgbClr val="E2E8F0"/>
+            </a:solidFill>
+            <a:prstDash val="solid"/>
+          </a:ln>
+        </p:spPr>
+      </p:sp>
+      <p:sp>
+        <p:nvSpPr>
+          <p:cNvPr id="69" name="Text 60"/>
+          <p:cNvSpPr txBox="1"/>
+          <p:nvPr/>
+        </p:nvSpPr>
+        <p:spPr>
+          <a:xfrm>
+            <a:off x="8065008" y="3008376"/>
+            <a:ext cx="1408176" cy="731520"/>
+          </a:xfrm>
+          <a:prstGeom prst="rect">
+            <a:avLst/>
+          </a:prstGeom>
+          <a:noFill/>
+          <a:ln/>
+        </p:spPr>
+        <p:txBody>
+          <a:bodyPr wrap="square" lIns="0" tIns="0" rIns="0" bIns="0" rtlCol="0" anchor="ctr"/>
+          <a:lstStyle/>
+          <a:p>
+            <a:pPr indent="0" marL="0">
+              <a:buNone/>
+            </a:pPr>
+            <a:r>
+              <a:rPr lang="en-US" sz="900" b="1" dirty="0">
+                <a:solidFill>
+                  <a:srgbClr val="0A1F44"/>
+                </a:solidFill>
+                <a:latin typeface="Inter" pitchFamily="34" charset="0"/>
+                <a:ea typeface="Inter" pitchFamily="34" charset="-122"/>
+                <a:cs typeface="Inter" pitchFamily="34" charset="-120"/>
+              </a:rPr>
+              <a:t>30-day and week-2 repeat</a:t>
+            </a:r>
+            <a:endParaRPr lang="en-US" sz="900" dirty="0"/>
+          </a:p>
+        </p:txBody>
+      </p:sp>
+      <p:sp>
+        <p:nvSpPr>
+          <p:cNvPr id="70" name="Shape 61"/>
+          <p:cNvSpPr/>
+          <p:nvPr/>
+        </p:nvSpPr>
+        <p:spPr>
+          <a:xfrm>
+            <a:off x="612648" y="3831336"/>
+            <a:ext cx="9025128" cy="0"/>
+          </a:xfrm>
+          <a:prstGeom prst="line">
+            <a:avLst/>
+          </a:prstGeom>
+          <a:noFill/>
+          <a:ln w="6350">
+            <a:solidFill>
+              <a:srgbClr val="E2E8F0"/>
+            </a:solidFill>
+            <a:prstDash val="solid"/>
+          </a:ln>
+        </p:spPr>
+      </p:sp>
+      <p:sp>
+        <p:nvSpPr>
+          <p:cNvPr id="71" name="Text 62"/>
+          <p:cNvSpPr txBox="1"/>
+          <p:nvPr/>
+        </p:nvSpPr>
+        <p:spPr>
+          <a:xfrm>
+            <a:off x="630936" y="3886200"/>
+            <a:ext cx="1371600" cy="228600"/>
+          </a:xfrm>
+          <a:prstGeom prst="rect">
+            <a:avLst/>
+          </a:prstGeom>
+          <a:noFill/>
+          <a:ln/>
+        </p:spPr>
+        <p:txBody>
+          <a:bodyPr wrap="square" lIns="0" tIns="0" rIns="0" bIns="0" rtlCol="0" anchor="ctr"/>
+          <a:lstStyle/>
+          <a:p>
+            <a:pPr indent="0" marL="0">
+              <a:buNone/>
+            </a:pPr>
+            <a:r>
+              <a:rPr lang="en-US" sz="900" b="1" dirty="0">
+                <a:solidFill>
+                  <a:srgbClr val="0A1F44"/>
+                </a:solidFill>
+                <a:latin typeface="Inter" pitchFamily="34" charset="0"/>
+                <a:ea typeface="Inter" pitchFamily="34" charset="-122"/>
+                <a:cs typeface="Inter" pitchFamily="34" charset="-120"/>
+              </a:rPr>
+              <a:t>Programs</a:t>
+            </a:r>
+            <a:endParaRPr lang="en-US" sz="900" dirty="0"/>
+          </a:p>
+        </p:txBody>
+      </p:sp>
+      <p:sp>
+        <p:nvSpPr>
+          <p:cNvPr id="72" name="Shape 63"/>
+          <p:cNvSpPr/>
+          <p:nvPr/>
+        </p:nvSpPr>
+        <p:spPr>
+          <a:xfrm>
+            <a:off x="2697480" y="3886200"/>
+            <a:ext cx="1280160" cy="228600"/>
+          </a:xfrm>
+          <a:prstGeom prst="roundRect">
+            <a:avLst>
+              <a:gd name="adj" fmla="val 48000"/>
+            </a:avLst>
+          </a:prstGeom>
+          <a:solidFill>
+            <a:srgbClr val="0A1F44"/>
+          </a:solidFill>
+          <a:ln w="9525">
+            <a:solidFill>
+              <a:srgbClr val="0A1F44"/>
+            </a:solidFill>
+            <a:prstDash val="solid"/>
+          </a:ln>
+        </p:spPr>
+      </p:sp>
+      <p:sp>
+        <p:nvSpPr>
+          <p:cNvPr id="73" name="Text 64"/>
+          <p:cNvSpPr txBox="1"/>
+          <p:nvPr/>
+        </p:nvSpPr>
+        <p:spPr>
+          <a:xfrm>
+            <a:off x="2697480" y="3886200"/>
+            <a:ext cx="1280160" cy="228600"/>
+          </a:xfrm>
+          <a:prstGeom prst="rect">
+            <a:avLst/>
+          </a:prstGeom>
+          <a:noFill/>
+          <a:ln/>
+        </p:spPr>
+        <p:txBody>
+          <a:bodyPr wrap="square" lIns="0" tIns="0" rIns="0" bIns="0" rtlCol="0" anchor="ctr"/>
+          <a:lstStyle/>
+          <a:p>
+            <a:pPr algn="ctr" indent="0" marL="0">
+              <a:buNone/>
+            </a:pPr>
+            <a:r>
+              <a:rPr lang="en-US" sz="750" b="1" dirty="0">
+                <a:solidFill>
+                  <a:srgbClr val="FFFFFF"/>
+                </a:solidFill>
+                <a:latin typeface="Inter" pitchFamily="34" charset="0"/>
+                <a:ea typeface="Inter" pitchFamily="34" charset="-122"/>
+                <a:cs typeface="Inter" pitchFamily="34" charset="-120"/>
+              </a:rPr>
+              <a:t>★ Material Journeys v1</a:t>
+            </a:r>
+            <a:endParaRPr lang="en-US" sz="750" dirty="0"/>
+          </a:p>
+        </p:txBody>
+      </p:sp>
+      <p:sp>
+        <p:nvSpPr>
+          <p:cNvPr id="74" name="Shape 65"/>
+          <p:cNvSpPr/>
+          <p:nvPr/>
+        </p:nvSpPr>
+        <p:spPr>
+          <a:xfrm>
+            <a:off x="4032504" y="3886200"/>
+            <a:ext cx="824789" cy="228600"/>
+          </a:xfrm>
+          <a:prstGeom prst="roundRect">
+            <a:avLst>
+              <a:gd name="adj" fmla="val 48000"/>
+            </a:avLst>
+          </a:prstGeom>
+          <a:solidFill>
+            <a:srgbClr val="0A1F44"/>
+          </a:solidFill>
+          <a:ln w="9525">
+            <a:solidFill>
+              <a:srgbClr val="0A1F44"/>
+            </a:solidFill>
+            <a:prstDash val="solid"/>
+          </a:ln>
+        </p:spPr>
+      </p:sp>
+      <p:sp>
+        <p:nvSpPr>
+          <p:cNvPr id="75" name="Text 66"/>
+          <p:cNvSpPr txBox="1"/>
+          <p:nvPr/>
+        </p:nvSpPr>
+        <p:spPr>
+          <a:xfrm>
+            <a:off x="4032504" y="3886200"/>
+            <a:ext cx="824789" cy="228600"/>
+          </a:xfrm>
+          <a:prstGeom prst="rect">
+            <a:avLst/>
+          </a:prstGeom>
+          <a:noFill/>
+          <a:ln/>
+        </p:spPr>
+        <p:txBody>
+          <a:bodyPr wrap="square" lIns="0" tIns="0" rIns="0" bIns="0" rtlCol="0" anchor="ctr"/>
+          <a:lstStyle/>
+          <a:p>
+            <a:pPr algn="ctr" indent="0" marL="0">
+              <a:buNone/>
+            </a:pPr>
+            <a:r>
+              <a:rPr lang="en-US" sz="750" b="1" dirty="0">
+                <a:solidFill>
+                  <a:srgbClr val="FFFFFF"/>
+                </a:solidFill>
+                <a:latin typeface="Inter" pitchFamily="34" charset="0"/>
+                <a:ea typeface="Inter" pitchFamily="34" charset="-122"/>
+                <a:cs typeface="Inter" pitchFamily="34" charset="-120"/>
+              </a:rPr>
+              <a:t>Care Calendar</a:t>
+            </a:r>
+            <a:endParaRPr lang="en-US" sz="750" dirty="0"/>
+          </a:p>
+        </p:txBody>
+      </p:sp>
+      <p:sp>
+        <p:nvSpPr>
+          <p:cNvPr id="76" name="Shape 67"/>
+          <p:cNvSpPr/>
+          <p:nvPr/>
+        </p:nvSpPr>
+        <p:spPr>
+          <a:xfrm>
+            <a:off x="4912157" y="3886200"/>
+            <a:ext cx="726034" cy="228600"/>
+          </a:xfrm>
+          <a:prstGeom prst="roundRect">
+            <a:avLst>
+              <a:gd name="adj" fmla="val 48000"/>
+            </a:avLst>
+          </a:prstGeom>
+          <a:solidFill>
+            <a:srgbClr val="FFFFFF"/>
+          </a:solidFill>
+          <a:ln w="9525">
+            <a:solidFill>
+              <a:srgbClr val="94A3B8"/>
+            </a:solidFill>
+            <a:prstDash val="dash"/>
+          </a:ln>
+        </p:spPr>
+      </p:sp>
+      <p:sp>
+        <p:nvSpPr>
+          <p:cNvPr id="77" name="Text 68"/>
+          <p:cNvSpPr txBox="1"/>
+          <p:nvPr/>
+        </p:nvSpPr>
+        <p:spPr>
+          <a:xfrm>
+            <a:off x="4912157" y="3886200"/>
+            <a:ext cx="726034" cy="228600"/>
+          </a:xfrm>
+          <a:prstGeom prst="rect">
+            <a:avLst/>
+          </a:prstGeom>
+          <a:noFill/>
+          <a:ln/>
+        </p:spPr>
+        <p:txBody>
+          <a:bodyPr wrap="square" lIns="0" tIns="0" rIns="0" bIns="0" rtlCol="0" anchor="ctr"/>
+          <a:lstStyle/>
+          <a:p>
+            <a:pPr algn="ctr" indent="0" marL="0">
+              <a:buNone/>
+            </a:pPr>
+            <a:r>
+              <a:rPr lang="en-US" sz="750" b="1" dirty="0">
+                <a:solidFill>
+                  <a:srgbClr val="64748B"/>
+                </a:solidFill>
+                <a:latin typeface="Inter" pitchFamily="34" charset="0"/>
+                <a:ea typeface="Inter" pitchFamily="34" charset="-122"/>
+                <a:cs typeface="Inter" pitchFamily="34" charset="-120"/>
+              </a:rPr>
+              <a:t>Gift Ledger</a:t>
+            </a:r>
+            <a:endParaRPr lang="en-US" sz="750" dirty="0"/>
+          </a:p>
+        </p:txBody>
+      </p:sp>
+      <p:sp>
+        <p:nvSpPr>
+          <p:cNvPr id="78" name="Shape 69"/>
+          <p:cNvSpPr/>
+          <p:nvPr/>
+        </p:nvSpPr>
+        <p:spPr>
+          <a:xfrm>
+            <a:off x="5693054" y="3886200"/>
+            <a:ext cx="874166" cy="228600"/>
+          </a:xfrm>
+          <a:prstGeom prst="roundRect">
+            <a:avLst>
+              <a:gd name="adj" fmla="val 48000"/>
+            </a:avLst>
+          </a:prstGeom>
+          <a:solidFill>
+            <a:srgbClr val="FFFFFF"/>
+          </a:solidFill>
+          <a:ln w="9525">
+            <a:solidFill>
+              <a:srgbClr val="94A3B8"/>
+            </a:solidFill>
+            <a:prstDash val="dash"/>
+          </a:ln>
+        </p:spPr>
+      </p:sp>
+      <p:sp>
+        <p:nvSpPr>
+          <p:cNvPr id="79" name="Text 70"/>
+          <p:cNvSpPr txBox="1"/>
+          <p:nvPr/>
+        </p:nvSpPr>
+        <p:spPr>
+          <a:xfrm>
+            <a:off x="5693054" y="3886200"/>
+            <a:ext cx="874166" cy="228600"/>
+          </a:xfrm>
+          <a:prstGeom prst="rect">
+            <a:avLst/>
+          </a:prstGeom>
+          <a:noFill/>
+          <a:ln/>
+        </p:spPr>
+        <p:txBody>
+          <a:bodyPr wrap="square" lIns="0" tIns="0" rIns="0" bIns="0" rtlCol="0" anchor="ctr"/>
+          <a:lstStyle/>
+          <a:p>
+            <a:pPr algn="ctr" indent="0" marL="0">
+              <a:buNone/>
+            </a:pPr>
+            <a:r>
+              <a:rPr lang="en-US" sz="750" b="1" dirty="0">
+                <a:solidFill>
+                  <a:srgbClr val="64748B"/>
+                </a:solidFill>
+                <a:latin typeface="Inter" pitchFamily="34" charset="0"/>
+                <a:ea typeface="Inter" pitchFamily="34" charset="-122"/>
+                <a:cs typeface="Inter" pitchFamily="34" charset="-120"/>
+              </a:rPr>
+              <a:t>Quince Insider</a:t>
+            </a:r>
+            <a:endParaRPr lang="en-US" sz="750" dirty="0"/>
+          </a:p>
+        </p:txBody>
+      </p:sp>
+      <p:sp>
+        <p:nvSpPr>
+          <p:cNvPr id="80" name="Shape 71"/>
+          <p:cNvSpPr/>
+          <p:nvPr/>
+        </p:nvSpPr>
+        <p:spPr>
+          <a:xfrm>
+            <a:off x="6622085" y="3886200"/>
+            <a:ext cx="824789" cy="228600"/>
+          </a:xfrm>
+          <a:prstGeom prst="roundRect">
+            <a:avLst>
+              <a:gd name="adj" fmla="val 48000"/>
+            </a:avLst>
+          </a:prstGeom>
+          <a:solidFill>
+            <a:srgbClr val="FFFFFF"/>
+          </a:solidFill>
+          <a:ln w="9525">
+            <a:solidFill>
+              <a:srgbClr val="94A3B8"/>
+            </a:solidFill>
+            <a:prstDash val="dash"/>
+          </a:ln>
+        </p:spPr>
+      </p:sp>
+      <p:sp>
+        <p:nvSpPr>
+          <p:cNvPr id="81" name="Text 72"/>
+          <p:cNvSpPr txBox="1"/>
+          <p:nvPr/>
+        </p:nvSpPr>
+        <p:spPr>
+          <a:xfrm>
+            <a:off x="6622085" y="3886200"/>
+            <a:ext cx="824789" cy="228600"/>
+          </a:xfrm>
+          <a:prstGeom prst="rect">
+            <a:avLst/>
+          </a:prstGeom>
+          <a:noFill/>
+          <a:ln/>
+        </p:spPr>
+        <p:txBody>
+          <a:bodyPr wrap="square" lIns="0" tIns="0" rIns="0" bIns="0" rtlCol="0" anchor="ctr"/>
+          <a:lstStyle/>
+          <a:p>
+            <a:pPr algn="ctr" indent="0" marL="0">
+              <a:buNone/>
+            </a:pPr>
+            <a:r>
+              <a:rPr lang="en-US" sz="750" b="1" dirty="0">
+                <a:solidFill>
+                  <a:srgbClr val="64748B"/>
+                </a:solidFill>
+                <a:latin typeface="Inter" pitchFamily="34" charset="0"/>
+                <a:ea typeface="Inter" pitchFamily="34" charset="-122"/>
+                <a:cs typeface="Inter" pitchFamily="34" charset="-120"/>
+              </a:rPr>
+              <a:t>Beauty Refill</a:t>
+            </a:r>
+            <a:endParaRPr lang="en-US" sz="750" dirty="0"/>
+          </a:p>
+        </p:txBody>
+      </p:sp>
+      <p:sp>
+        <p:nvSpPr>
+          <p:cNvPr id="82" name="Shape 73"/>
+          <p:cNvSpPr/>
+          <p:nvPr/>
+        </p:nvSpPr>
+        <p:spPr>
+          <a:xfrm>
+            <a:off x="7501738" y="3886200"/>
+            <a:ext cx="1170432" cy="228600"/>
+          </a:xfrm>
+          <a:prstGeom prst="roundRect">
+            <a:avLst>
+              <a:gd name="adj" fmla="val 48000"/>
+            </a:avLst>
+          </a:prstGeom>
+          <a:solidFill>
+            <a:srgbClr val="FFFFFF"/>
+          </a:solidFill>
+          <a:ln w="9525">
+            <a:solidFill>
+              <a:srgbClr val="94A3B8"/>
+            </a:solidFill>
+            <a:prstDash val="dash"/>
+          </a:ln>
+        </p:spPr>
+      </p:sp>
+      <p:sp>
+        <p:nvSpPr>
+          <p:cNvPr id="83" name="Text 74"/>
+          <p:cNvSpPr txBox="1"/>
+          <p:nvPr/>
+        </p:nvSpPr>
+        <p:spPr>
+          <a:xfrm>
+            <a:off x="7501738" y="3886200"/>
+            <a:ext cx="1170432" cy="228600"/>
+          </a:xfrm>
+          <a:prstGeom prst="rect">
+            <a:avLst/>
+          </a:prstGeom>
+          <a:noFill/>
+          <a:ln/>
+        </p:spPr>
+        <p:txBody>
+          <a:bodyPr wrap="square" lIns="0" tIns="0" rIns="0" bIns="0" rtlCol="0" anchor="ctr"/>
+          <a:lstStyle/>
+          <a:p>
+            <a:pPr algn="ctr" indent="0" marL="0">
+              <a:buNone/>
+            </a:pPr>
+            <a:r>
+              <a:rPr lang="en-US" sz="750" b="1" dirty="0">
+                <a:solidFill>
+                  <a:srgbClr val="64748B"/>
+                </a:solidFill>
+                <a:latin typeface="Inter" pitchFamily="34" charset="0"/>
+                <a:ea typeface="Inter" pitchFamily="34" charset="-122"/>
+                <a:cs typeface="Inter" pitchFamily="34" charset="-120"/>
+              </a:rPr>
+              <a:t>Cashmere Second Life</a:t>
+            </a:r>
+            <a:endParaRPr lang="en-US" sz="750" dirty="0"/>
+          </a:p>
+        </p:txBody>
+      </p:sp>
+      <p:sp>
+        <p:nvSpPr>
+          <p:cNvPr id="84" name="Shape 75"/>
+          <p:cNvSpPr/>
+          <p:nvPr/>
+        </p:nvSpPr>
+        <p:spPr>
+          <a:xfrm>
+            <a:off x="9747504" y="3008376"/>
+            <a:ext cx="1847088" cy="1051560"/>
+          </a:xfrm>
+          <a:prstGeom prst="roundRect">
+            <a:avLst>
+              <a:gd name="adj" fmla="val 5217"/>
+            </a:avLst>
+          </a:prstGeom>
+          <a:solidFill>
+            <a:srgbClr val="0A1F44"/>
           </a:solidFill>
           <a:ln w="6350">
             <a:solidFill>
-              <a:srgbClr val="64748B"/>
+              <a:srgbClr val="0A1F44"/>
+            </a:solidFill>
+            <a:prstDash val="solid"/>
+          </a:ln>
+        </p:spPr>
+      </p:sp>
+      <p:sp>
+        <p:nvSpPr>
+          <p:cNvPr id="85" name="Text 76"/>
+          <p:cNvSpPr txBox="1"/>
+          <p:nvPr/>
+        </p:nvSpPr>
+        <p:spPr>
+          <a:xfrm>
+            <a:off x="9875520" y="3008376"/>
+            <a:ext cx="1664208" cy="1051560"/>
+          </a:xfrm>
+          <a:prstGeom prst="rect">
+            <a:avLst/>
+          </a:prstGeom>
+          <a:noFill/>
+          <a:ln/>
+        </p:spPr>
+        <p:txBody>
+          <a:bodyPr wrap="square" lIns="0" tIns="0" rIns="0" bIns="0" rtlCol="0" anchor="ctr"/>
+          <a:lstStyle/>
+          <a:p>
+            <a:pPr indent="0" marL="0">
+              <a:buNone/>
+            </a:pPr>
+            <a:r>
+              <a:rPr lang="en-US" sz="1100" b="1" dirty="0">
+                <a:solidFill>
+                  <a:srgbClr val="FFFFFF"/>
+                </a:solidFill>
+                <a:latin typeface="Inter" pitchFamily="34" charset="0"/>
+                <a:ea typeface="Inter" pitchFamily="34" charset="-122"/>
+                <a:cs typeface="Inter" pitchFamily="34" charset="-120"/>
+              </a:rPr>
+              <a:t>$6M owned line</a:t>
+            </a:r>
+            <a:endParaRPr lang="en-US" sz="1200" dirty="0"/>
+          </a:p>
+          <a:p>
+            <a:pPr indent="0" marL="0">
+              <a:buNone/>
+            </a:pPr>
+            <a:r>
+              <a:rPr lang="en-US" sz="900" dirty="0">
+                <a:solidFill>
+                  <a:srgbClr val="C7D7F5"/>
+                </a:solidFill>
+                <a:latin typeface="Inter" pitchFamily="34" charset="0"/>
+                <a:ea typeface="Inter" pitchFamily="34" charset="-122"/>
+                <a:cs typeface="Inter" pitchFamily="34" charset="-120"/>
+              </a:rPr>
+              <a:t>same Option A budget</a:t>
+            </a:r>
+            <a:endParaRPr lang="en-US" sz="1200" dirty="0"/>
+          </a:p>
+        </p:txBody>
+      </p:sp>
+      <p:sp>
+        <p:nvSpPr>
+          <p:cNvPr id="86" name="Shape 77"/>
+          <p:cNvSpPr/>
+          <p:nvPr/>
+        </p:nvSpPr>
+        <p:spPr>
+          <a:xfrm>
+            <a:off x="502920" y="4242816"/>
+            <a:ext cx="11183112" cy="1234440"/>
+          </a:xfrm>
+          <a:prstGeom prst="roundRect">
+            <a:avLst>
+              <a:gd name="adj" fmla="val 5926"/>
+            </a:avLst>
+          </a:prstGeom>
+          <a:solidFill>
+            <a:srgbClr val="F8FAFC"/>
+          </a:solidFill>
+          <a:ln w="9525">
+            <a:solidFill>
+              <a:srgbClr val="E2E8F0"/>
+            </a:solidFill>
+            <a:prstDash val="solid"/>
+          </a:ln>
+        </p:spPr>
+      </p:sp>
+      <p:sp>
+        <p:nvSpPr>
+          <p:cNvPr id="87" name="Shape 78"/>
+          <p:cNvSpPr/>
+          <p:nvPr/>
+        </p:nvSpPr>
+        <p:spPr>
+          <a:xfrm>
+            <a:off x="612648" y="4370832"/>
+            <a:ext cx="329184" cy="329184"/>
+          </a:xfrm>
+          <a:prstGeom prst="ellipse">
+            <a:avLst/>
+          </a:prstGeom>
+          <a:solidFill>
+            <a:srgbClr val="0A1F44"/>
+          </a:solidFill>
+          <a:ln w="6350">
+            <a:solidFill>
+              <a:srgbClr val="0A1F44"/>
+            </a:solidFill>
+            <a:prstDash val="solid"/>
+          </a:ln>
+        </p:spPr>
+      </p:sp>
+      <p:sp>
+        <p:nvSpPr>
+          <p:cNvPr id="88" name="Text 79"/>
+          <p:cNvSpPr txBox="1"/>
+          <p:nvPr/>
+        </p:nvSpPr>
+        <p:spPr>
+          <a:xfrm>
+            <a:off x="612648" y="4370832"/>
+            <a:ext cx="329184" cy="329184"/>
+          </a:xfrm>
+          <a:prstGeom prst="rect">
+            <a:avLst/>
+          </a:prstGeom>
+          <a:noFill/>
+          <a:ln/>
+        </p:spPr>
+        <p:txBody>
+          <a:bodyPr wrap="square" lIns="0" tIns="0" rIns="0" bIns="0" rtlCol="0" anchor="ctr"/>
+          <a:lstStyle/>
+          <a:p>
+            <a:pPr algn="ctr" indent="0" marL="0">
+              <a:buNone/>
+            </a:pPr>
+            <a:r>
+              <a:rPr lang="en-US" sz="1200" b="1" dirty="0">
+                <a:solidFill>
+                  <a:srgbClr val="FFFFFF"/>
+                </a:solidFill>
+                <a:latin typeface="Inter" pitchFamily="34" charset="0"/>
+                <a:ea typeface="Inter" pitchFamily="34" charset="-122"/>
+                <a:cs typeface="Inter" pitchFamily="34" charset="-120"/>
+              </a:rPr>
+              <a:t>3</a:t>
+            </a:r>
+            <a:endParaRPr lang="en-US" sz="1200" dirty="0"/>
+          </a:p>
+        </p:txBody>
+      </p:sp>
+      <p:sp>
+        <p:nvSpPr>
+          <p:cNvPr id="89" name="Text 80"/>
+          <p:cNvSpPr txBox="1"/>
+          <p:nvPr/>
+        </p:nvSpPr>
+        <p:spPr>
+          <a:xfrm>
+            <a:off x="1014984" y="4334256"/>
+            <a:ext cx="1554480" cy="402336"/>
+          </a:xfrm>
+          <a:prstGeom prst="rect">
+            <a:avLst/>
+          </a:prstGeom>
+          <a:noFill/>
+          <a:ln/>
+        </p:spPr>
+        <p:txBody>
+          <a:bodyPr wrap="square" lIns="0" tIns="0" rIns="0" bIns="0" rtlCol="0" anchor="ctr"/>
+          <a:lstStyle/>
+          <a:p>
+            <a:pPr indent="0" marL="0">
+              <a:buNone/>
+            </a:pPr>
+            <a:r>
+              <a:rPr lang="en-US" sz="1150" b="1" dirty="0">
+                <a:solidFill>
+                  <a:srgbClr val="0A1F44"/>
+                </a:solidFill>
+                <a:latin typeface="Inter" pitchFamily="34" charset="0"/>
+                <a:ea typeface="Inter" pitchFamily="34" charset="-122"/>
+                <a:cs typeface="Inter" pitchFamily="34" charset="-120"/>
+              </a:rPr>
+              <a:t>Never pay twice</a:t>
+            </a:r>
+            <a:endParaRPr lang="en-US" sz="1150" dirty="0"/>
+          </a:p>
+        </p:txBody>
+      </p:sp>
+      <p:sp>
+        <p:nvSpPr>
+          <p:cNvPr id="90" name="Text 81"/>
+          <p:cNvSpPr txBox="1"/>
+          <p:nvPr/>
+        </p:nvSpPr>
+        <p:spPr>
+          <a:xfrm>
+            <a:off x="630936" y="4754880"/>
+            <a:ext cx="1920240" cy="420624"/>
+          </a:xfrm>
+          <a:prstGeom prst="rect">
+            <a:avLst/>
+          </a:prstGeom>
+          <a:noFill/>
+          <a:ln/>
+        </p:spPr>
+        <p:txBody>
+          <a:bodyPr wrap="square" lIns="0" tIns="0" rIns="0" bIns="0" rtlCol="0" anchor="t"/>
+          <a:lstStyle/>
+          <a:p>
+            <a:pPr indent="0" marL="0">
+              <a:buNone/>
+            </a:pPr>
+            <a:r>
+              <a:rPr lang="en-US" sz="900" dirty="0">
+                <a:solidFill>
+                  <a:srgbClr val="334155"/>
+                </a:solidFill>
+                <a:latin typeface="Inter" pitchFamily="34" charset="0"/>
+                <a:ea typeface="Inter" pitchFamily="34" charset="-122"/>
+                <a:cs typeface="Inter" pitchFamily="34" charset="-120"/>
+              </a:rPr>
+              <a:t>Retargeted buyers repeat 23.0%, same as organic 23.4%</a:t>
+            </a:r>
+            <a:endParaRPr lang="en-US" sz="900" dirty="0"/>
+          </a:p>
+        </p:txBody>
+      </p:sp>
+      <p:sp>
+        <p:nvSpPr>
+          <p:cNvPr id="91" name="Shape 82"/>
+          <p:cNvSpPr/>
+          <p:nvPr/>
+        </p:nvSpPr>
+        <p:spPr>
+          <a:xfrm>
+            <a:off x="2697480" y="4334256"/>
+            <a:ext cx="256032" cy="256032"/>
+          </a:xfrm>
+          <a:prstGeom prst="ellipse">
+            <a:avLst/>
+          </a:prstGeom>
+          <a:solidFill>
+            <a:srgbClr val="EFF6FF"/>
+          </a:solidFill>
+          <a:ln w="6350">
+            <a:solidFill>
+              <a:srgbClr val="EFF6FF"/>
             </a:solidFill>
             <a:prstDash val="solid"/>
           </a:ln>
@@ -50490,7 +50585,7 @@
       </p:sp>
       <p:pic>
         <p:nvPicPr>
-          <p:cNvPr id="93" name="Image 7" descr="preencoded.png">    </p:cNvPr>
+          <p:cNvPr id="92" name="Image 7" descr="preencoded.png">    </p:cNvPr>
           <p:cNvPicPr>
             <a:picLocks noChangeAspect="1"/>
           </p:cNvPicPr>
@@ -50504,7 +50599,7 @@
         </p:blipFill>
         <p:spPr>
           <a:xfrm>
-            <a:off x="10224455" y="4628327"/>
+            <a:off x="2753807" y="4390583"/>
             <a:ext cx="143378" cy="143378"/>
           </a:xfrm>
           <a:prstGeom prst="rect">
@@ -50514,14 +50609,14 @@
       </p:pic>
       <p:sp>
         <p:nvSpPr>
-          <p:cNvPr id="94" name="Text 84"/>
-          <p:cNvSpPr txBox="1"/>
-          <p:nvPr/>
-        </p:nvSpPr>
-        <p:spPr>
-          <a:xfrm>
-            <a:off x="10479024" y="4553712"/>
-            <a:ext cx="1152144" cy="292608"/>
+          <p:cNvPr id="93" name="Text 83"/>
+          <p:cNvSpPr txBox="1"/>
+          <p:nvPr/>
+        </p:nvSpPr>
+        <p:spPr>
+          <a:xfrm>
+            <a:off x="3008376" y="4334256"/>
+            <a:ext cx="1271016" cy="256032"/>
           </a:xfrm>
           <a:prstGeom prst="rect">
             <a:avLst/>
@@ -50537,30 +50632,79 @@
               <a:buNone/>
             </a:pPr>
             <a:r>
-              <a:rPr lang="en-US" sz="1050" b="1" dirty="0">
-                <a:solidFill>
-                  <a:srgbClr val="64748B"/>
-                </a:solidFill>
-                <a:latin typeface="Inter" pitchFamily="34" charset="0"/>
-                <a:ea typeface="Inter" pitchFamily="34" charset="-122"/>
-                <a:cs typeface="Inter" pitchFamily="34" charset="-120"/>
-              </a:rPr>
-              <a:t>Stop</a:t>
-            </a:r>
-            <a:endParaRPr lang="en-US" sz="1050" dirty="0"/>
-          </a:p>
-        </p:txBody>
-      </p:sp>
-      <p:sp>
-        <p:nvSpPr>
-          <p:cNvPr id="95" name="Text 85"/>
-          <p:cNvSpPr txBox="1"/>
-          <p:nvPr/>
-        </p:nvSpPr>
-        <p:spPr>
-          <a:xfrm>
-            <a:off x="10168128" y="4864608"/>
-            <a:ext cx="1426464" cy="420624"/>
+              <a:rPr lang="en-US" sz="900" b="1" dirty="0">
+                <a:solidFill>
+                  <a:srgbClr val="0A1F44"/>
+                </a:solidFill>
+                <a:latin typeface="Inter" pitchFamily="34" charset="0"/>
+                <a:ea typeface="Inter" pitchFamily="34" charset="-122"/>
+                <a:cs typeface="Inter" pitchFamily="34" charset="-120"/>
+              </a:rPr>
+              <a:t>CJA audiences</a:t>
+            </a:r>
+            <a:endParaRPr lang="en-US" sz="900" dirty="0"/>
+          </a:p>
+        </p:txBody>
+      </p:sp>
+      <p:sp>
+        <p:nvSpPr>
+          <p:cNvPr id="94" name="Shape 84"/>
+          <p:cNvSpPr/>
+          <p:nvPr/>
+        </p:nvSpPr>
+        <p:spPr>
+          <a:xfrm>
+            <a:off x="2697480" y="4617720"/>
+            <a:ext cx="256032" cy="256032"/>
+          </a:xfrm>
+          <a:prstGeom prst="ellipse">
+            <a:avLst/>
+          </a:prstGeom>
+          <a:solidFill>
+            <a:srgbClr val="EFF6FF"/>
+          </a:solidFill>
+          <a:ln w="6350">
+            <a:solidFill>
+              <a:srgbClr val="EFF6FF"/>
+            </a:solidFill>
+            <a:prstDash val="solid"/>
+          </a:ln>
+        </p:spPr>
+      </p:sp>
+      <p:pic>
+        <p:nvPicPr>
+          <p:cNvPr id="95" name="Image 8" descr="preencoded.png">    </p:cNvPr>
+          <p:cNvPicPr>
+            <a:picLocks noChangeAspect="1"/>
+          </p:cNvPicPr>
+          <p:nvPr/>
+        </p:nvPicPr>
+        <p:blipFill>
+          <a:blip r:embed="rId9"/>
+          <a:stretch>
+            <a:fillRect/>
+          </a:stretch>
+        </p:blipFill>
+        <p:spPr>
+          <a:xfrm>
+            <a:off x="2753807" y="4674047"/>
+            <a:ext cx="143378" cy="143378"/>
+          </a:xfrm>
+          <a:prstGeom prst="rect">
+            <a:avLst/>
+          </a:prstGeom>
+        </p:spPr>
+      </p:pic>
+      <p:sp>
+        <p:nvSpPr>
+          <p:cNvPr id="96" name="Text 85"/>
+          <p:cNvSpPr txBox="1"/>
+          <p:nvPr/>
+        </p:nvSpPr>
+        <p:spPr>
+          <a:xfrm>
+            <a:off x="3008376" y="4617720"/>
+            <a:ext cx="1271016" cy="256032"/>
           </a:xfrm>
           <a:prstGeom prst="rect">
             <a:avLst/>
@@ -50576,15 +50720,15 @@
               <a:buNone/>
             </a:pPr>
             <a:r>
-              <a:rPr lang="en-US" sz="900" dirty="0">
-                <a:solidFill>
-                  <a:srgbClr val="0F172A"/>
-                </a:solidFill>
-                <a:latin typeface="Inter" pitchFamily="34" charset="0"/>
-                <a:ea typeface="Inter" pitchFamily="34" charset="-122"/>
-                <a:cs typeface="Inter" pitchFamily="34" charset="-120"/>
-              </a:rPr>
-              <a:t>No lift: money stays where it is</a:t>
+              <a:rPr lang="en-US" sz="900" b="1" dirty="0">
+                <a:solidFill>
+                  <a:srgbClr val="0A1F44"/>
+                </a:solidFill>
+                <a:latin typeface="Inter" pitchFamily="34" charset="0"/>
+                <a:ea typeface="Inter" pitchFamily="34" charset="-122"/>
+                <a:cs typeface="Inter" pitchFamily="34" charset="-120"/>
+              </a:rPr>
+              <a:t>Real-Time CDP</a:t>
             </a:r>
             <a:endParaRPr lang="en-US" sz="900" dirty="0"/>
           </a:p>
@@ -50592,18 +50736,630 @@
       </p:sp>
       <p:sp>
         <p:nvSpPr>
-          <p:cNvPr id="96" name="Shape 86"/>
-          <p:cNvSpPr/>
-          <p:nvPr/>
-        </p:nvSpPr>
-        <p:spPr>
-          <a:xfrm>
-            <a:off x="2788920" y="5413248"/>
-            <a:ext cx="6858000" cy="457200"/>
+          <p:cNvPr id="97" name="Shape 86"/>
+          <p:cNvSpPr/>
+          <p:nvPr/>
+        </p:nvSpPr>
+        <p:spPr>
+          <a:xfrm>
+            <a:off x="2697480" y="4901184"/>
+            <a:ext cx="256032" cy="256032"/>
+          </a:xfrm>
+          <a:prstGeom prst="ellipse">
+            <a:avLst/>
+          </a:prstGeom>
+          <a:solidFill>
+            <a:srgbClr val="EFF6FF"/>
+          </a:solidFill>
+          <a:ln w="6350">
+            <a:solidFill>
+              <a:srgbClr val="EFF6FF"/>
+            </a:solidFill>
+            <a:prstDash val="solid"/>
+          </a:ln>
+        </p:spPr>
+      </p:sp>
+      <p:pic>
+        <p:nvPicPr>
+          <p:cNvPr id="98" name="Image 9" descr="preencoded.png">    </p:cNvPr>
+          <p:cNvPicPr>
+            <a:picLocks noChangeAspect="1"/>
+          </p:cNvPicPr>
+          <p:nvPr/>
+        </p:nvPicPr>
+        <p:blipFill>
+          <a:blip r:embed="rId10"/>
+          <a:stretch>
+            <a:fillRect/>
+          </a:stretch>
+        </p:blipFill>
+        <p:spPr>
+          <a:xfrm>
+            <a:off x="2753807" y="4957511"/>
+            <a:ext cx="143378" cy="143378"/>
+          </a:xfrm>
+          <a:prstGeom prst="rect">
+            <a:avLst/>
+          </a:prstGeom>
+        </p:spPr>
+      </p:pic>
+      <p:sp>
+        <p:nvSpPr>
+          <p:cNvPr id="99" name="Text 87"/>
+          <p:cNvSpPr txBox="1"/>
+          <p:nvPr/>
+        </p:nvSpPr>
+        <p:spPr>
+          <a:xfrm>
+            <a:off x="3008376" y="4901184"/>
+            <a:ext cx="1271016" cy="256032"/>
+          </a:xfrm>
+          <a:prstGeom prst="rect">
+            <a:avLst/>
+          </a:prstGeom>
+          <a:noFill/>
+          <a:ln/>
+        </p:spPr>
+        <p:txBody>
+          <a:bodyPr wrap="square" lIns="0" tIns="0" rIns="0" bIns="0" rtlCol="0" anchor="ctr"/>
+          <a:lstStyle/>
+          <a:p>
+            <a:pPr indent="0" marL="0">
+              <a:buNone/>
+            </a:pPr>
+            <a:r>
+              <a:rPr lang="en-US" sz="900" b="1" dirty="0">
+                <a:solidFill>
+                  <a:srgbClr val="0A1F44"/>
+                </a:solidFill>
+                <a:latin typeface="Inter" pitchFamily="34" charset="0"/>
+                <a:ea typeface="Inter" pitchFamily="34" charset="-122"/>
+                <a:cs typeface="Inter" pitchFamily="34" charset="-120"/>
+              </a:rPr>
+              <a:t>Meta, Google, TikTok</a:t>
+            </a:r>
+            <a:endParaRPr lang="en-US" sz="900" dirty="0"/>
+          </a:p>
+        </p:txBody>
+      </p:sp>
+      <p:sp>
+        <p:nvSpPr>
+          <p:cNvPr id="100" name="Shape 88"/>
+          <p:cNvSpPr/>
+          <p:nvPr/>
+        </p:nvSpPr>
+        <p:spPr>
+          <a:xfrm>
+            <a:off x="4389120" y="4334256"/>
+            <a:ext cx="1664208" cy="731520"/>
           </a:xfrm>
           <a:prstGeom prst="roundRect">
             <a:avLst>
-              <a:gd name="adj" fmla="val 16000"/>
+              <a:gd name="adj" fmla="val 7500"/>
+            </a:avLst>
+          </a:prstGeom>
+          <a:solidFill>
+            <a:srgbClr val="FFFFFF"/>
+          </a:solidFill>
+          <a:ln w="9525">
+            <a:solidFill>
+              <a:srgbClr val="E2E8F0"/>
+            </a:solidFill>
+            <a:prstDash val="solid"/>
+          </a:ln>
+        </p:spPr>
+      </p:sp>
+      <p:sp>
+        <p:nvSpPr>
+          <p:cNvPr id="101" name="Text 89"/>
+          <p:cNvSpPr txBox="1"/>
+          <p:nvPr/>
+        </p:nvSpPr>
+        <p:spPr>
+          <a:xfrm>
+            <a:off x="4480560" y="4334256"/>
+            <a:ext cx="1499616" cy="731520"/>
+          </a:xfrm>
+          <a:prstGeom prst="rect">
+            <a:avLst/>
+          </a:prstGeom>
+          <a:noFill/>
+          <a:ln/>
+        </p:spPr>
+        <p:txBody>
+          <a:bodyPr wrap="square" lIns="0" tIns="0" rIns="0" bIns="0" rtlCol="0" anchor="ctr"/>
+          <a:lstStyle/>
+          <a:p>
+            <a:pPr indent="0" marL="0">
+              <a:buNone/>
+            </a:pPr>
+            <a:r>
+              <a:rPr lang="en-US" sz="900" dirty="0">
+                <a:solidFill>
+                  <a:srgbClr val="0F172A"/>
+                </a:solidFill>
+                <a:latin typeface="Inter" pitchFamily="34" charset="0"/>
+                <a:ea typeface="Inter" pitchFamily="34" charset="-122"/>
+                <a:cs typeface="Inter" pitchFamily="34" charset="-120"/>
+              </a:rPr>
+              <a:t>Recent and owned-reachable buyers as CJA audiences</a:t>
+            </a:r>
+            <a:endParaRPr lang="en-US" sz="900" dirty="0"/>
+          </a:p>
+        </p:txBody>
+      </p:sp>
+      <p:sp>
+        <p:nvSpPr>
+          <p:cNvPr id="102" name="Shape 90"/>
+          <p:cNvSpPr/>
+          <p:nvPr/>
+        </p:nvSpPr>
+        <p:spPr>
+          <a:xfrm>
+            <a:off x="6181344" y="4334256"/>
+            <a:ext cx="1664208" cy="731520"/>
+          </a:xfrm>
+          <a:prstGeom prst="roundRect">
+            <a:avLst>
+              <a:gd name="adj" fmla="val 7500"/>
+            </a:avLst>
+          </a:prstGeom>
+          <a:solidFill>
+            <a:srgbClr val="FFFFFF"/>
+          </a:solidFill>
+          <a:ln w="9525">
+            <a:solidFill>
+              <a:srgbClr val="E2E8F0"/>
+            </a:solidFill>
+            <a:prstDash val="solid"/>
+          </a:ln>
+        </p:spPr>
+      </p:sp>
+      <p:sp>
+        <p:nvSpPr>
+          <p:cNvPr id="103" name="Text 91"/>
+          <p:cNvSpPr txBox="1"/>
+          <p:nvPr/>
+        </p:nvSpPr>
+        <p:spPr>
+          <a:xfrm>
+            <a:off x="6272784" y="4334256"/>
+            <a:ext cx="1499616" cy="731520"/>
+          </a:xfrm>
+          <a:prstGeom prst="rect">
+            <a:avLst/>
+          </a:prstGeom>
+          <a:noFill/>
+          <a:ln/>
+        </p:spPr>
+        <p:txBody>
+          <a:bodyPr wrap="square" lIns="0" tIns="0" rIns="0" bIns="0" rtlCol="0" anchor="ctr"/>
+          <a:lstStyle/>
+          <a:p>
+            <a:pPr indent="0" marL="0">
+              <a:buNone/>
+            </a:pPr>
+            <a:r>
+              <a:rPr lang="en-US" sz="900" dirty="0">
+                <a:solidFill>
+                  <a:srgbClr val="0F172A"/>
+                </a:solidFill>
+                <a:latin typeface="Inter" pitchFamily="34" charset="0"/>
+                <a:ea typeface="Inter" pitchFamily="34" charset="-122"/>
+                <a:cs typeface="Inter" pitchFamily="34" charset="-120"/>
+              </a:rPr>
+              <a:t>Daily suppression lists; frequency caps</a:t>
+            </a:r>
+            <a:endParaRPr lang="en-US" sz="900" dirty="0"/>
+          </a:p>
+        </p:txBody>
+      </p:sp>
+      <p:sp>
+        <p:nvSpPr>
+          <p:cNvPr id="104" name="Shape 92"/>
+          <p:cNvSpPr/>
+          <p:nvPr/>
+        </p:nvSpPr>
+        <p:spPr>
+          <a:xfrm>
+            <a:off x="7973568" y="4334256"/>
+            <a:ext cx="1572768" cy="731520"/>
+          </a:xfrm>
+          <a:prstGeom prst="roundRect">
+            <a:avLst>
+              <a:gd name="adj" fmla="val 7500"/>
+            </a:avLst>
+          </a:prstGeom>
+          <a:solidFill>
+            <a:srgbClr val="EFF6FF"/>
+          </a:solidFill>
+          <a:ln w="9525">
+            <a:solidFill>
+              <a:srgbClr val="E2E8F0"/>
+            </a:solidFill>
+            <a:prstDash val="solid"/>
+          </a:ln>
+        </p:spPr>
+      </p:sp>
+      <p:sp>
+        <p:nvSpPr>
+          <p:cNvPr id="105" name="Text 93"/>
+          <p:cNvSpPr txBox="1"/>
+          <p:nvPr/>
+        </p:nvSpPr>
+        <p:spPr>
+          <a:xfrm>
+            <a:off x="8065008" y="4334256"/>
+            <a:ext cx="1408176" cy="731520"/>
+          </a:xfrm>
+          <a:prstGeom prst="rect">
+            <a:avLst/>
+          </a:prstGeom>
+          <a:noFill/>
+          <a:ln/>
+        </p:spPr>
+        <p:txBody>
+          <a:bodyPr wrap="square" lIns="0" tIns="0" rIns="0" bIns="0" rtlCol="0" anchor="ctr"/>
+          <a:lstStyle/>
+          <a:p>
+            <a:pPr indent="0" marL="0">
+              <a:buNone/>
+            </a:pPr>
+            <a:r>
+              <a:rPr lang="en-US" sz="900" b="1" dirty="0">
+                <a:solidFill>
+                  <a:srgbClr val="0A1F44"/>
+                </a:solidFill>
+                <a:latin typeface="Inter" pitchFamily="34" charset="0"/>
+                <a:ea typeface="Inter" pitchFamily="34" charset="-122"/>
+                <a:cs typeface="Inter" pitchFamily="34" charset="-120"/>
+              </a:rPr>
+              <a:t>Incremental orders per retargeting $</a:t>
+            </a:r>
+            <a:endParaRPr lang="en-US" sz="900" dirty="0"/>
+          </a:p>
+        </p:txBody>
+      </p:sp>
+      <p:sp>
+        <p:nvSpPr>
+          <p:cNvPr id="106" name="Shape 94"/>
+          <p:cNvSpPr/>
+          <p:nvPr/>
+        </p:nvSpPr>
+        <p:spPr>
+          <a:xfrm>
+            <a:off x="612648" y="5157216"/>
+            <a:ext cx="9025128" cy="0"/>
+          </a:xfrm>
+          <a:prstGeom prst="line">
+            <a:avLst/>
+          </a:prstGeom>
+          <a:noFill/>
+          <a:ln w="6350">
+            <a:solidFill>
+              <a:srgbClr val="E2E8F0"/>
+            </a:solidFill>
+            <a:prstDash val="solid"/>
+          </a:ln>
+        </p:spPr>
+      </p:sp>
+      <p:sp>
+        <p:nvSpPr>
+          <p:cNvPr id="107" name="Text 95"/>
+          <p:cNvSpPr txBox="1"/>
+          <p:nvPr/>
+        </p:nvSpPr>
+        <p:spPr>
+          <a:xfrm>
+            <a:off x="630936" y="5212080"/>
+            <a:ext cx="1371600" cy="228600"/>
+          </a:xfrm>
+          <a:prstGeom prst="rect">
+            <a:avLst/>
+          </a:prstGeom>
+          <a:noFill/>
+          <a:ln/>
+        </p:spPr>
+        <p:txBody>
+          <a:bodyPr wrap="square" lIns="0" tIns="0" rIns="0" bIns="0" rtlCol="0" anchor="ctr"/>
+          <a:lstStyle/>
+          <a:p>
+            <a:pPr indent="0" marL="0">
+              <a:buNone/>
+            </a:pPr>
+            <a:r>
+              <a:rPr lang="en-US" sz="900" b="1" dirty="0">
+                <a:solidFill>
+                  <a:srgbClr val="0A1F44"/>
+                </a:solidFill>
+                <a:latin typeface="Inter" pitchFamily="34" charset="0"/>
+                <a:ea typeface="Inter" pitchFamily="34" charset="-122"/>
+                <a:cs typeface="Inter" pitchFamily="34" charset="-120"/>
+              </a:rPr>
+              <a:t>Programs</a:t>
+            </a:r>
+            <a:endParaRPr lang="en-US" sz="900" dirty="0"/>
+          </a:p>
+        </p:txBody>
+      </p:sp>
+      <p:sp>
+        <p:nvSpPr>
+          <p:cNvPr id="108" name="Shape 96"/>
+          <p:cNvSpPr/>
+          <p:nvPr/>
+        </p:nvSpPr>
+        <p:spPr>
+          <a:xfrm>
+            <a:off x="2697480" y="5212080"/>
+            <a:ext cx="1378915" cy="228600"/>
+          </a:xfrm>
+          <a:prstGeom prst="roundRect">
+            <a:avLst>
+              <a:gd name="adj" fmla="val 48000"/>
+            </a:avLst>
+          </a:prstGeom>
+          <a:solidFill>
+            <a:srgbClr val="0A1F44"/>
+          </a:solidFill>
+          <a:ln w="9525">
+            <a:solidFill>
+              <a:srgbClr val="0A1F44"/>
+            </a:solidFill>
+            <a:prstDash val="solid"/>
+          </a:ln>
+        </p:spPr>
+      </p:sp>
+      <p:sp>
+        <p:nvSpPr>
+          <p:cNvPr id="109" name="Text 97"/>
+          <p:cNvSpPr txBox="1"/>
+          <p:nvPr/>
+        </p:nvSpPr>
+        <p:spPr>
+          <a:xfrm>
+            <a:off x="2697480" y="5212080"/>
+            <a:ext cx="1378915" cy="228600"/>
+          </a:xfrm>
+          <a:prstGeom prst="rect">
+            <a:avLst/>
+          </a:prstGeom>
+          <a:noFill/>
+          <a:ln/>
+        </p:spPr>
+        <p:txBody>
+          <a:bodyPr wrap="square" lIns="0" tIns="0" rIns="0" bIns="0" rtlCol="0" anchor="ctr"/>
+          <a:lstStyle/>
+          <a:p>
+            <a:pPr algn="ctr" indent="0" marL="0">
+              <a:buNone/>
+            </a:pPr>
+            <a:r>
+              <a:rPr lang="en-US" sz="750" b="1" dirty="0">
+                <a:solidFill>
+                  <a:srgbClr val="FFFFFF"/>
+                </a:solidFill>
+                <a:latin typeface="Inter" pitchFamily="34" charset="0"/>
+                <a:ea typeface="Inter" pitchFamily="34" charset="-122"/>
+                <a:cs typeface="Inter" pitchFamily="34" charset="-120"/>
+              </a:rPr>
+              <a:t>★ Never Pay Twice Engine</a:t>
+            </a:r>
+            <a:endParaRPr lang="en-US" sz="750" dirty="0"/>
+          </a:p>
+        </p:txBody>
+      </p:sp>
+      <p:sp>
+        <p:nvSpPr>
+          <p:cNvPr id="110" name="Shape 98"/>
+          <p:cNvSpPr/>
+          <p:nvPr/>
+        </p:nvSpPr>
+        <p:spPr>
+          <a:xfrm>
+            <a:off x="4131259" y="5212080"/>
+            <a:ext cx="874166" cy="228600"/>
+          </a:xfrm>
+          <a:prstGeom prst="roundRect">
+            <a:avLst>
+              <a:gd name="adj" fmla="val 48000"/>
+            </a:avLst>
+          </a:prstGeom>
+          <a:solidFill>
+            <a:srgbClr val="0A1F44"/>
+          </a:solidFill>
+          <a:ln w="9525">
+            <a:solidFill>
+              <a:srgbClr val="0A1F44"/>
+            </a:solidFill>
+            <a:prstDash val="solid"/>
+          </a:ln>
+        </p:spPr>
+      </p:sp>
+      <p:sp>
+        <p:nvSpPr>
+          <p:cNvPr id="111" name="Text 99"/>
+          <p:cNvSpPr txBox="1"/>
+          <p:nvPr/>
+        </p:nvSpPr>
+        <p:spPr>
+          <a:xfrm>
+            <a:off x="4131259" y="5212080"/>
+            <a:ext cx="874166" cy="228600"/>
+          </a:xfrm>
+          <a:prstGeom prst="rect">
+            <a:avLst/>
+          </a:prstGeom>
+          <a:noFill/>
+          <a:ln/>
+        </p:spPr>
+        <p:txBody>
+          <a:bodyPr wrap="square" lIns="0" tIns="0" rIns="0" bIns="0" rtlCol="0" anchor="ctr"/>
+          <a:lstStyle/>
+          <a:p>
+            <a:pPr algn="ctr" indent="0" marL="0">
+              <a:buNone/>
+            </a:pPr>
+            <a:r>
+              <a:rPr lang="en-US" sz="750" b="1" dirty="0">
+                <a:solidFill>
+                  <a:srgbClr val="FFFFFF"/>
+                </a:solidFill>
+                <a:latin typeface="Inter" pitchFamily="34" charset="0"/>
+                <a:ea typeface="Inter" pitchFamily="34" charset="-122"/>
+                <a:cs typeface="Inter" pitchFamily="34" charset="-120"/>
+              </a:rPr>
+              <a:t>Proof Creators</a:t>
+            </a:r>
+            <a:endParaRPr lang="en-US" sz="750" dirty="0"/>
+          </a:p>
+        </p:txBody>
+      </p:sp>
+      <p:sp>
+        <p:nvSpPr>
+          <p:cNvPr id="112" name="Shape 100"/>
+          <p:cNvSpPr/>
+          <p:nvPr/>
+        </p:nvSpPr>
+        <p:spPr>
+          <a:xfrm>
+            <a:off x="5060290" y="5212080"/>
+            <a:ext cx="1121054" cy="228600"/>
+          </a:xfrm>
+          <a:prstGeom prst="roundRect">
+            <a:avLst>
+              <a:gd name="adj" fmla="val 48000"/>
+            </a:avLst>
+          </a:prstGeom>
+          <a:solidFill>
+            <a:srgbClr val="FFFFFF"/>
+          </a:solidFill>
+          <a:ln w="9525">
+            <a:solidFill>
+              <a:srgbClr val="94A3B8"/>
+            </a:solidFill>
+            <a:prstDash val="dash"/>
+          </a:ln>
+        </p:spPr>
+      </p:sp>
+      <p:sp>
+        <p:nvSpPr>
+          <p:cNvPr id="113" name="Text 101"/>
+          <p:cNvSpPr txBox="1"/>
+          <p:nvPr/>
+        </p:nvSpPr>
+        <p:spPr>
+          <a:xfrm>
+            <a:off x="5060290" y="5212080"/>
+            <a:ext cx="1121054" cy="228600"/>
+          </a:xfrm>
+          <a:prstGeom prst="rect">
+            <a:avLst/>
+          </a:prstGeom>
+          <a:noFill/>
+          <a:ln/>
+        </p:spPr>
+        <p:txBody>
+          <a:bodyPr wrap="square" lIns="0" tIns="0" rIns="0" bIns="0" rtlCol="0" anchor="ctr"/>
+          <a:lstStyle/>
+          <a:p>
+            <a:pPr algn="ctr" indent="0" marL="0">
+              <a:buNone/>
+            </a:pPr>
+            <a:r>
+              <a:rPr lang="en-US" sz="750" b="1" dirty="0">
+                <a:solidFill>
+                  <a:srgbClr val="64748B"/>
+                </a:solidFill>
+                <a:latin typeface="Inter" pitchFamily="34" charset="0"/>
+                <a:ea typeface="Inter" pitchFamily="34" charset="-122"/>
+                <a:cs typeface="Inter" pitchFamily="34" charset="-120"/>
+              </a:rPr>
+              <a:t>Loyalist Lookalikes</a:t>
+            </a:r>
+            <a:endParaRPr lang="en-US" sz="750" dirty="0"/>
+          </a:p>
+        </p:txBody>
+      </p:sp>
+      <p:sp>
+        <p:nvSpPr>
+          <p:cNvPr id="114" name="Shape 102"/>
+          <p:cNvSpPr/>
+          <p:nvPr/>
+        </p:nvSpPr>
+        <p:spPr>
+          <a:xfrm>
+            <a:off x="6236208" y="5212080"/>
+            <a:ext cx="972922" cy="228600"/>
+          </a:xfrm>
+          <a:prstGeom prst="roundRect">
+            <a:avLst>
+              <a:gd name="adj" fmla="val 48000"/>
+            </a:avLst>
+          </a:prstGeom>
+          <a:solidFill>
+            <a:srgbClr val="FFFFFF"/>
+          </a:solidFill>
+          <a:ln w="9525">
+            <a:solidFill>
+              <a:srgbClr val="94A3B8"/>
+            </a:solidFill>
+            <a:prstDash val="dash"/>
+          </a:ln>
+        </p:spPr>
+      </p:sp>
+      <p:sp>
+        <p:nvSpPr>
+          <p:cNvPr id="115" name="Text 103"/>
+          <p:cNvSpPr txBox="1"/>
+          <p:nvPr/>
+        </p:nvSpPr>
+        <p:spPr>
+          <a:xfrm>
+            <a:off x="6236208" y="5212080"/>
+            <a:ext cx="972922" cy="228600"/>
+          </a:xfrm>
+          <a:prstGeom prst="rect">
+            <a:avLst/>
+          </a:prstGeom>
+          <a:noFill/>
+          <a:ln/>
+        </p:spPr>
+        <p:txBody>
+          <a:bodyPr wrap="square" lIns="0" tIns="0" rIns="0" bIns="0" rtlCol="0" anchor="ctr"/>
+          <a:lstStyle/>
+          <a:p>
+            <a:pPr algn="ctr" indent="0" marL="0">
+              <a:buNone/>
+            </a:pPr>
+            <a:r>
+              <a:rPr lang="en-US" sz="750" b="1" dirty="0">
+                <a:solidFill>
+                  <a:srgbClr val="64748B"/>
+                </a:solidFill>
+                <a:latin typeface="Inter" pitchFamily="34" charset="0"/>
+                <a:ea typeface="Inter" pitchFamily="34" charset="-122"/>
+                <a:cs typeface="Inter" pitchFamily="34" charset="-120"/>
+              </a:rPr>
+              <a:t>The Fitting Room</a:t>
+            </a:r>
+            <a:endParaRPr lang="en-US" sz="750" dirty="0"/>
+          </a:p>
+        </p:txBody>
+      </p:sp>
+      <p:sp>
+        <p:nvSpPr>
+          <p:cNvPr id="116" name="Shape 104"/>
+          <p:cNvSpPr/>
+          <p:nvPr/>
+        </p:nvSpPr>
+        <p:spPr>
+          <a:xfrm>
+            <a:off x="9747504" y="4334256"/>
+            <a:ext cx="1847088" cy="1051560"/>
+          </a:xfrm>
+          <a:prstGeom prst="roundRect">
+            <a:avLst>
+              <a:gd name="adj" fmla="val 5217"/>
             </a:avLst>
           </a:prstGeom>
           <a:solidFill>
@@ -50619,14 +51375,14 @@
       </p:sp>
       <p:sp>
         <p:nvSpPr>
-          <p:cNvPr id="97" name="Text 87"/>
-          <p:cNvSpPr txBox="1"/>
-          <p:nvPr/>
-        </p:nvSpPr>
-        <p:spPr>
-          <a:xfrm>
-            <a:off x="2953512" y="5413248"/>
-            <a:ext cx="6583680" cy="457200"/>
+          <p:cNvPr id="117" name="Text 105"/>
+          <p:cNvSpPr txBox="1"/>
+          <p:nvPr/>
+        </p:nvSpPr>
+        <p:spPr>
+          <a:xfrm>
+            <a:off x="9875520" y="4334256"/>
+            <a:ext cx="1664208" cy="1051560"/>
           </a:xfrm>
           <a:prstGeom prst="rect">
             <a:avLst/>
@@ -50642,21 +51398,7 @@
               <a:buNone/>
             </a:pPr>
             <a:r>
-              <a:rPr lang="en-US" sz="1000" b="1" dirty="0">
-                <a:solidFill>
-                  <a:srgbClr val="8FB2EE"/>
-                </a:solidFill>
-                <a:latin typeface="Inter" pitchFamily="34" charset="0"/>
-                <a:ea typeface="Inter" pitchFamily="34" charset="-122"/>
-                <a:cs typeface="Inter" pitchFamily="34" charset="-120"/>
-              </a:rPr>
-              <a:t>Every stage:  </a:t>
-            </a:r>
-            <a:pPr indent="0" marL="0">
-              <a:buNone/>
-            </a:pPr>
-            <a:r>
-              <a:rPr lang="en-US" sz="1000" b="1" dirty="0">
+              <a:rPr lang="en-US" sz="1100" b="1" dirty="0">
                 <a:solidFill>
                   <a:srgbClr val="FFFFFF"/>
                 </a:solidFill>
@@ -50664,26 +51406,820 @@
                 <a:ea typeface="Inter" pitchFamily="34" charset="-122"/>
                 <a:cs typeface="Inter" pitchFamily="34" charset="-120"/>
               </a:rPr>
-              <a:t>10% randomized South holdout · weekly CJA council · gates pre-registered</a:t>
-            </a:r>
-            <a:endParaRPr lang="en-US" sz="1000" dirty="0"/>
-          </a:p>
-        </p:txBody>
-      </p:sp>
-      <p:sp>
-        <p:nvSpPr>
-          <p:cNvPr id="98" name="Shape 88"/>
-          <p:cNvSpPr/>
-          <p:nvPr/>
-        </p:nvSpPr>
-        <p:spPr>
-          <a:xfrm>
-            <a:off x="502920" y="5413248"/>
-            <a:ext cx="2057400" cy="457200"/>
+              <a:t>$14M retargeting line</a:t>
+            </a:r>
+            <a:endParaRPr lang="en-US" sz="1200" dirty="0"/>
+          </a:p>
+          <a:p>
+            <a:pPr indent="0" marL="0">
+              <a:buNone/>
+            </a:pPr>
+            <a:r>
+              <a:rPr lang="en-US" sz="900" dirty="0">
+                <a:solidFill>
+                  <a:srgbClr val="C7D7F5"/>
+                </a:solidFill>
+                <a:latin typeface="Inter" pitchFamily="34" charset="0"/>
+                <a:ea typeface="Inter" pitchFamily="34" charset="-122"/>
+                <a:cs typeface="Inter" pitchFamily="34" charset="-120"/>
+              </a:rPr>
+              <a:t>re-aimed, $0 incremental</a:t>
+            </a:r>
+            <a:endParaRPr lang="en-US" sz="1200" dirty="0"/>
+          </a:p>
+        </p:txBody>
+      </p:sp>
+      <p:sp>
+        <p:nvSpPr>
+          <p:cNvPr id="118" name="Shape 106"/>
+          <p:cNvSpPr/>
+          <p:nvPr/>
+        </p:nvSpPr>
+        <p:spPr>
+          <a:xfrm>
+            <a:off x="4389120" y="5568696"/>
+            <a:ext cx="274320" cy="128016"/>
           </a:xfrm>
           <a:prstGeom prst="roundRect">
             <a:avLst>
-              <a:gd name="adj" fmla="val 16000"/>
+              <a:gd name="adj" fmla="val 50000"/>
+            </a:avLst>
+          </a:prstGeom>
+          <a:solidFill>
+            <a:srgbClr val="0A1F44"/>
+          </a:solidFill>
+          <a:ln w="6350">
+            <a:solidFill>
+              <a:srgbClr val="0A1F44"/>
+            </a:solidFill>
+            <a:prstDash val="solid"/>
+          </a:ln>
+        </p:spPr>
+      </p:sp>
+      <p:sp>
+        <p:nvSpPr>
+          <p:cNvPr id="119" name="Text 107"/>
+          <p:cNvSpPr txBox="1"/>
+          <p:nvPr/>
+        </p:nvSpPr>
+        <p:spPr>
+          <a:xfrm>
+            <a:off x="4709160" y="5532120"/>
+            <a:ext cx="2103120" cy="201168"/>
+          </a:xfrm>
+          <a:prstGeom prst="rect">
+            <a:avLst/>
+          </a:prstGeom>
+          <a:noFill/>
+          <a:ln/>
+        </p:spPr>
+        <p:txBody>
+          <a:bodyPr wrap="square" lIns="0" tIns="0" rIns="0" bIns="0" rtlCol="0" anchor="ctr"/>
+          <a:lstStyle/>
+          <a:p>
+            <a:pPr indent="0" marL="0">
+              <a:buNone/>
+            </a:pPr>
+            <a:r>
+              <a:rPr lang="en-US" sz="800" dirty="0">
+                <a:solidFill>
+                  <a:srgbClr val="64748B"/>
+                </a:solidFill>
+                <a:latin typeface="Inter" pitchFamily="34" charset="0"/>
+                <a:ea typeface="Inter" pitchFamily="34" charset="-122"/>
+                <a:cs typeface="Inter" pitchFamily="34" charset="-120"/>
+              </a:rPr>
+              <a:t>in the 90-day pilot (★ flagship)</a:t>
+            </a:r>
+            <a:endParaRPr lang="en-US" sz="800" dirty="0"/>
+          </a:p>
+        </p:txBody>
+      </p:sp>
+      <p:sp>
+        <p:nvSpPr>
+          <p:cNvPr id="120" name="Shape 108"/>
+          <p:cNvSpPr/>
+          <p:nvPr/>
+        </p:nvSpPr>
+        <p:spPr>
+          <a:xfrm>
+            <a:off x="6766560" y="5568696"/>
+            <a:ext cx="274320" cy="128016"/>
+          </a:xfrm>
+          <a:prstGeom prst="roundRect">
+            <a:avLst>
+              <a:gd name="adj" fmla="val 50000"/>
+            </a:avLst>
+          </a:prstGeom>
+          <a:solidFill>
+            <a:srgbClr val="FFFFFF"/>
+          </a:solidFill>
+          <a:ln w="9525">
+            <a:solidFill>
+              <a:srgbClr val="94A3B8"/>
+            </a:solidFill>
+            <a:prstDash val="dash"/>
+          </a:ln>
+        </p:spPr>
+      </p:sp>
+      <p:sp>
+        <p:nvSpPr>
+          <p:cNvPr id="121" name="Text 109"/>
+          <p:cNvSpPr txBox="1"/>
+          <p:nvPr/>
+        </p:nvSpPr>
+        <p:spPr>
+          <a:xfrm>
+            <a:off x="7086600" y="5532120"/>
+            <a:ext cx="2286000" cy="201168"/>
+          </a:xfrm>
+          <a:prstGeom prst="rect">
+            <a:avLst/>
+          </a:prstGeom>
+          <a:noFill/>
+          <a:ln/>
+        </p:spPr>
+        <p:txBody>
+          <a:bodyPr wrap="square" lIns="0" tIns="0" rIns="0" bIns="0" rtlCol="0" anchor="ctr"/>
+          <a:lstStyle/>
+          <a:p>
+            <a:pPr indent="0" marL="0">
+              <a:buNone/>
+            </a:pPr>
+            <a:r>
+              <a:rPr lang="en-US" sz="800" dirty="0">
+                <a:solidFill>
+                  <a:srgbClr val="64748B"/>
+                </a:solidFill>
+                <a:latin typeface="Inter" pitchFamily="34" charset="0"/>
+                <a:ea typeface="Inter" pitchFamily="34" charset="-122"/>
+                <a:cs typeface="Inter" pitchFamily="34" charset="-120"/>
+              </a:rPr>
+              <a:t>after day 90, if the holdout passes</a:t>
+            </a:r>
+            <a:endParaRPr lang="en-US" sz="800" dirty="0"/>
+          </a:p>
+        </p:txBody>
+      </p:sp>
+      <p:sp>
+        <p:nvSpPr>
+          <p:cNvPr id="122" name="Text 110"/>
+          <p:cNvSpPr txBox="1"/>
+          <p:nvPr/>
+        </p:nvSpPr>
+        <p:spPr>
+          <a:xfrm>
+            <a:off x="9747504" y="5532120"/>
+            <a:ext cx="2011680" cy="201168"/>
+          </a:xfrm>
+          <a:prstGeom prst="rect">
+            <a:avLst/>
+          </a:prstGeom>
+          <a:noFill/>
+          <a:ln/>
+        </p:spPr>
+        <p:txBody>
+          <a:bodyPr wrap="square" lIns="0" tIns="0" rIns="0" bIns="0" rtlCol="0" anchor="ctr"/>
+          <a:lstStyle/>
+          <a:p>
+            <a:pPr algn="r" indent="0" marL="0">
+              <a:buNone/>
+            </a:pPr>
+            <a:r>
+              <a:rPr lang="en-US" sz="850" b="1" dirty="0">
+                <a:solidFill>
+                  <a:srgbClr val="0A1F44"/>
+                </a:solidFill>
+                <a:latin typeface="Inter" pitchFamily="34" charset="0"/>
+                <a:ea typeface="Inter" pitchFamily="34" charset="-122"/>
+                <a:cs typeface="Inter" pitchFamily="34" charset="-120"/>
+              </a:rPr>
+              <a:t>14 programs · 0 discounts</a:t>
+            </a:r>
+            <a:endParaRPr lang="en-US" sz="850" dirty="0"/>
+          </a:p>
+        </p:txBody>
+      </p:sp>
+      <p:sp>
+        <p:nvSpPr>
+          <p:cNvPr id="123" name="Text 111"/>
+          <p:cNvSpPr txBox="1"/>
+          <p:nvPr/>
+        </p:nvSpPr>
+        <p:spPr>
+          <a:xfrm>
+            <a:off x="502920" y="5751576"/>
+            <a:ext cx="1508760" cy="566928"/>
+          </a:xfrm>
+          <a:prstGeom prst="rect">
+            <a:avLst/>
+          </a:prstGeom>
+          <a:noFill/>
+          <a:ln/>
+        </p:spPr>
+        <p:txBody>
+          <a:bodyPr wrap="square" lIns="0" tIns="0" rIns="0" bIns="0" rtlCol="0" anchor="ctr"/>
+          <a:lstStyle/>
+          <a:p>
+            <a:pPr indent="0" marL="0">
+              <a:buNone/>
+            </a:pPr>
+            <a:r>
+              <a:rPr lang="en-US" sz="1100" b="1" dirty="0">
+                <a:solidFill>
+                  <a:srgbClr val="0A1F44"/>
+                </a:solidFill>
+                <a:latin typeface="Inter" pitchFamily="34" charset="0"/>
+                <a:ea typeface="Inter" pitchFamily="34" charset="-122"/>
+                <a:cs typeface="Inter" pitchFamily="34" charset="-120"/>
+              </a:rPr>
+              <a:t>The fixed $120M</a:t>
+            </a:r>
+            <a:endParaRPr lang="en-US" sz="1100" dirty="0"/>
+          </a:p>
+          <a:p>
+            <a:pPr indent="0" marL="0">
+              <a:buNone/>
+            </a:pPr>
+            <a:r>
+              <a:rPr lang="en-US" sz="850" dirty="0">
+                <a:solidFill>
+                  <a:srgbClr val="64748B"/>
+                </a:solidFill>
+                <a:latin typeface="Inter" pitchFamily="34" charset="0"/>
+                <a:ea typeface="Inter" pitchFamily="34" charset="-122"/>
+                <a:cs typeface="Inter" pitchFamily="34" charset="-120"/>
+              </a:rPr>
+              <a:t>$0 new money (Exhibit G)</a:t>
+            </a:r>
+            <a:endParaRPr lang="en-US" sz="1100" dirty="0"/>
+          </a:p>
+        </p:txBody>
+      </p:sp>
+      <p:sp>
+        <p:nvSpPr>
+          <p:cNvPr id="124" name="Shape 112"/>
+          <p:cNvSpPr/>
+          <p:nvPr/>
+        </p:nvSpPr>
+        <p:spPr>
+          <a:xfrm>
+            <a:off x="2057400" y="5788152"/>
+            <a:ext cx="3618738" cy="292608"/>
+          </a:xfrm>
+          <a:prstGeom prst="rect">
+            <a:avLst/>
+          </a:prstGeom>
+          <a:solidFill>
+            <a:srgbClr val="E2E8F0"/>
+          </a:solidFill>
+          <a:ln w="6350">
+            <a:solidFill>
+              <a:srgbClr val="E2E8F0"/>
+            </a:solidFill>
+            <a:prstDash val="solid"/>
+          </a:ln>
+        </p:spPr>
+      </p:sp>
+      <p:sp>
+        <p:nvSpPr>
+          <p:cNvPr id="125" name="Text 113"/>
+          <p:cNvSpPr txBox="1"/>
+          <p:nvPr/>
+        </p:nvSpPr>
+        <p:spPr>
+          <a:xfrm>
+            <a:off x="2084832" y="5788152"/>
+            <a:ext cx="3591306" cy="292608"/>
+          </a:xfrm>
+          <a:prstGeom prst="rect">
+            <a:avLst/>
+          </a:prstGeom>
+          <a:noFill/>
+          <a:ln/>
+        </p:spPr>
+        <p:txBody>
+          <a:bodyPr wrap="square" lIns="0" tIns="0" rIns="0" bIns="0" rtlCol="0" anchor="ctr">
+            <a:normAutofit/>
+          </a:bodyPr>
+          <a:lstStyle/>
+          <a:p>
+            <a:pPr indent="0" marL="0">
+              <a:buNone/>
+            </a:pPr>
+            <a:r>
+              <a:rPr lang="en-US" sz="800" b="1" dirty="0">
+                <a:solidFill>
+                  <a:srgbClr val="334155"/>
+                </a:solidFill>
+                <a:latin typeface="Inter" pitchFamily="34" charset="0"/>
+                <a:ea typeface="Inter" pitchFamily="34" charset="-122"/>
+                <a:cs typeface="Inter" pitchFamily="34" charset="-120"/>
+              </a:rPr>
+              <a:t>Prospecting $58M</a:t>
+            </a:r>
+            <a:endParaRPr lang="en-US" sz="800" dirty="0"/>
+          </a:p>
+        </p:txBody>
+      </p:sp>
+      <p:sp>
+        <p:nvSpPr>
+          <p:cNvPr id="126" name="Text 114"/>
+          <p:cNvSpPr txBox="1"/>
+          <p:nvPr/>
+        </p:nvSpPr>
+        <p:spPr>
+          <a:xfrm>
+            <a:off x="2057400" y="6089904"/>
+            <a:ext cx="3646170" cy="182880"/>
+          </a:xfrm>
+          <a:prstGeom prst="rect">
+            <a:avLst/>
+          </a:prstGeom>
+          <a:noFill/>
+          <a:ln/>
+        </p:spPr>
+        <p:txBody>
+          <a:bodyPr wrap="square" lIns="0" tIns="0" rIns="0" bIns="0" rtlCol="0" anchor="t"/>
+          <a:lstStyle/>
+          <a:p>
+            <a:pPr algn="l" indent="0" marL="0">
+              <a:buNone/>
+            </a:pPr>
+            <a:r>
+              <a:rPr lang="en-US" sz="750" dirty="0">
+                <a:solidFill>
+                  <a:srgbClr val="64748B"/>
+                </a:solidFill>
+                <a:latin typeface="Inter" pitchFamily="34" charset="0"/>
+                <a:ea typeface="Inter" pitchFamily="34" charset="-122"/>
+                <a:cs typeface="Inter" pitchFamily="34" charset="-120"/>
+              </a:rPr>
+              <a:t>unchanged</a:t>
+            </a:r>
+            <a:endParaRPr lang="en-US" sz="750" dirty="0"/>
+          </a:p>
+        </p:txBody>
+      </p:sp>
+      <p:sp>
+        <p:nvSpPr>
+          <p:cNvPr id="127" name="Shape 115"/>
+          <p:cNvSpPr/>
+          <p:nvPr/>
+        </p:nvSpPr>
+        <p:spPr>
+          <a:xfrm>
+            <a:off x="5703570" y="5788152"/>
+            <a:ext cx="1355598" cy="292608"/>
+          </a:xfrm>
+          <a:prstGeom prst="rect">
+            <a:avLst/>
+          </a:prstGeom>
+          <a:solidFill>
+            <a:srgbClr val="E2E8F0"/>
+          </a:solidFill>
+          <a:ln w="6350">
+            <a:solidFill>
+              <a:srgbClr val="E2E8F0"/>
+            </a:solidFill>
+            <a:prstDash val="solid"/>
+          </a:ln>
+        </p:spPr>
+      </p:sp>
+      <p:sp>
+        <p:nvSpPr>
+          <p:cNvPr id="128" name="Text 116"/>
+          <p:cNvSpPr txBox="1"/>
+          <p:nvPr/>
+        </p:nvSpPr>
+        <p:spPr>
+          <a:xfrm>
+            <a:off x="5731002" y="5788152"/>
+            <a:ext cx="1328166" cy="292608"/>
+          </a:xfrm>
+          <a:prstGeom prst="rect">
+            <a:avLst/>
+          </a:prstGeom>
+          <a:noFill/>
+          <a:ln/>
+        </p:spPr>
+        <p:txBody>
+          <a:bodyPr wrap="square" lIns="0" tIns="0" rIns="0" bIns="0" rtlCol="0" anchor="ctr">
+            <a:normAutofit/>
+          </a:bodyPr>
+          <a:lstStyle/>
+          <a:p>
+            <a:pPr indent="0" marL="0">
+              <a:buNone/>
+            </a:pPr>
+            <a:r>
+              <a:rPr lang="en-US" sz="800" b="1" dirty="0">
+                <a:solidFill>
+                  <a:srgbClr val="334155"/>
+                </a:solidFill>
+                <a:latin typeface="Inter" pitchFamily="34" charset="0"/>
+                <a:ea typeface="Inter" pitchFamily="34" charset="-122"/>
+                <a:cs typeface="Inter" pitchFamily="34" charset="-120"/>
+              </a:rPr>
+              <a:t>Search $22M</a:t>
+            </a:r>
+            <a:endParaRPr lang="en-US" sz="800" dirty="0"/>
+          </a:p>
+        </p:txBody>
+      </p:sp>
+      <p:sp>
+        <p:nvSpPr>
+          <p:cNvPr id="129" name="Text 117"/>
+          <p:cNvSpPr txBox="1"/>
+          <p:nvPr/>
+        </p:nvSpPr>
+        <p:spPr>
+          <a:xfrm>
+            <a:off x="5703570" y="6089904"/>
+            <a:ext cx="1383030" cy="182880"/>
+          </a:xfrm>
+          <a:prstGeom prst="rect">
+            <a:avLst/>
+          </a:prstGeom>
+          <a:noFill/>
+          <a:ln/>
+        </p:spPr>
+        <p:txBody>
+          <a:bodyPr wrap="square" lIns="0" tIns="0" rIns="0" bIns="0" rtlCol="0" anchor="t"/>
+          <a:lstStyle/>
+          <a:p>
+            <a:pPr algn="l" indent="0" marL="0">
+              <a:buNone/>
+            </a:pPr>
+            <a:r>
+              <a:rPr lang="en-US" sz="750" dirty="0">
+                <a:solidFill>
+                  <a:srgbClr val="64748B"/>
+                </a:solidFill>
+                <a:latin typeface="Inter" pitchFamily="34" charset="0"/>
+                <a:ea typeface="Inter" pitchFamily="34" charset="-122"/>
+                <a:cs typeface="Inter" pitchFamily="34" charset="-120"/>
+              </a:rPr>
+              <a:t>unchanged</a:t>
+            </a:r>
+            <a:endParaRPr lang="en-US" sz="750" dirty="0"/>
+          </a:p>
+        </p:txBody>
+      </p:sp>
+      <p:sp>
+        <p:nvSpPr>
+          <p:cNvPr id="130" name="Shape 118"/>
+          <p:cNvSpPr/>
+          <p:nvPr/>
+        </p:nvSpPr>
+        <p:spPr>
+          <a:xfrm>
+            <a:off x="7086600" y="5788152"/>
+            <a:ext cx="978408" cy="292608"/>
+          </a:xfrm>
+          <a:prstGeom prst="rect">
+            <a:avLst/>
+          </a:prstGeom>
+          <a:solidFill>
+            <a:srgbClr val="CBD5E1"/>
+          </a:solidFill>
+          <a:ln w="6350">
+            <a:solidFill>
+              <a:srgbClr val="CBD5E1"/>
+            </a:solidFill>
+            <a:prstDash val="solid"/>
+          </a:ln>
+        </p:spPr>
+      </p:sp>
+      <p:sp>
+        <p:nvSpPr>
+          <p:cNvPr id="131" name="Text 119"/>
+          <p:cNvSpPr txBox="1"/>
+          <p:nvPr/>
+        </p:nvSpPr>
+        <p:spPr>
+          <a:xfrm>
+            <a:off x="7114032" y="5788152"/>
+            <a:ext cx="950976" cy="292608"/>
+          </a:xfrm>
+          <a:prstGeom prst="rect">
+            <a:avLst/>
+          </a:prstGeom>
+          <a:noFill/>
+          <a:ln/>
+        </p:spPr>
+        <p:txBody>
+          <a:bodyPr wrap="square" lIns="0" tIns="0" rIns="0" bIns="0" rtlCol="0" anchor="ctr">
+            <a:normAutofit/>
+          </a:bodyPr>
+          <a:lstStyle/>
+          <a:p>
+            <a:pPr indent="0" marL="0">
+              <a:buNone/>
+            </a:pPr>
+            <a:r>
+              <a:rPr lang="en-US" sz="800" b="1" dirty="0">
+                <a:solidFill>
+                  <a:srgbClr val="0A1F44"/>
+                </a:solidFill>
+                <a:latin typeface="Inter" pitchFamily="34" charset="0"/>
+                <a:ea typeface="Inter" pitchFamily="34" charset="-122"/>
+                <a:cs typeface="Inter" pitchFamily="34" charset="-120"/>
+              </a:rPr>
+              <a:t>Influencer $16M</a:t>
+            </a:r>
+            <a:endParaRPr lang="en-US" sz="800" dirty="0"/>
+          </a:p>
+        </p:txBody>
+      </p:sp>
+      <p:sp>
+        <p:nvSpPr>
+          <p:cNvPr id="132" name="Text 120"/>
+          <p:cNvSpPr txBox="1"/>
+          <p:nvPr/>
+        </p:nvSpPr>
+        <p:spPr>
+          <a:xfrm>
+            <a:off x="7086600" y="6089904"/>
+            <a:ext cx="1188720" cy="182880"/>
+          </a:xfrm>
+          <a:prstGeom prst="rect">
+            <a:avLst/>
+          </a:prstGeom>
+          <a:noFill/>
+          <a:ln/>
+        </p:spPr>
+        <p:txBody>
+          <a:bodyPr wrap="square" lIns="0" tIns="0" rIns="0" bIns="0" rtlCol="0" anchor="t"/>
+          <a:lstStyle/>
+          <a:p>
+            <a:pPr algn="l" indent="0" marL="0">
+              <a:buNone/>
+            </a:pPr>
+            <a:r>
+              <a:rPr lang="en-US" sz="750" dirty="0">
+                <a:solidFill>
+                  <a:srgbClr val="64748B"/>
+                </a:solidFill>
+                <a:latin typeface="Inter" pitchFamily="34" charset="0"/>
+                <a:ea typeface="Inter" pitchFamily="34" charset="-122"/>
+                <a:cs typeface="Inter" pitchFamily="34" charset="-120"/>
+              </a:rPr>
+              <a:t>briefs → proof</a:t>
+            </a:r>
+            <a:endParaRPr lang="en-US" sz="750" dirty="0"/>
+          </a:p>
+        </p:txBody>
+      </p:sp>
+      <p:sp>
+        <p:nvSpPr>
+          <p:cNvPr id="133" name="Shape 121"/>
+          <p:cNvSpPr/>
+          <p:nvPr/>
+        </p:nvSpPr>
+        <p:spPr>
+          <a:xfrm>
+            <a:off x="8092440" y="5788152"/>
+            <a:ext cx="852678" cy="292608"/>
+          </a:xfrm>
+          <a:prstGeom prst="rect">
+            <a:avLst/>
+          </a:prstGeom>
+          <a:solidFill>
+            <a:srgbClr val="1D4ED8"/>
+          </a:solidFill>
+          <a:ln w="6350">
+            <a:solidFill>
+              <a:srgbClr val="1D4ED8"/>
+            </a:solidFill>
+            <a:prstDash val="solid"/>
+          </a:ln>
+        </p:spPr>
+      </p:sp>
+      <p:sp>
+        <p:nvSpPr>
+          <p:cNvPr id="134" name="Text 122"/>
+          <p:cNvSpPr txBox="1"/>
+          <p:nvPr/>
+        </p:nvSpPr>
+        <p:spPr>
+          <a:xfrm>
+            <a:off x="8119872" y="5788152"/>
+            <a:ext cx="825246" cy="292608"/>
+          </a:xfrm>
+          <a:prstGeom prst="rect">
+            <a:avLst/>
+          </a:prstGeom>
+          <a:noFill/>
+          <a:ln/>
+        </p:spPr>
+        <p:txBody>
+          <a:bodyPr wrap="square" lIns="0" tIns="0" rIns="0" bIns="0" rtlCol="0" anchor="ctr">
+            <a:normAutofit/>
+          </a:bodyPr>
+          <a:lstStyle/>
+          <a:p>
+            <a:pPr indent="0" marL="0">
+              <a:buNone/>
+            </a:pPr>
+            <a:r>
+              <a:rPr lang="en-US" sz="800" b="1" dirty="0">
+                <a:solidFill>
+                  <a:srgbClr val="FFFFFF"/>
+                </a:solidFill>
+                <a:latin typeface="Inter" pitchFamily="34" charset="0"/>
+                <a:ea typeface="Inter" pitchFamily="34" charset="-122"/>
+                <a:cs typeface="Inter" pitchFamily="34" charset="-120"/>
+              </a:rPr>
+              <a:t>Retarg. $14M</a:t>
+            </a:r>
+            <a:endParaRPr lang="en-US" sz="800" dirty="0"/>
+          </a:p>
+        </p:txBody>
+      </p:sp>
+      <p:sp>
+        <p:nvSpPr>
+          <p:cNvPr id="135" name="Text 123"/>
+          <p:cNvSpPr txBox="1"/>
+          <p:nvPr/>
+        </p:nvSpPr>
+        <p:spPr>
+          <a:xfrm>
+            <a:off x="8092440" y="6089904"/>
+            <a:ext cx="1188720" cy="182880"/>
+          </a:xfrm>
+          <a:prstGeom prst="rect">
+            <a:avLst/>
+          </a:prstGeom>
+          <a:noFill/>
+          <a:ln/>
+        </p:spPr>
+        <p:txBody>
+          <a:bodyPr wrap="square" lIns="0" tIns="0" rIns="0" bIns="0" rtlCol="0" anchor="t"/>
+          <a:lstStyle/>
+          <a:p>
+            <a:pPr algn="l" indent="0" marL="0">
+              <a:buNone/>
+            </a:pPr>
+            <a:r>
+              <a:rPr lang="en-US" sz="750" b="1" dirty="0">
+                <a:solidFill>
+                  <a:srgbClr val="1D4ED8"/>
+                </a:solidFill>
+                <a:latin typeface="Inter" pitchFamily="34" charset="0"/>
+                <a:ea typeface="Inter" pitchFamily="34" charset="-122"/>
+                <a:cs typeface="Inter" pitchFamily="34" charset="-120"/>
+              </a:rPr>
+              <a:t>lever 3</a:t>
+            </a:r>
+            <a:endParaRPr lang="en-US" sz="750" dirty="0"/>
+          </a:p>
+        </p:txBody>
+      </p:sp>
+      <p:sp>
+        <p:nvSpPr>
+          <p:cNvPr id="136" name="Shape 124"/>
+          <p:cNvSpPr/>
+          <p:nvPr/>
+        </p:nvSpPr>
+        <p:spPr>
+          <a:xfrm>
+            <a:off x="8972550" y="5788152"/>
+            <a:ext cx="349758" cy="292608"/>
+          </a:xfrm>
+          <a:prstGeom prst="rect">
+            <a:avLst/>
+          </a:prstGeom>
+          <a:solidFill>
+            <a:srgbClr val="0A1F44"/>
+          </a:solidFill>
+          <a:ln w="6350">
+            <a:solidFill>
+              <a:srgbClr val="0A1F44"/>
+            </a:solidFill>
+            <a:prstDash val="solid"/>
+          </a:ln>
+        </p:spPr>
+      </p:sp>
+      <p:sp>
+        <p:nvSpPr>
+          <p:cNvPr id="137" name="Text 125"/>
+          <p:cNvSpPr txBox="1"/>
+          <p:nvPr/>
+        </p:nvSpPr>
+        <p:spPr>
+          <a:xfrm>
+            <a:off x="8999982" y="5788152"/>
+            <a:ext cx="322326" cy="292608"/>
+          </a:xfrm>
+          <a:prstGeom prst="rect">
+            <a:avLst/>
+          </a:prstGeom>
+          <a:noFill/>
+          <a:ln/>
+        </p:spPr>
+        <p:txBody>
+          <a:bodyPr wrap="square" lIns="0" tIns="0" rIns="0" bIns="0" rtlCol="0" anchor="ctr">
+            <a:normAutofit/>
+          </a:bodyPr>
+          <a:lstStyle/>
+          <a:p>
+            <a:pPr indent="0" marL="0">
+              <a:buNone/>
+            </a:pPr>
+            <a:r>
+              <a:rPr lang="en-US" sz="650" b="1" dirty="0">
+                <a:solidFill>
+                  <a:srgbClr val="FFFFFF"/>
+                </a:solidFill>
+                <a:latin typeface="Inter" pitchFamily="34" charset="0"/>
+                <a:ea typeface="Inter" pitchFamily="34" charset="-122"/>
+                <a:cs typeface="Inter" pitchFamily="34" charset="-120"/>
+              </a:rPr>
+              <a:t>Owned $6M</a:t>
+            </a:r>
+            <a:endParaRPr lang="en-US" sz="650" dirty="0"/>
+          </a:p>
+        </p:txBody>
+      </p:sp>
+      <p:sp>
+        <p:nvSpPr>
+          <p:cNvPr id="138" name="Text 126"/>
+          <p:cNvSpPr txBox="1"/>
+          <p:nvPr/>
+        </p:nvSpPr>
+        <p:spPr>
+          <a:xfrm>
+            <a:off x="8618220" y="6089904"/>
+            <a:ext cx="731520" cy="182880"/>
+          </a:xfrm>
+          <a:prstGeom prst="rect">
+            <a:avLst/>
+          </a:prstGeom>
+          <a:noFill/>
+          <a:ln/>
+        </p:spPr>
+        <p:txBody>
+          <a:bodyPr wrap="square" lIns="0" tIns="0" rIns="0" bIns="0" rtlCol="0" anchor="t"/>
+          <a:lstStyle/>
+          <a:p>
+            <a:pPr algn="r" indent="0" marL="0">
+              <a:buNone/>
+            </a:pPr>
+            <a:r>
+              <a:rPr lang="en-US" sz="750" b="1" dirty="0">
+                <a:solidFill>
+                  <a:srgbClr val="1D4ED8"/>
+                </a:solidFill>
+                <a:latin typeface="Inter" pitchFamily="34" charset="0"/>
+                <a:ea typeface="Inter" pitchFamily="34" charset="-122"/>
+                <a:cs typeface="Inter" pitchFamily="34" charset="-120"/>
+              </a:rPr>
+              <a:t>levers 1–2</a:t>
+            </a:r>
+            <a:endParaRPr lang="en-US" sz="750" dirty="0"/>
+          </a:p>
+        </p:txBody>
+      </p:sp>
+      <p:sp>
+        <p:nvSpPr>
+          <p:cNvPr id="139" name="Shape 127"/>
+          <p:cNvSpPr/>
+          <p:nvPr/>
+        </p:nvSpPr>
+        <p:spPr>
+          <a:xfrm>
+            <a:off x="9349740" y="5788152"/>
+            <a:ext cx="224028" cy="292608"/>
+          </a:xfrm>
+          <a:prstGeom prst="rect">
+            <a:avLst/>
+          </a:prstGeom>
+          <a:solidFill>
+            <a:srgbClr val="F1F5F9"/>
+          </a:solidFill>
+          <a:ln w="6350">
+            <a:solidFill>
+              <a:srgbClr val="F1F5F9"/>
+            </a:solidFill>
+            <a:prstDash val="solid"/>
+          </a:ln>
+        </p:spPr>
+      </p:sp>
+      <p:sp>
+        <p:nvSpPr>
+          <p:cNvPr id="140" name="Shape 128"/>
+          <p:cNvSpPr/>
+          <p:nvPr/>
+        </p:nvSpPr>
+        <p:spPr>
+          <a:xfrm>
+            <a:off x="9747504" y="5751576"/>
+            <a:ext cx="1938528" cy="548640"/>
+          </a:xfrm>
+          <a:prstGeom prst="roundRect">
+            <a:avLst>
+              <a:gd name="adj" fmla="val 10000"/>
             </a:avLst>
           </a:prstGeom>
           <a:solidFill>
@@ -50699,14 +52235,14 @@
       </p:sp>
       <p:sp>
         <p:nvSpPr>
-          <p:cNvPr id="99" name="Text 89"/>
-          <p:cNvSpPr txBox="1"/>
-          <p:nvPr/>
-        </p:nvSpPr>
-        <p:spPr>
-          <a:xfrm>
-            <a:off x="630936" y="5413248"/>
-            <a:ext cx="1874520" cy="457200"/>
+          <p:cNvPr id="141" name="Text 129"/>
+          <p:cNvSpPr txBox="1"/>
+          <p:nvPr/>
+        </p:nvSpPr>
+        <p:spPr>
+          <a:xfrm>
+            <a:off x="9838944" y="5751576"/>
+            <a:ext cx="1801368" cy="548640"/>
           </a:xfrm>
           <a:prstGeom prst="rect">
             <a:avLst/>
@@ -50722,21 +52258,7 @@
               <a:buNone/>
             </a:pPr>
             <a:r>
-              <a:rPr lang="en-US" sz="1400" b="1" dirty="0">
-                <a:solidFill>
-                  <a:srgbClr val="1D4ED8"/>
-                </a:solidFill>
-                <a:latin typeface="Inter" pitchFamily="34" charset="0"/>
-                <a:ea typeface="Inter" pitchFamily="34" charset="-122"/>
-                <a:cs typeface="Inter" pitchFamily="34" charset="-120"/>
-              </a:rPr>
-              <a:t>$0 </a:t>
-            </a:r>
-            <a:pPr indent="0" marL="0">
-              <a:buNone/>
-            </a:pPr>
-            <a:r>
-              <a:rPr lang="en-US" sz="1000" b="1" dirty="0">
+              <a:rPr lang="en-US" sz="850" b="1" dirty="0">
                 <a:solidFill>
                   <a:srgbClr val="0A1F44"/>
                 </a:solidFill>
@@ -50744,73 +52266,21 @@
                 <a:ea typeface="Inter" pitchFamily="34" charset="-122"/>
                 <a:cs typeface="Inter" pitchFamily="34" charset="-120"/>
               </a:rPr>
-              <a:t>new budget</a:t>
-            </a:r>
-            <a:endParaRPr lang="en-US" sz="1000" dirty="0"/>
-          </a:p>
-        </p:txBody>
-      </p:sp>
-      <p:sp>
-        <p:nvSpPr>
-          <p:cNvPr id="100" name="Shape 90"/>
-          <p:cNvSpPr/>
-          <p:nvPr/>
-        </p:nvSpPr>
-        <p:spPr>
-          <a:xfrm>
-            <a:off x="9802368" y="5413248"/>
-            <a:ext cx="1883664" cy="457200"/>
-          </a:xfrm>
-          <a:prstGeom prst="roundRect">
-            <a:avLst>
-              <a:gd name="adj" fmla="val 16000"/>
-            </a:avLst>
-          </a:prstGeom>
-          <a:solidFill>
-            <a:srgbClr val="EFF6FF"/>
-          </a:solidFill>
-          <a:ln w="6350">
-            <a:solidFill>
-              <a:srgbClr val="EFF6FF"/>
-            </a:solidFill>
-            <a:prstDash val="solid"/>
-          </a:ln>
-        </p:spPr>
-      </p:sp>
-      <p:sp>
-        <p:nvSpPr>
-          <p:cNvPr id="101" name="Text 91"/>
-          <p:cNvSpPr txBox="1"/>
-          <p:nvPr/>
-        </p:nvSpPr>
-        <p:spPr>
-          <a:xfrm>
-            <a:off x="9893808" y="5413248"/>
-            <a:ext cx="1746504" cy="457200"/>
-          </a:xfrm>
-          <a:prstGeom prst="rect">
-            <a:avLst/>
-          </a:prstGeom>
-          <a:noFill/>
-          <a:ln/>
-        </p:spPr>
-        <p:txBody>
-          <a:bodyPr wrap="square" lIns="0" tIns="0" rIns="0" bIns="0" rtlCol="0" anchor="ctr"/>
-          <a:lstStyle/>
-          <a:p>
+              <a:t>Day 90: </a:t>
+            </a:r>
             <a:pPr indent="0" marL="0">
               <a:buNone/>
             </a:pPr>
             <a:r>
               <a:rPr lang="en-US" sz="850" dirty="0">
                 <a:solidFill>
-                  <a:srgbClr val="0A1F44"/>
-                </a:solidFill>
-                <a:latin typeface="Inter" pitchFamily="34" charset="0"/>
-                <a:ea typeface="Inter" pitchFamily="34" charset="-122"/>
-                <a:cs typeface="Inter" pitchFamily="34" charset="-120"/>
-              </a:rPr>
-              <a:t>Then: build months 3–9, scale 9–18 (appendix)</a:t>
+                  <a:srgbClr val="0F172A"/>
+                </a:solidFill>
+                <a:latin typeface="Inter" pitchFamily="34" charset="0"/>
+                <a:ea typeface="Inter" pitchFamily="34" charset="-122"/>
+                <a:cs typeface="Inter" pitchFamily="34" charset="-120"/>
+              </a:rPr>
+              <a:t>scale, adjust or stop; any move across lines is sized by the holdout</a:t>
             </a:r>
             <a:endParaRPr lang="en-US" sz="850" dirty="0"/>
           </a:p>

--- a/deck/Team G27.pptx
+++ b/deck/Team G27.pptx
@@ -2640,7 +2640,7 @@
           <a:p>
             <a:r>
               <a:rPr lang="en-US" dirty="0"/>
-              <a:t>The 90-day pilot, lever by lever. Lever 1, capture every buyer, runs on SMS at checkout, app order tracking and email reminders: we split consent, build the abandoner segment in CJA and print Passport cards, then launch and measure cart recovery and opt-ins. Lever 2, the golden month, runs on shipping events fed into CJA and Journey Optimizer, sending a care guide at delivery and a second category by day 21; we measure 30-day repeat. Both are paid from Option A's $2 to 3M inside the existing $6M owned line. Lever 3, never pay twice, turns CJA audiences into daily suppression lists through Real-Time CDP for Meta, Google and TikTok, inside the $14M retargeting line at no extra cost. Seven of the 14 programs start in the pilot; the other seven wait for the holdout. Prospecting and search stay untouched; influencer briefs shift to proof. On day 90 we scale, adjust or stop, and any move across budget lines is sized by the holdout.</a:t>
+              <a:t>The 90-day pilot, lever by lever. Lever 1, capture every buyer, runs on SMS at checkout, app order tracking and email reminders: we split consent, build the abandoner segment in CJA and print Passport cards, then launch and measure cart recovery and opt-ins. Lever 2, the golden month, runs on shipping events fed into CJA and Journey Optimizer, sending a care guide at delivery and a second category by day 21; we measure 30-day repeat. Both are paid from Option A's $2 to 3M inside the existing $6M owned line. Lever 3, never pay twice, turns CJA audiences into daily suppression lists through Real-Time CDP for Meta, Google and TikTok, inside the $14M retargeting line at no extra cost. Seven of the 14 programs start in the pilot; the other seven wait for the holdout. Then the money moves from rented to owned in three gated steps. After day 90, retargeting spend on buyers Quince can already reach moves to owned: up to $3.4 million, which is 24.5% of the $14 million line. In months 4 to 6, a South geo test on branded search, about $6.2 million of the $22 million line; in months 7 to 9, a South test on prospecting, about $16.2 million of the $58 million line. Each step moves only what its holdout proves, so the money follows the evidence.</a:t>
             </a:r>
             <a:endParaRPr lang="en-US" dirty="0"/>
           </a:p>
@@ -19987,7 +19987,7 @@
                 <a:ea typeface="Inter" pitchFamily="34" charset="-122"/>
                 <a:cs typeface="Inter" pitchFamily="34" charset="-120"/>
               </a:rPr>
-              <a:t>No new money</a:t>
+              <a:t>No new money: rented → owned</a:t>
             </a:r>
             <a:endParaRPr lang="en-US" sz="1100" dirty="0"/>
           </a:p>
@@ -20082,13 +20082,13 @@
             <a:r>
               <a:rPr lang="en-US" sz="1050" b="1" dirty="0">
                 <a:solidFill>
-                  <a:srgbClr val="0F172A"/>
-                </a:solidFill>
-                <a:latin typeface="Inter" pitchFamily="34" charset="0"/>
-                <a:ea typeface="Inter" pitchFamily="34" charset="-122"/>
-                <a:cs typeface="Inter" pitchFamily="34" charset="-120"/>
-              </a:rPr>
-              <a:t>Nothing else moves without a holdout</a:t>
+                  <a:srgbClr val="0A1F44"/>
+                </a:solidFill>
+                <a:latin typeface="Inter" pitchFamily="34" charset="0"/>
+                <a:ea typeface="Inter" pitchFamily="34" charset="-122"/>
+                <a:cs typeface="Inter" pitchFamily="34" charset="-120"/>
+              </a:rPr>
+              <a:t>Then retargeting → search → prospecting move to owned, as holdouts prove</a:t>
             </a:r>
             <a:endParaRPr lang="en-US" sz="1050" dirty="0"/>
           </a:p>
@@ -22334,7 +22334,7 @@
                 <a:ea typeface="Inter" pitchFamily="34" charset="-122"/>
                 <a:cs typeface="Inter" pitchFamily="34" charset="-120"/>
               </a:rPr>
-              <a:t>How the fixed $120M moves: rules, not guesses</a:t>
+              <a:t>How the fixed $120M moves from rented to owned</a:t>
             </a:r>
             <a:endParaRPr lang="en-US" sz="2400" dirty="0"/>
           </a:p>
@@ -22486,7 +22486,7 @@
                 <a:ea typeface="Inter" pitchFamily="34" charset="-122"/>
                 <a:cs typeface="Inter" pitchFamily="34" charset="-120"/>
               </a:rPr>
-              <a:t>Source: case Exhibits G (budget), I (cost by option), D (channel CAC); Adobe CJA A3b, A2 and Attribution IQ. No cross-line amount is set in advance: a CJA holdout result sets it.</a:t>
+              <a:t>Source: case Exhibits G (budget), I (cost by option), D (channel CAC), N (regions); Adobe CJA A3b, A2 and Attribution IQ. South test sizes assume spend follows the customer split (South 28%); final amounts are what each holdout proves.</a:t>
             </a:r>
             <a:endParaRPr lang="en-US" sz="800" dirty="0"/>
           </a:p>
@@ -22850,7 +22850,7 @@
                 <a:ea typeface="Inter" pitchFamily="34" charset="-122"/>
                 <a:cs typeface="Inter" pitchFamily="34" charset="-120"/>
               </a:rPr>
-              <a:t>Budget unchanged; existing buyers excluded; lookalikes seeded on repeat buyers</a:t>
+              <a:t>Months 7–9: South test on ~$16.2M; existing buyers excluded, lookalikes on repeaters</a:t>
             </a:r>
             <a:endParaRPr lang="en-US" sz="900" dirty="0"/>
           </a:p>
@@ -22889,7 +22889,7 @@
                 <a:ea typeface="Inter" pitchFamily="34" charset="-122"/>
                 <a:cs typeface="Inter" pitchFamily="34" charset="-120"/>
               </a:rPr>
-              <a:t>Brings 45.5% of buyers (CJA A3b)</a:t>
+              <a:t>Brings 45.5% of buyers (A3b) but its buyers repeat least, 18% (Exhibit D)</a:t>
             </a:r>
             <a:endParaRPr lang="en-US" sz="900" dirty="0"/>
           </a:p>
@@ -22928,7 +22928,7 @@
                 <a:ea typeface="Inter" pitchFamily="34" charset="-122"/>
                 <a:cs typeface="Inter" pitchFamily="34" charset="-120"/>
               </a:rPr>
-              <a:t>Moves only if Attribution IQ and a holdout show it is over-credited</a:t>
+              <a:t>Moves to owned only what the holdout shows is over-credited</a:t>
             </a:r>
             <a:endParaRPr lang="en-US" sz="900" dirty="0"/>
           </a:p>
@@ -23097,7 +23097,7 @@
                 <a:ea typeface="Inter" pitchFamily="34" charset="-122"/>
                 <a:cs typeface="Inter" pitchFamily="34" charset="-120"/>
               </a:rPr>
-              <a:t>Unchanged in the pilot</a:t>
+              <a:t>Months 4–6: South geo test on ~$6.2M of branded terms</a:t>
             </a:r>
             <a:endParaRPr lang="en-US" sz="900" dirty="0"/>
           </a:p>
@@ -23175,7 +23175,7 @@
                 <a:ea typeface="Inter" pitchFamily="34" charset="-122"/>
                 <a:cs typeface="Inter" pitchFamily="34" charset="-120"/>
               </a:rPr>
-              <a:t>Geo holdout on branded terms before any move</a:t>
+              <a:t>Non-incremental branded spend moves to owned</a:t>
             </a:r>
             <a:endParaRPr lang="en-US" sz="900" dirty="0"/>
           </a:p>
@@ -23669,7 +23669,7 @@
                 <a:ea typeface="Inter" pitchFamily="34" charset="-122"/>
                 <a:cs typeface="Inter" pitchFamily="34" charset="-120"/>
               </a:rPr>
-              <a:t>$0 incremental (Exhibit I); savings stay in the line until the holdout reads</a:t>
+              <a:t>After day 90: up to $3.4M (24.5% × $14M) moves to owned, as the holdout proves</a:t>
             </a:r>
             <a:endParaRPr lang="en-US" sz="900" dirty="0"/>
           </a:p>
@@ -23916,7 +23916,7 @@
                 <a:ea typeface="Inter" pitchFamily="34" charset="-122"/>
                 <a:cs typeface="Inter" pitchFamily="34" charset="-120"/>
               </a:rPr>
-              <a:t>Funded inside the existing line (Exhibit I)</a:t>
+              <a:t>Receives every proven tranche</a:t>
             </a:r>
             <a:endParaRPr lang="en-US" sz="900" dirty="0"/>
           </a:p>
@@ -24278,7 +24278,7 @@
                 <a:ea typeface="Inter" pitchFamily="34" charset="-122"/>
                 <a:cs typeface="Inter" pitchFamily="34" charset="-120"/>
               </a:rPr>
-              <a:t>Net change: $0. Money crosses lines only when a CJA holdout proves it, and the holdout sets the amount</a:t>
+              <a:t>Net change: $0. Money leaves rented lines in three steps, each sized by what its holdout proves</a:t>
             </a:r>
             <a:endParaRPr lang="en-US" sz="1300" dirty="0"/>
           </a:p>
@@ -35154,7 +35154,7 @@
                 <a:ea typeface="Inter" pitchFamily="34" charset="-122"/>
                 <a:cs typeface="Inter" pitchFamily="34" charset="-120"/>
               </a:rPr>
-              <a:t>Gate pass = minimum effect pre-registered by Analytics; no reallocation amount assumed</a:t>
+              <a:t>$3.4M = 24.5% × $14M; South tests 28% (Exh. N) × $22M = ~$6.2M, × $58M = ~$16.2M</a:t>
             </a:r>
             <a:endParaRPr lang="en-US" sz="850" dirty="0"/>
           </a:p>
@@ -47823,7 +47823,7 @@
                 <a:ea typeface="Inter" pitchFamily="34" charset="-122"/>
                 <a:cs typeface="Inter" pitchFamily="34" charset="-120"/>
               </a:rPr>
-              <a:t>Source: case Exhibits G (budget), I (cost by option), N (regions); Adobe CJA A1, A2, A3b, A6, Cohort Table. Pilot design, timing and program sequencing are the team's. 10% randomized South holdout throughout.</a:t>
+              <a:t>Source: case Exhibits G (budget), I (cost by option), N (regions); Adobe CJA A1, A2, A3b, A6, Cohort Table. Pilot design and sequencing are the team's. South test sizes assume spend follows the customer split (South 28%, Exhibit N). 10% randomized South holdout throughout.</a:t>
             </a:r>
             <a:endParaRPr lang="en-US" sz="800" dirty="0"/>
           </a:p>
@@ -51602,493 +51602,19 @@
       </p:sp>
       <p:sp>
         <p:nvSpPr>
-          <p:cNvPr id="123" name="Text 111"/>
-          <p:cNvSpPr txBox="1"/>
-          <p:nvPr/>
-        </p:nvSpPr>
-        <p:spPr>
-          <a:xfrm>
-            <a:off x="502920" y="5751576"/>
-            <a:ext cx="1508760" cy="566928"/>
-          </a:xfrm>
-          <a:prstGeom prst="rect">
-            <a:avLst/>
-          </a:prstGeom>
-          <a:noFill/>
-          <a:ln/>
-        </p:spPr>
-        <p:txBody>
-          <a:bodyPr wrap="square" lIns="0" tIns="0" rIns="0" bIns="0" rtlCol="0" anchor="ctr"/>
-          <a:lstStyle/>
-          <a:p>
-            <a:pPr indent="0" marL="0">
-              <a:buNone/>
-            </a:pPr>
-            <a:r>
-              <a:rPr lang="en-US" sz="1100" b="1" dirty="0">
-                <a:solidFill>
-                  <a:srgbClr val="0A1F44"/>
-                </a:solidFill>
-                <a:latin typeface="Inter" pitchFamily="34" charset="0"/>
-                <a:ea typeface="Inter" pitchFamily="34" charset="-122"/>
-                <a:cs typeface="Inter" pitchFamily="34" charset="-120"/>
-              </a:rPr>
-              <a:t>The fixed $120M</a:t>
-            </a:r>
-            <a:endParaRPr lang="en-US" sz="1100" dirty="0"/>
-          </a:p>
-          <a:p>
-            <a:pPr indent="0" marL="0">
-              <a:buNone/>
-            </a:pPr>
-            <a:r>
-              <a:rPr lang="en-US" sz="850" dirty="0">
-                <a:solidFill>
-                  <a:srgbClr val="64748B"/>
-                </a:solidFill>
-                <a:latin typeface="Inter" pitchFamily="34" charset="0"/>
-                <a:ea typeface="Inter" pitchFamily="34" charset="-122"/>
-                <a:cs typeface="Inter" pitchFamily="34" charset="-120"/>
-              </a:rPr>
-              <a:t>$0 new money (Exhibit G)</a:t>
-            </a:r>
-            <a:endParaRPr lang="en-US" sz="1100" dirty="0"/>
-          </a:p>
-        </p:txBody>
-      </p:sp>
-      <p:sp>
-        <p:nvSpPr>
-          <p:cNvPr id="124" name="Shape 112"/>
-          <p:cNvSpPr/>
-          <p:nvPr/>
-        </p:nvSpPr>
-        <p:spPr>
-          <a:xfrm>
-            <a:off x="2057400" y="5788152"/>
-            <a:ext cx="3618738" cy="292608"/>
-          </a:xfrm>
-          <a:prstGeom prst="rect">
-            <a:avLst/>
-          </a:prstGeom>
-          <a:solidFill>
-            <a:srgbClr val="E2E8F0"/>
-          </a:solidFill>
-          <a:ln w="6350">
-            <a:solidFill>
-              <a:srgbClr val="E2E8F0"/>
-            </a:solidFill>
-            <a:prstDash val="solid"/>
-          </a:ln>
-        </p:spPr>
-      </p:sp>
-      <p:sp>
-        <p:nvSpPr>
-          <p:cNvPr id="125" name="Text 113"/>
-          <p:cNvSpPr txBox="1"/>
-          <p:nvPr/>
-        </p:nvSpPr>
-        <p:spPr>
-          <a:xfrm>
-            <a:off x="2084832" y="5788152"/>
-            <a:ext cx="3591306" cy="292608"/>
-          </a:xfrm>
-          <a:prstGeom prst="rect">
-            <a:avLst/>
-          </a:prstGeom>
-          <a:noFill/>
-          <a:ln/>
-        </p:spPr>
-        <p:txBody>
-          <a:bodyPr wrap="square" lIns="0" tIns="0" rIns="0" bIns="0" rtlCol="0" anchor="ctr">
-            <a:normAutofit/>
-          </a:bodyPr>
-          <a:lstStyle/>
-          <a:p>
-            <a:pPr indent="0" marL="0">
-              <a:buNone/>
-            </a:pPr>
-            <a:r>
-              <a:rPr lang="en-US" sz="800" b="1" dirty="0">
-                <a:solidFill>
-                  <a:srgbClr val="334155"/>
-                </a:solidFill>
-                <a:latin typeface="Inter" pitchFamily="34" charset="0"/>
-                <a:ea typeface="Inter" pitchFamily="34" charset="-122"/>
-                <a:cs typeface="Inter" pitchFamily="34" charset="-120"/>
-              </a:rPr>
-              <a:t>Prospecting $58M</a:t>
-            </a:r>
-            <a:endParaRPr lang="en-US" sz="800" dirty="0"/>
-          </a:p>
-        </p:txBody>
-      </p:sp>
-      <p:sp>
-        <p:nvSpPr>
-          <p:cNvPr id="126" name="Text 114"/>
-          <p:cNvSpPr txBox="1"/>
-          <p:nvPr/>
-        </p:nvSpPr>
-        <p:spPr>
-          <a:xfrm>
-            <a:off x="2057400" y="6089904"/>
-            <a:ext cx="3646170" cy="182880"/>
-          </a:xfrm>
-          <a:prstGeom prst="rect">
-            <a:avLst/>
-          </a:prstGeom>
-          <a:noFill/>
-          <a:ln/>
-        </p:spPr>
-        <p:txBody>
-          <a:bodyPr wrap="square" lIns="0" tIns="0" rIns="0" bIns="0" rtlCol="0" anchor="t"/>
-          <a:lstStyle/>
-          <a:p>
-            <a:pPr algn="l" indent="0" marL="0">
-              <a:buNone/>
-            </a:pPr>
-            <a:r>
-              <a:rPr lang="en-US" sz="750" dirty="0">
-                <a:solidFill>
-                  <a:srgbClr val="64748B"/>
-                </a:solidFill>
-                <a:latin typeface="Inter" pitchFamily="34" charset="0"/>
-                <a:ea typeface="Inter" pitchFamily="34" charset="-122"/>
-                <a:cs typeface="Inter" pitchFamily="34" charset="-120"/>
-              </a:rPr>
-              <a:t>unchanged</a:t>
-            </a:r>
-            <a:endParaRPr lang="en-US" sz="750" dirty="0"/>
-          </a:p>
-        </p:txBody>
-      </p:sp>
-      <p:sp>
-        <p:nvSpPr>
-          <p:cNvPr id="127" name="Shape 115"/>
-          <p:cNvSpPr/>
-          <p:nvPr/>
-        </p:nvSpPr>
-        <p:spPr>
-          <a:xfrm>
-            <a:off x="5703570" y="5788152"/>
-            <a:ext cx="1355598" cy="292608"/>
-          </a:xfrm>
-          <a:prstGeom prst="rect">
-            <a:avLst/>
-          </a:prstGeom>
-          <a:solidFill>
-            <a:srgbClr val="E2E8F0"/>
-          </a:solidFill>
-          <a:ln w="6350">
-            <a:solidFill>
-              <a:srgbClr val="E2E8F0"/>
-            </a:solidFill>
-            <a:prstDash val="solid"/>
-          </a:ln>
-        </p:spPr>
-      </p:sp>
-      <p:sp>
-        <p:nvSpPr>
-          <p:cNvPr id="128" name="Text 116"/>
-          <p:cNvSpPr txBox="1"/>
-          <p:nvPr/>
-        </p:nvSpPr>
-        <p:spPr>
-          <a:xfrm>
-            <a:off x="5731002" y="5788152"/>
-            <a:ext cx="1328166" cy="292608"/>
-          </a:xfrm>
-          <a:prstGeom prst="rect">
-            <a:avLst/>
-          </a:prstGeom>
-          <a:noFill/>
-          <a:ln/>
-        </p:spPr>
-        <p:txBody>
-          <a:bodyPr wrap="square" lIns="0" tIns="0" rIns="0" bIns="0" rtlCol="0" anchor="ctr">
-            <a:normAutofit/>
-          </a:bodyPr>
-          <a:lstStyle/>
-          <a:p>
-            <a:pPr indent="0" marL="0">
-              <a:buNone/>
-            </a:pPr>
-            <a:r>
-              <a:rPr lang="en-US" sz="800" b="1" dirty="0">
-                <a:solidFill>
-                  <a:srgbClr val="334155"/>
-                </a:solidFill>
-                <a:latin typeface="Inter" pitchFamily="34" charset="0"/>
-                <a:ea typeface="Inter" pitchFamily="34" charset="-122"/>
-                <a:cs typeface="Inter" pitchFamily="34" charset="-120"/>
-              </a:rPr>
-              <a:t>Search $22M</a:t>
-            </a:r>
-            <a:endParaRPr lang="en-US" sz="800" dirty="0"/>
-          </a:p>
-        </p:txBody>
-      </p:sp>
-      <p:sp>
-        <p:nvSpPr>
-          <p:cNvPr id="129" name="Text 117"/>
-          <p:cNvSpPr txBox="1"/>
-          <p:nvPr/>
-        </p:nvSpPr>
-        <p:spPr>
-          <a:xfrm>
-            <a:off x="5703570" y="6089904"/>
-            <a:ext cx="1383030" cy="182880"/>
-          </a:xfrm>
-          <a:prstGeom prst="rect">
-            <a:avLst/>
-          </a:prstGeom>
-          <a:noFill/>
-          <a:ln/>
-        </p:spPr>
-        <p:txBody>
-          <a:bodyPr wrap="square" lIns="0" tIns="0" rIns="0" bIns="0" rtlCol="0" anchor="t"/>
-          <a:lstStyle/>
-          <a:p>
-            <a:pPr algn="l" indent="0" marL="0">
-              <a:buNone/>
-            </a:pPr>
-            <a:r>
-              <a:rPr lang="en-US" sz="750" dirty="0">
-                <a:solidFill>
-                  <a:srgbClr val="64748B"/>
-                </a:solidFill>
-                <a:latin typeface="Inter" pitchFamily="34" charset="0"/>
-                <a:ea typeface="Inter" pitchFamily="34" charset="-122"/>
-                <a:cs typeface="Inter" pitchFamily="34" charset="-120"/>
-              </a:rPr>
-              <a:t>unchanged</a:t>
-            </a:r>
-            <a:endParaRPr lang="en-US" sz="750" dirty="0"/>
-          </a:p>
-        </p:txBody>
-      </p:sp>
-      <p:sp>
-        <p:nvSpPr>
-          <p:cNvPr id="130" name="Shape 118"/>
-          <p:cNvSpPr/>
-          <p:nvPr/>
-        </p:nvSpPr>
-        <p:spPr>
-          <a:xfrm>
-            <a:off x="7086600" y="5788152"/>
-            <a:ext cx="978408" cy="292608"/>
-          </a:xfrm>
-          <a:prstGeom prst="rect">
-            <a:avLst/>
-          </a:prstGeom>
-          <a:solidFill>
-            <a:srgbClr val="CBD5E1"/>
-          </a:solidFill>
-          <a:ln w="6350">
-            <a:solidFill>
-              <a:srgbClr val="CBD5E1"/>
-            </a:solidFill>
-            <a:prstDash val="solid"/>
-          </a:ln>
-        </p:spPr>
-      </p:sp>
-      <p:sp>
-        <p:nvSpPr>
-          <p:cNvPr id="131" name="Text 119"/>
-          <p:cNvSpPr txBox="1"/>
-          <p:nvPr/>
-        </p:nvSpPr>
-        <p:spPr>
-          <a:xfrm>
-            <a:off x="7114032" y="5788152"/>
-            <a:ext cx="950976" cy="292608"/>
-          </a:xfrm>
-          <a:prstGeom prst="rect">
-            <a:avLst/>
-          </a:prstGeom>
-          <a:noFill/>
-          <a:ln/>
-        </p:spPr>
-        <p:txBody>
-          <a:bodyPr wrap="square" lIns="0" tIns="0" rIns="0" bIns="0" rtlCol="0" anchor="ctr">
-            <a:normAutofit/>
-          </a:bodyPr>
-          <a:lstStyle/>
-          <a:p>
-            <a:pPr indent="0" marL="0">
-              <a:buNone/>
-            </a:pPr>
-            <a:r>
-              <a:rPr lang="en-US" sz="800" b="1" dirty="0">
-                <a:solidFill>
-                  <a:srgbClr val="0A1F44"/>
-                </a:solidFill>
-                <a:latin typeface="Inter" pitchFamily="34" charset="0"/>
-                <a:ea typeface="Inter" pitchFamily="34" charset="-122"/>
-                <a:cs typeface="Inter" pitchFamily="34" charset="-120"/>
-              </a:rPr>
-              <a:t>Influencer $16M</a:t>
-            </a:r>
-            <a:endParaRPr lang="en-US" sz="800" dirty="0"/>
-          </a:p>
-        </p:txBody>
-      </p:sp>
-      <p:sp>
-        <p:nvSpPr>
-          <p:cNvPr id="132" name="Text 120"/>
-          <p:cNvSpPr txBox="1"/>
-          <p:nvPr/>
-        </p:nvSpPr>
-        <p:spPr>
-          <a:xfrm>
-            <a:off x="7086600" y="6089904"/>
-            <a:ext cx="1188720" cy="182880"/>
-          </a:xfrm>
-          <a:prstGeom prst="rect">
-            <a:avLst/>
-          </a:prstGeom>
-          <a:noFill/>
-          <a:ln/>
-        </p:spPr>
-        <p:txBody>
-          <a:bodyPr wrap="square" lIns="0" tIns="0" rIns="0" bIns="0" rtlCol="0" anchor="t"/>
-          <a:lstStyle/>
-          <a:p>
-            <a:pPr algn="l" indent="0" marL="0">
-              <a:buNone/>
-            </a:pPr>
-            <a:r>
-              <a:rPr lang="en-US" sz="750" dirty="0">
-                <a:solidFill>
-                  <a:srgbClr val="64748B"/>
-                </a:solidFill>
-                <a:latin typeface="Inter" pitchFamily="34" charset="0"/>
-                <a:ea typeface="Inter" pitchFamily="34" charset="-122"/>
-                <a:cs typeface="Inter" pitchFamily="34" charset="-120"/>
-              </a:rPr>
-              <a:t>briefs → proof</a:t>
-            </a:r>
-            <a:endParaRPr lang="en-US" sz="750" dirty="0"/>
-          </a:p>
-        </p:txBody>
-      </p:sp>
-      <p:sp>
-        <p:nvSpPr>
-          <p:cNvPr id="133" name="Shape 121"/>
-          <p:cNvSpPr/>
-          <p:nvPr/>
-        </p:nvSpPr>
-        <p:spPr>
-          <a:xfrm>
-            <a:off x="8092440" y="5788152"/>
-            <a:ext cx="852678" cy="292608"/>
-          </a:xfrm>
-          <a:prstGeom prst="rect">
-            <a:avLst/>
-          </a:prstGeom>
-          <a:solidFill>
-            <a:srgbClr val="1D4ED8"/>
-          </a:solidFill>
-          <a:ln w="6350">
-            <a:solidFill>
-              <a:srgbClr val="1D4ED8"/>
-            </a:solidFill>
-            <a:prstDash val="solid"/>
-          </a:ln>
-        </p:spPr>
-      </p:sp>
-      <p:sp>
-        <p:nvSpPr>
-          <p:cNvPr id="134" name="Text 122"/>
-          <p:cNvSpPr txBox="1"/>
-          <p:nvPr/>
-        </p:nvSpPr>
-        <p:spPr>
-          <a:xfrm>
-            <a:off x="8119872" y="5788152"/>
-            <a:ext cx="825246" cy="292608"/>
-          </a:xfrm>
-          <a:prstGeom prst="rect">
-            <a:avLst/>
-          </a:prstGeom>
-          <a:noFill/>
-          <a:ln/>
-        </p:spPr>
-        <p:txBody>
-          <a:bodyPr wrap="square" lIns="0" tIns="0" rIns="0" bIns="0" rtlCol="0" anchor="ctr">
-            <a:normAutofit/>
-          </a:bodyPr>
-          <a:lstStyle/>
-          <a:p>
-            <a:pPr indent="0" marL="0">
-              <a:buNone/>
-            </a:pPr>
-            <a:r>
-              <a:rPr lang="en-US" sz="800" b="1" dirty="0">
-                <a:solidFill>
-                  <a:srgbClr val="FFFFFF"/>
-                </a:solidFill>
-                <a:latin typeface="Inter" pitchFamily="34" charset="0"/>
-                <a:ea typeface="Inter" pitchFamily="34" charset="-122"/>
-                <a:cs typeface="Inter" pitchFamily="34" charset="-120"/>
-              </a:rPr>
-              <a:t>Retarg. $14M</a:t>
-            </a:r>
-            <a:endParaRPr lang="en-US" sz="800" dirty="0"/>
-          </a:p>
-        </p:txBody>
-      </p:sp>
-      <p:sp>
-        <p:nvSpPr>
-          <p:cNvPr id="135" name="Text 123"/>
-          <p:cNvSpPr txBox="1"/>
-          <p:nvPr/>
-        </p:nvSpPr>
-        <p:spPr>
-          <a:xfrm>
-            <a:off x="8092440" y="6089904"/>
-            <a:ext cx="1188720" cy="182880"/>
-          </a:xfrm>
-          <a:prstGeom prst="rect">
-            <a:avLst/>
-          </a:prstGeom>
-          <a:noFill/>
-          <a:ln/>
-        </p:spPr>
-        <p:txBody>
-          <a:bodyPr wrap="square" lIns="0" tIns="0" rIns="0" bIns="0" rtlCol="0" anchor="t"/>
-          <a:lstStyle/>
-          <a:p>
-            <a:pPr algn="l" indent="0" marL="0">
-              <a:buNone/>
-            </a:pPr>
-            <a:r>
-              <a:rPr lang="en-US" sz="750" b="1" dirty="0">
-                <a:solidFill>
-                  <a:srgbClr val="1D4ED8"/>
-                </a:solidFill>
-                <a:latin typeface="Inter" pitchFamily="34" charset="0"/>
-                <a:ea typeface="Inter" pitchFamily="34" charset="-122"/>
-                <a:cs typeface="Inter" pitchFamily="34" charset="-120"/>
-              </a:rPr>
-              <a:t>lever 3</a:t>
-            </a:r>
-            <a:endParaRPr lang="en-US" sz="750" dirty="0"/>
-          </a:p>
-        </p:txBody>
-      </p:sp>
-      <p:sp>
-        <p:nvSpPr>
-          <p:cNvPr id="136" name="Shape 124"/>
-          <p:cNvSpPr/>
-          <p:nvPr/>
-        </p:nvSpPr>
-        <p:spPr>
-          <a:xfrm>
-            <a:off x="8972550" y="5788152"/>
-            <a:ext cx="349758" cy="292608"/>
-          </a:xfrm>
-          <a:prstGeom prst="rect">
-            <a:avLst/>
+          <p:cNvPr id="123" name="Shape 111"/>
+          <p:cNvSpPr/>
+          <p:nvPr/>
+        </p:nvSpPr>
+        <p:spPr>
+          <a:xfrm>
+            <a:off x="502920" y="5788152"/>
+            <a:ext cx="1783080" cy="603504"/>
+          </a:xfrm>
+          <a:prstGeom prst="roundRect">
+            <a:avLst>
+              <a:gd name="adj" fmla="val 9091"/>
+            </a:avLst>
           </a:prstGeom>
           <a:solidFill>
             <a:srgbClr val="0A1F44"/>
@@ -52103,32 +51629,30 @@
       </p:sp>
       <p:sp>
         <p:nvSpPr>
-          <p:cNvPr id="137" name="Text 125"/>
-          <p:cNvSpPr txBox="1"/>
-          <p:nvPr/>
-        </p:nvSpPr>
-        <p:spPr>
-          <a:xfrm>
-            <a:off x="8999982" y="5788152"/>
-            <a:ext cx="322326" cy="292608"/>
-          </a:xfrm>
-          <a:prstGeom prst="rect">
-            <a:avLst/>
-          </a:prstGeom>
-          <a:noFill/>
-          <a:ln/>
-        </p:spPr>
-        <p:txBody>
-          <a:bodyPr wrap="square" lIns="0" tIns="0" rIns="0" bIns="0" rtlCol="0" anchor="ctr">
-            <a:normAutofit/>
-          </a:bodyPr>
-          <a:lstStyle/>
-          <a:p>
-            <a:pPr indent="0" marL="0">
-              <a:buNone/>
-            </a:pPr>
-            <a:r>
-              <a:rPr lang="en-US" sz="650" b="1" dirty="0">
+          <p:cNvPr id="124" name="Text 112"/>
+          <p:cNvSpPr txBox="1"/>
+          <p:nvPr/>
+        </p:nvSpPr>
+        <p:spPr>
+          <a:xfrm>
+            <a:off x="603504" y="5788152"/>
+            <a:ext cx="1645920" cy="603504"/>
+          </a:xfrm>
+          <a:prstGeom prst="rect">
+            <a:avLst/>
+          </a:prstGeom>
+          <a:noFill/>
+          <a:ln/>
+        </p:spPr>
+        <p:txBody>
+          <a:bodyPr wrap="square" lIns="0" tIns="0" rIns="0" bIns="0" rtlCol="0" anchor="ctr"/>
+          <a:lstStyle/>
+          <a:p>
+            <a:pPr indent="0" marL="0">
+              <a:buNone/>
+            </a:pPr>
+            <a:r>
+              <a:rPr lang="en-US" sz="1100" b="1" dirty="0">
                 <a:solidFill>
                   <a:srgbClr val="FFFFFF"/>
                 </a:solidFill>
@@ -52136,90 +51660,337 @@
                 <a:ea typeface="Inter" pitchFamily="34" charset="-122"/>
                 <a:cs typeface="Inter" pitchFamily="34" charset="-120"/>
               </a:rPr>
-              <a:t>Owned $6M</a:t>
-            </a:r>
-            <a:endParaRPr lang="en-US" sz="650" dirty="0"/>
-          </a:p>
-        </p:txBody>
-      </p:sp>
-      <p:sp>
-        <p:nvSpPr>
-          <p:cNvPr id="138" name="Text 126"/>
-          <p:cNvSpPr txBox="1"/>
-          <p:nvPr/>
-        </p:nvSpPr>
-        <p:spPr>
-          <a:xfrm>
-            <a:off x="8618220" y="6089904"/>
-            <a:ext cx="731520" cy="182880"/>
-          </a:xfrm>
-          <a:prstGeom prst="rect">
-            <a:avLst/>
-          </a:prstGeom>
-          <a:noFill/>
-          <a:ln/>
-        </p:spPr>
-        <p:txBody>
-          <a:bodyPr wrap="square" lIns="0" tIns="0" rIns="0" bIns="0" rtlCol="0" anchor="t"/>
-          <a:lstStyle/>
-          <a:p>
-            <a:pPr algn="r" indent="0" marL="0">
-              <a:buNone/>
-            </a:pPr>
-            <a:r>
-              <a:rPr lang="en-US" sz="750" b="1" dirty="0">
-                <a:solidFill>
-                  <a:srgbClr val="1D4ED8"/>
-                </a:solidFill>
-                <a:latin typeface="Inter" pitchFamily="34" charset="0"/>
-                <a:ea typeface="Inter" pitchFamily="34" charset="-122"/>
-                <a:cs typeface="Inter" pitchFamily="34" charset="-120"/>
-              </a:rPr>
-              <a:t>levers 1–2</a:t>
-            </a:r>
-            <a:endParaRPr lang="en-US" sz="750" dirty="0"/>
-          </a:p>
-        </p:txBody>
-      </p:sp>
-      <p:sp>
-        <p:nvSpPr>
-          <p:cNvPr id="139" name="Shape 127"/>
-          <p:cNvSpPr/>
-          <p:nvPr/>
-        </p:nvSpPr>
-        <p:spPr>
-          <a:xfrm>
-            <a:off x="9349740" y="5788152"/>
-            <a:ext cx="224028" cy="292608"/>
-          </a:xfrm>
-          <a:prstGeom prst="rect">
+              <a:t>Rented → owned</a:t>
+            </a:r>
+            <a:endParaRPr lang="en-US" sz="1200" dirty="0"/>
+          </a:p>
+          <a:p>
+            <a:pPr indent="0" marL="0">
+              <a:buNone/>
+            </a:pPr>
+            <a:r>
+              <a:rPr lang="en-US" sz="850" dirty="0">
+                <a:solidFill>
+                  <a:srgbClr val="C7D7F5"/>
+                </a:solidFill>
+                <a:latin typeface="Inter" pitchFamily="34" charset="0"/>
+                <a:ea typeface="Inter" pitchFamily="34" charset="-122"/>
+                <a:cs typeface="Inter" pitchFamily="34" charset="-120"/>
+              </a:rPr>
+              <a:t>inside the fixed $120M</a:t>
+            </a:r>
+            <a:endParaRPr lang="en-US" sz="1200" dirty="0"/>
+          </a:p>
+        </p:txBody>
+      </p:sp>
+      <p:sp>
+        <p:nvSpPr>
+          <p:cNvPr id="125" name="Shape 113"/>
+          <p:cNvSpPr/>
+          <p:nvPr/>
+        </p:nvSpPr>
+        <p:spPr>
+          <a:xfrm>
+            <a:off x="2377440" y="5788152"/>
+            <a:ext cx="2578608" cy="603504"/>
+          </a:xfrm>
+          <a:prstGeom prst="chevron">
             <a:avLst/>
           </a:prstGeom>
           <a:solidFill>
-            <a:srgbClr val="F1F5F9"/>
+            <a:srgbClr val="1D4ED8"/>
           </a:solidFill>
-          <a:ln w="6350">
-            <a:solidFill>
-              <a:srgbClr val="F1F5F9"/>
-            </a:solidFill>
-            <a:prstDash val="solid"/>
-          </a:ln>
-        </p:spPr>
-      </p:sp>
-      <p:sp>
-        <p:nvSpPr>
-          <p:cNvPr id="140" name="Shape 128"/>
-          <p:cNvSpPr/>
-          <p:nvPr/>
-        </p:nvSpPr>
-        <p:spPr>
-          <a:xfrm>
-            <a:off x="9747504" y="5751576"/>
-            <a:ext cx="1938528" cy="548640"/>
+          <a:ln w="12700">
+            <a:solidFill>
+              <a:srgbClr val="FFFFFF"/>
+            </a:solidFill>
+            <a:prstDash val="solid"/>
+          </a:ln>
+        </p:spPr>
+      </p:sp>
+      <p:sp>
+        <p:nvSpPr>
+          <p:cNvPr id="126" name="Text 114"/>
+          <p:cNvSpPr txBox="1"/>
+          <p:nvPr/>
+        </p:nvSpPr>
+        <p:spPr>
+          <a:xfrm>
+            <a:off x="2688336" y="5788152"/>
+            <a:ext cx="2029968" cy="603504"/>
+          </a:xfrm>
+          <a:prstGeom prst="rect">
+            <a:avLst/>
+          </a:prstGeom>
+          <a:noFill/>
+          <a:ln/>
+        </p:spPr>
+        <p:txBody>
+          <a:bodyPr wrap="square" lIns="0" tIns="0" rIns="0" bIns="0" rtlCol="0" anchor="ctr"/>
+          <a:lstStyle/>
+          <a:p>
+            <a:pPr indent="0" marL="0">
+              <a:buNone/>
+            </a:pPr>
+            <a:r>
+              <a:rPr lang="en-US" sz="800" b="1" dirty="0">
+                <a:solidFill>
+                  <a:srgbClr val="DCE7FB"/>
+                </a:solidFill>
+                <a:latin typeface="Inter" pitchFamily="34" charset="0"/>
+                <a:ea typeface="Inter" pitchFamily="34" charset="-122"/>
+                <a:cs typeface="Inter" pitchFamily="34" charset="-120"/>
+              </a:rPr>
+              <a:t>After day 90</a:t>
+            </a:r>
+            <a:endParaRPr lang="en-US" sz="1200" dirty="0"/>
+          </a:p>
+          <a:p>
+            <a:pPr indent="0" marL="0">
+              <a:buNone/>
+            </a:pPr>
+            <a:r>
+              <a:rPr lang="en-US" sz="1000" b="1" dirty="0">
+                <a:solidFill>
+                  <a:srgbClr val="FFFFFF"/>
+                </a:solidFill>
+                <a:latin typeface="Inter" pitchFamily="34" charset="0"/>
+                <a:ea typeface="Inter" pitchFamily="34" charset="-122"/>
+                <a:cs typeface="Inter" pitchFamily="34" charset="-120"/>
+              </a:rPr>
+              <a:t>Retargeting → owned</a:t>
+            </a:r>
+            <a:endParaRPr lang="en-US" sz="1200" dirty="0"/>
+          </a:p>
+          <a:p>
+            <a:pPr indent="0" marL="0">
+              <a:buNone/>
+            </a:pPr>
+            <a:r>
+              <a:rPr lang="en-US" sz="850" dirty="0">
+                <a:solidFill>
+                  <a:srgbClr val="FFFFFF"/>
+                </a:solidFill>
+                <a:latin typeface="Inter" pitchFamily="34" charset="0"/>
+                <a:ea typeface="Inter" pitchFamily="34" charset="-122"/>
+                <a:cs typeface="Inter" pitchFamily="34" charset="-120"/>
+              </a:rPr>
+              <a:t>up to $3.4M (24.5% × $14M)</a:t>
+            </a:r>
+            <a:endParaRPr lang="en-US" sz="1200" dirty="0"/>
+          </a:p>
+        </p:txBody>
+      </p:sp>
+      <p:sp>
+        <p:nvSpPr>
+          <p:cNvPr id="127" name="Shape 115"/>
+          <p:cNvSpPr/>
+          <p:nvPr/>
+        </p:nvSpPr>
+        <p:spPr>
+          <a:xfrm>
+            <a:off x="4919472" y="5788152"/>
+            <a:ext cx="2578608" cy="603504"/>
+          </a:xfrm>
+          <a:prstGeom prst="chevron">
+            <a:avLst/>
+          </a:prstGeom>
+          <a:solidFill>
+            <a:srgbClr val="2563EB"/>
+          </a:solidFill>
+          <a:ln w="12700">
+            <a:solidFill>
+              <a:srgbClr val="FFFFFF"/>
+            </a:solidFill>
+            <a:prstDash val="solid"/>
+          </a:ln>
+        </p:spPr>
+      </p:sp>
+      <p:sp>
+        <p:nvSpPr>
+          <p:cNvPr id="128" name="Text 116"/>
+          <p:cNvSpPr txBox="1"/>
+          <p:nvPr/>
+        </p:nvSpPr>
+        <p:spPr>
+          <a:xfrm>
+            <a:off x="5230368" y="5788152"/>
+            <a:ext cx="2029968" cy="603504"/>
+          </a:xfrm>
+          <a:prstGeom prst="rect">
+            <a:avLst/>
+          </a:prstGeom>
+          <a:noFill/>
+          <a:ln/>
+        </p:spPr>
+        <p:txBody>
+          <a:bodyPr wrap="square" lIns="0" tIns="0" rIns="0" bIns="0" rtlCol="0" anchor="ctr"/>
+          <a:lstStyle/>
+          <a:p>
+            <a:pPr indent="0" marL="0">
+              <a:buNone/>
+            </a:pPr>
+            <a:r>
+              <a:rPr lang="en-US" sz="800" b="1" dirty="0">
+                <a:solidFill>
+                  <a:srgbClr val="DCE7FB"/>
+                </a:solidFill>
+                <a:latin typeface="Inter" pitchFamily="34" charset="0"/>
+                <a:ea typeface="Inter" pitchFamily="34" charset="-122"/>
+                <a:cs typeface="Inter" pitchFamily="34" charset="-120"/>
+              </a:rPr>
+              <a:t>Months 4–6</a:t>
+            </a:r>
+            <a:endParaRPr lang="en-US" sz="1200" dirty="0"/>
+          </a:p>
+          <a:p>
+            <a:pPr indent="0" marL="0">
+              <a:buNone/>
+            </a:pPr>
+            <a:r>
+              <a:rPr lang="en-US" sz="1000" b="1" dirty="0">
+                <a:solidFill>
+                  <a:srgbClr val="FFFFFF"/>
+                </a:solidFill>
+                <a:latin typeface="Inter" pitchFamily="34" charset="0"/>
+                <a:ea typeface="Inter" pitchFamily="34" charset="-122"/>
+                <a:cs typeface="Inter" pitchFamily="34" charset="-120"/>
+              </a:rPr>
+              <a:t>Branded search → owned</a:t>
+            </a:r>
+            <a:endParaRPr lang="en-US" sz="1200" dirty="0"/>
+          </a:p>
+          <a:p>
+            <a:pPr indent="0" marL="0">
+              <a:buNone/>
+            </a:pPr>
+            <a:r>
+              <a:rPr lang="en-US" sz="850" dirty="0">
+                <a:solidFill>
+                  <a:srgbClr val="FFFFFF"/>
+                </a:solidFill>
+                <a:latin typeface="Inter" pitchFamily="34" charset="0"/>
+                <a:ea typeface="Inter" pitchFamily="34" charset="-122"/>
+                <a:cs typeface="Inter" pitchFamily="34" charset="-120"/>
+              </a:rPr>
+              <a:t>test ~$6.2M (South 28% × $22M)</a:t>
+            </a:r>
+            <a:endParaRPr lang="en-US" sz="1200" dirty="0"/>
+          </a:p>
+        </p:txBody>
+      </p:sp>
+      <p:sp>
+        <p:nvSpPr>
+          <p:cNvPr id="129" name="Shape 117"/>
+          <p:cNvSpPr/>
+          <p:nvPr/>
+        </p:nvSpPr>
+        <p:spPr>
+          <a:xfrm>
+            <a:off x="7461504" y="5788152"/>
+            <a:ext cx="2578608" cy="603504"/>
+          </a:xfrm>
+          <a:prstGeom prst="chevron">
+            <a:avLst/>
+          </a:prstGeom>
+          <a:solidFill>
+            <a:srgbClr val="60A5FA"/>
+          </a:solidFill>
+          <a:ln w="12700">
+            <a:solidFill>
+              <a:srgbClr val="FFFFFF"/>
+            </a:solidFill>
+            <a:prstDash val="solid"/>
+          </a:ln>
+        </p:spPr>
+      </p:sp>
+      <p:sp>
+        <p:nvSpPr>
+          <p:cNvPr id="130" name="Text 118"/>
+          <p:cNvSpPr txBox="1"/>
+          <p:nvPr/>
+        </p:nvSpPr>
+        <p:spPr>
+          <a:xfrm>
+            <a:off x="7772400" y="5788152"/>
+            <a:ext cx="2029968" cy="603504"/>
+          </a:xfrm>
+          <a:prstGeom prst="rect">
+            <a:avLst/>
+          </a:prstGeom>
+          <a:noFill/>
+          <a:ln/>
+        </p:spPr>
+        <p:txBody>
+          <a:bodyPr wrap="square" lIns="0" tIns="0" rIns="0" bIns="0" rtlCol="0" anchor="ctr"/>
+          <a:lstStyle/>
+          <a:p>
+            <a:pPr indent="0" marL="0">
+              <a:buNone/>
+            </a:pPr>
+            <a:r>
+              <a:rPr lang="en-US" sz="800" b="1" dirty="0">
+                <a:solidFill>
+                  <a:srgbClr val="DCE7FB"/>
+                </a:solidFill>
+                <a:latin typeface="Inter" pitchFamily="34" charset="0"/>
+                <a:ea typeface="Inter" pitchFamily="34" charset="-122"/>
+                <a:cs typeface="Inter" pitchFamily="34" charset="-120"/>
+              </a:rPr>
+              <a:t>Months 7–9</a:t>
+            </a:r>
+            <a:endParaRPr lang="en-US" sz="1200" dirty="0"/>
+          </a:p>
+          <a:p>
+            <a:pPr indent="0" marL="0">
+              <a:buNone/>
+            </a:pPr>
+            <a:r>
+              <a:rPr lang="en-US" sz="1000" b="1" dirty="0">
+                <a:solidFill>
+                  <a:srgbClr val="FFFFFF"/>
+                </a:solidFill>
+                <a:latin typeface="Inter" pitchFamily="34" charset="0"/>
+                <a:ea typeface="Inter" pitchFamily="34" charset="-122"/>
+                <a:cs typeface="Inter" pitchFamily="34" charset="-120"/>
+              </a:rPr>
+              <a:t>Prospecting → owned</a:t>
+            </a:r>
+            <a:endParaRPr lang="en-US" sz="1200" dirty="0"/>
+          </a:p>
+          <a:p>
+            <a:pPr indent="0" marL="0">
+              <a:buNone/>
+            </a:pPr>
+            <a:r>
+              <a:rPr lang="en-US" sz="850" dirty="0">
+                <a:solidFill>
+                  <a:srgbClr val="FFFFFF"/>
+                </a:solidFill>
+                <a:latin typeface="Inter" pitchFamily="34" charset="0"/>
+                <a:ea typeface="Inter" pitchFamily="34" charset="-122"/>
+                <a:cs typeface="Inter" pitchFamily="34" charset="-120"/>
+              </a:rPr>
+              <a:t>test ~$16.2M (South 28% × $58M)</a:t>
+            </a:r>
+            <a:endParaRPr lang="en-US" sz="1200" dirty="0"/>
+          </a:p>
+        </p:txBody>
+      </p:sp>
+      <p:sp>
+        <p:nvSpPr>
+          <p:cNvPr id="131" name="Shape 119"/>
+          <p:cNvSpPr/>
+          <p:nvPr/>
+        </p:nvSpPr>
+        <p:spPr>
+          <a:xfrm>
+            <a:off x="9747504" y="5788152"/>
+            <a:ext cx="1938528" cy="603504"/>
           </a:xfrm>
           <a:prstGeom prst="roundRect">
             <a:avLst>
-              <a:gd name="adj" fmla="val 10000"/>
+              <a:gd name="adj" fmla="val 9091"/>
             </a:avLst>
           </a:prstGeom>
           <a:solidFill>
@@ -52235,14 +52006,14 @@
       </p:sp>
       <p:sp>
         <p:nvSpPr>
-          <p:cNvPr id="141" name="Text 129"/>
-          <p:cNvSpPr txBox="1"/>
-          <p:nvPr/>
-        </p:nvSpPr>
-        <p:spPr>
-          <a:xfrm>
-            <a:off x="9838944" y="5751576"/>
-            <a:ext cx="1801368" cy="548640"/>
+          <p:cNvPr id="132" name="Text 120"/>
+          <p:cNvSpPr txBox="1"/>
+          <p:nvPr/>
+        </p:nvSpPr>
+        <p:spPr>
+          <a:xfrm>
+            <a:off x="9838944" y="5788152"/>
+            <a:ext cx="1801368" cy="603504"/>
           </a:xfrm>
           <a:prstGeom prst="rect">
             <a:avLst/>
@@ -52258,6 +52029,20 @@
               <a:buNone/>
             </a:pPr>
             <a:r>
+              <a:rPr lang="en-US" sz="850" dirty="0">
+                <a:solidFill>
+                  <a:srgbClr val="0F172A"/>
+                </a:solidFill>
+                <a:latin typeface="Inter" pitchFamily="34" charset="0"/>
+                <a:ea typeface="Inter" pitchFamily="34" charset="-122"/>
+                <a:cs typeface="Inter" pitchFamily="34" charset="-120"/>
+              </a:rPr>
+              <a:t>Each step moves only </a:t>
+            </a:r>
+            <a:pPr indent="0" marL="0">
+              <a:buNone/>
+            </a:pPr>
+            <a:r>
               <a:rPr lang="en-US" sz="850" b="1" dirty="0">
                 <a:solidFill>
                   <a:srgbClr val="0A1F44"/>
@@ -52266,7 +52051,7 @@
                 <a:ea typeface="Inter" pitchFamily="34" charset="-122"/>
                 <a:cs typeface="Inter" pitchFamily="34" charset="-120"/>
               </a:rPr>
-              <a:t>Day 90: </a:t>
+              <a:t>what its holdout proves</a:t>
             </a:r>
             <a:pPr indent="0" marL="0">
               <a:buNone/>
@@ -52280,7 +52065,7 @@
                 <a:ea typeface="Inter" pitchFamily="34" charset="-122"/>
                 <a:cs typeface="Inter" pitchFamily="34" charset="-120"/>
               </a:rPr>
-              <a:t>scale, adjust or stop; any move across lines is sized by the holdout</a:t>
+              <a:t>; scale, adjust or stop</a:t>
             </a:r>
             <a:endParaRPr lang="en-US" sz="850" dirty="0"/>
           </a:p>
